--- a/reports/final_project_presentation.pptx
+++ b/reports/final_project_presentation.pptx
@@ -13,8 +13,6 @@
     <p:sldId id="261" r:id="rId12"/>
     <p:sldId id="262" r:id="rId13"/>
     <p:sldId id="263" r:id="rId14"/>
-    <p:sldId id="264" r:id="rId15"/>
-    <p:sldId id="265" r:id="rId16"/>
   </p:sldIdLst>
   <p:sldSz cx="12191695" cy="6858000" type="screen4x3"/>
   <p:notesSz cx="6858000" cy="9144000"/>
@@ -3983,7 +3981,7 @@
         <p:spPr>
           <a:xfrm>
             <a:off x="6108192" y="960120"/>
-            <a:ext cx="2514600" cy="2148840"/>
+            <a:ext cx="2505456" cy="2148840"/>
           </a:xfrm>
           <a:prstGeom prst="roundRect">
             <a:avLst/>
@@ -4028,7 +4026,7 @@
         <p:spPr>
           <a:xfrm>
             <a:off x="6108192" y="960120"/>
-            <a:ext cx="2514600" cy="73152"/>
+            <a:ext cx="2505456" cy="73152"/>
           </a:xfrm>
           <a:prstGeom prst="rect">
             <a:avLst/>
@@ -4071,7 +4069,7 @@
         <p:spPr>
           <a:xfrm>
             <a:off x="6236207" y="1078992"/>
-            <a:ext cx="2258568" cy="182880"/>
+            <a:ext cx="2249424" cy="182880"/>
           </a:xfrm>
           <a:prstGeom prst="rect">
             <a:avLst/>
@@ -4113,7 +4111,7 @@
                 </a:solidFill>
                 <a:latin typeface="Noto Sans CJK KR"/>
               </a:rPr>
-              <a:t>OBD/CAN Confusion</a:t>
+              <a:t>예측 결과</a:t>
             </a:r>
           </a:p>
         </p:txBody>
@@ -4134,7 +4132,7 @@
         </p:blipFill>
         <p:spPr>
           <a:xfrm>
-            <a:off x="6342888" y="1325880"/>
+            <a:off x="6338316" y="1325880"/>
             <a:ext cx="2045208" cy="1673352"/>
           </a:xfrm>
           <a:prstGeom prst="rect">
@@ -4151,7 +4149,7 @@
         <p:spPr>
           <a:xfrm>
             <a:off x="8887968" y="960120"/>
-            <a:ext cx="2084831" cy="2148840"/>
+            <a:ext cx="2505456" cy="2148840"/>
           </a:xfrm>
           <a:prstGeom prst="roundRect">
             <a:avLst/>
@@ -4196,7 +4194,7 @@
         <p:spPr>
           <a:xfrm>
             <a:off x="8887968" y="960120"/>
-            <a:ext cx="2084831" cy="73152"/>
+            <a:ext cx="2505456" cy="73152"/>
           </a:xfrm>
           <a:prstGeom prst="rect">
             <a:avLst/>
@@ -4239,7 +4237,7 @@
         <p:spPr>
           <a:xfrm>
             <a:off x="9015984" y="1078992"/>
-            <a:ext cx="1828799" cy="182880"/>
+            <a:ext cx="2249424" cy="182880"/>
           </a:xfrm>
           <a:prstGeom prst="rect">
             <a:avLst/>
@@ -4281,7 +4279,7 @@
                 </a:solidFill>
                 <a:latin typeface="Noto Sans CJK KR"/>
               </a:rPr>
-              <a:t>Feature Importance</a:t>
+              <a:t>판단 근거</a:t>
             </a:r>
           </a:p>
         </p:txBody>
@@ -4302,8 +4300,8 @@
         </p:blipFill>
         <p:spPr>
           <a:xfrm>
-            <a:off x="8997696" y="1522998"/>
-            <a:ext cx="1865376" cy="1279114"/>
+            <a:off x="8997696" y="1378784"/>
+            <a:ext cx="2286000" cy="1567542"/>
           </a:xfrm>
           <a:prstGeom prst="rect">
             <a:avLst/>
@@ -4319,7 +4317,7 @@
         <p:spPr>
           <a:xfrm>
             <a:off x="6108192" y="3383280"/>
-            <a:ext cx="3246120" cy="2011680"/>
+            <a:ext cx="5285232" cy="2011680"/>
           </a:xfrm>
           <a:prstGeom prst="roundRect">
             <a:avLst/>
@@ -4364,7 +4362,7 @@
         <p:spPr>
           <a:xfrm>
             <a:off x="6108192" y="3383280"/>
-            <a:ext cx="3246120" cy="73152"/>
+            <a:ext cx="5285232" cy="73152"/>
           </a:xfrm>
           <a:prstGeom prst="rect">
             <a:avLst/>
@@ -4407,7 +4405,7 @@
         <p:spPr>
           <a:xfrm>
             <a:off x="6236207" y="3502152"/>
-            <a:ext cx="2990087" cy="182880"/>
+            <a:ext cx="5029200" cy="182880"/>
           </a:xfrm>
           <a:prstGeom prst="rect">
             <a:avLst/>
@@ -4449,7 +4447,7 @@
                 </a:solidFill>
                 <a:latin typeface="Noto Sans CJK KR"/>
               </a:rPr>
-              <a:t>Maintenance Distribution</a:t>
+              <a:t>전처리 패턴</a:t>
             </a:r>
           </a:p>
         </p:txBody>
@@ -4470,2048 +4468,14 @@
         </p:blipFill>
         <p:spPr>
           <a:xfrm>
-            <a:off x="6217920" y="4101711"/>
-            <a:ext cx="3026663" cy="830848"/>
+            <a:off x="6217920" y="3821833"/>
+            <a:ext cx="5065776" cy="1390605"/>
           </a:xfrm>
           <a:prstGeom prst="rect">
             <a:avLst/>
           </a:prstGeom>
         </p:spPr>
       </p:pic>
-      <p:sp>
-        <p:nvSpPr>
-          <p:cNvPr id="30" name="Rounded Rectangle 29"/>
-          <p:cNvSpPr/>
-          <p:nvPr/>
-        </p:nvSpPr>
-        <p:spPr>
-          <a:xfrm>
-            <a:off x="9637776" y="3383280"/>
-            <a:ext cx="1335024" cy="2011680"/>
-          </a:xfrm>
-          <a:prstGeom prst="roundRect">
-            <a:avLst/>
-          </a:prstGeom>
-          <a:solidFill>
-            <a:srgbClr val="FFFFFF"/>
-          </a:solidFill>
-          <a:ln w="7620">
-            <a:solidFill>
-              <a:srgbClr val="E1E8F0"/>
-            </a:solidFill>
-          </a:ln>
-        </p:spPr>
-        <p:style>
-          <a:lnRef idx="1">
-            <a:schemeClr val="accent1"/>
-          </a:lnRef>
-          <a:fillRef idx="3">
-            <a:schemeClr val="accent1"/>
-          </a:fillRef>
-          <a:effectRef idx="2">
-            <a:schemeClr val="accent1"/>
-          </a:effectRef>
-          <a:fontRef idx="minor">
-            <a:schemeClr val="lt1"/>
-          </a:fontRef>
-        </p:style>
-        <p:txBody>
-          <a:bodyPr rtlCol="0" anchor="ctr"/>
-          <a:lstStyle/>
-          <a:p>
-            <a:pPr algn="ctr"/>
-          </a:p>
-        </p:txBody>
-      </p:sp>
-      <p:sp>
-        <p:nvSpPr>
-          <p:cNvPr id="31" name="Rectangle 30"/>
-          <p:cNvSpPr/>
-          <p:nvPr/>
-        </p:nvSpPr>
-        <p:spPr>
-          <a:xfrm>
-            <a:off x="9637776" y="3383280"/>
-            <a:ext cx="1335024" cy="73152"/>
-          </a:xfrm>
-          <a:prstGeom prst="rect">
-            <a:avLst/>
-          </a:prstGeom>
-          <a:solidFill>
-            <a:srgbClr val="7C3AED"/>
-          </a:solidFill>
-          <a:ln>
-            <a:noFill/>
-          </a:ln>
-        </p:spPr>
-        <p:style>
-          <a:lnRef idx="1">
-            <a:schemeClr val="accent1"/>
-          </a:lnRef>
-          <a:fillRef idx="3">
-            <a:schemeClr val="accent1"/>
-          </a:fillRef>
-          <a:effectRef idx="2">
-            <a:schemeClr val="accent1"/>
-          </a:effectRef>
-          <a:fontRef idx="minor">
-            <a:schemeClr val="lt1"/>
-          </a:fontRef>
-        </p:style>
-        <p:txBody>
-          <a:bodyPr rtlCol="0" anchor="ctr"/>
-          <a:lstStyle/>
-          <a:p>
-            <a:pPr algn="ctr"/>
-          </a:p>
-        </p:txBody>
-      </p:sp>
-      <p:sp>
-        <p:nvSpPr>
-          <p:cNvPr id="32" name="Rectangle 31"/>
-          <p:cNvSpPr/>
-          <p:nvPr/>
-        </p:nvSpPr>
-        <p:spPr>
-          <a:xfrm>
-            <a:off x="9765792" y="3502152"/>
-            <a:ext cx="1078992" cy="182880"/>
-          </a:xfrm>
-          <a:prstGeom prst="rect">
-            <a:avLst/>
-          </a:prstGeom>
-          <a:noFill/>
-          <a:ln>
-            <a:noFill/>
-          </a:ln>
-        </p:spPr>
-        <p:style>
-          <a:lnRef idx="1">
-            <a:schemeClr val="accent1"/>
-          </a:lnRef>
-          <a:fillRef idx="3">
-            <a:schemeClr val="accent1"/>
-          </a:fillRef>
-          <a:effectRef idx="2">
-            <a:schemeClr val="accent1"/>
-          </a:effectRef>
-          <a:fontRef idx="minor">
-            <a:schemeClr val="lt1"/>
-          </a:fontRef>
-        </p:style>
-        <p:txBody>
-          <a:bodyPr rtlCol="0" anchor="ctr" wrap="square" lIns="9144" rIns="9144" tIns="9144" bIns="9144">
-            <a:normAutofit/>
-          </a:bodyPr>
-          <a:lstStyle/>
-          <a:p>
-            <a:pPr algn="l">
-              <a:spcAft>
-                <a:spcPts val="200"/>
-              </a:spcAft>
-            </a:pPr>
-            <a:r>
-              <a:rPr sz="800" b="1">
-                <a:solidFill>
-                  <a:srgbClr val="606E80"/>
-                </a:solidFill>
-                <a:latin typeface="Noto Sans CJK KR"/>
-              </a:rPr>
-              <a:t>AI4I Confusion</a:t>
-            </a:r>
-          </a:p>
-        </p:txBody>
-      </p:sp>
-      <p:pic>
-        <p:nvPicPr>
-          <p:cNvPr id="33" name="Picture 32" descr="ai4i_confusion_matrix.png"/>
-          <p:cNvPicPr>
-            <a:picLocks noChangeAspect="1"/>
-          </p:cNvPicPr>
-          <p:nvPr/>
-        </p:nvPicPr>
-        <p:blipFill>
-          <a:blip r:embed="rId5"/>
-          <a:stretch>
-            <a:fillRect/>
-          </a:stretch>
-        </p:blipFill>
-        <p:spPr>
-          <a:xfrm>
-            <a:off x="9747503" y="4060767"/>
-            <a:ext cx="1115568" cy="912737"/>
-          </a:xfrm>
-          <a:prstGeom prst="rect">
-            <a:avLst/>
-          </a:prstGeom>
-        </p:spPr>
-      </p:pic>
-    </p:spTree>
-  </p:cSld>
-  <p:clrMapOvr>
-    <a:masterClrMapping/>
-  </p:clrMapOvr>
-</p:sld>
-</file>
-
-<file path=ppt/slides/slide10.xml><?xml version="1.0" encoding="utf-8"?>
-<p:sld xmlns:a="http://schemas.openxmlformats.org/drawingml/2006/main" xmlns:p="http://schemas.openxmlformats.org/presentationml/2006/main" xmlns:r="http://schemas.openxmlformats.org/officeDocument/2006/relationships">
-  <p:cSld>
-    <p:spTree>
-      <p:nvGrpSpPr>
-        <p:cNvPr id="1" name=""/>
-        <p:cNvGrpSpPr/>
-        <p:nvPr/>
-      </p:nvGrpSpPr>
-      <p:grpSpPr/>
-      <p:sp>
-        <p:nvSpPr>
-          <p:cNvPr id="2" name="Rectangle 1"/>
-          <p:cNvSpPr/>
-          <p:nvPr/>
-        </p:nvSpPr>
-        <p:spPr>
-          <a:xfrm>
-            <a:off x="0" y="0"/>
-            <a:ext cx="12191695" cy="6858000"/>
-          </a:xfrm>
-          <a:prstGeom prst="rect">
-            <a:avLst/>
-          </a:prstGeom>
-          <a:solidFill>
-            <a:srgbClr val="F7FBFF"/>
-          </a:solidFill>
-          <a:ln>
-            <a:noFill/>
-          </a:ln>
-        </p:spPr>
-        <p:style>
-          <a:lnRef idx="1">
-            <a:schemeClr val="accent1"/>
-          </a:lnRef>
-          <a:fillRef idx="3">
-            <a:schemeClr val="accent1"/>
-          </a:fillRef>
-          <a:effectRef idx="2">
-            <a:schemeClr val="accent1"/>
-          </a:effectRef>
-          <a:fontRef idx="minor">
-            <a:schemeClr val="lt1"/>
-          </a:fontRef>
-        </p:style>
-        <p:txBody>
-          <a:bodyPr rtlCol="0" anchor="ctr"/>
-          <a:lstStyle/>
-          <a:p>
-            <a:pPr algn="ctr"/>
-          </a:p>
-        </p:txBody>
-      </p:sp>
-      <p:sp>
-        <p:nvSpPr>
-          <p:cNvPr id="3" name="Rectangle 2"/>
-          <p:cNvSpPr/>
-          <p:nvPr/>
-        </p:nvSpPr>
-        <p:spPr>
-          <a:xfrm>
-            <a:off x="0" y="0"/>
-            <a:ext cx="12191695" cy="109728"/>
-          </a:xfrm>
-          <a:prstGeom prst="rect">
-            <a:avLst/>
-          </a:prstGeom>
-          <a:solidFill>
-            <a:srgbClr val="10B981"/>
-          </a:solidFill>
-          <a:ln>
-            <a:noFill/>
-          </a:ln>
-        </p:spPr>
-        <p:style>
-          <a:lnRef idx="1">
-            <a:schemeClr val="accent1"/>
-          </a:lnRef>
-          <a:fillRef idx="3">
-            <a:schemeClr val="accent1"/>
-          </a:fillRef>
-          <a:effectRef idx="2">
-            <a:schemeClr val="accent1"/>
-          </a:effectRef>
-          <a:fontRef idx="minor">
-            <a:schemeClr val="lt1"/>
-          </a:fontRef>
-        </p:style>
-        <p:txBody>
-          <a:bodyPr rtlCol="0" anchor="ctr"/>
-          <a:lstStyle/>
-          <a:p>
-            <a:pPr algn="ctr"/>
-          </a:p>
-        </p:txBody>
-      </p:sp>
-      <p:sp>
-        <p:nvSpPr>
-          <p:cNvPr id="4" name="Rounded Rectangle 3"/>
-          <p:cNvSpPr/>
-          <p:nvPr/>
-        </p:nvSpPr>
-        <p:spPr>
-          <a:xfrm>
-            <a:off x="11503152" y="502920"/>
-            <a:ext cx="310896" cy="310896"/>
-          </a:xfrm>
-          <a:prstGeom prst="roundRect">
-            <a:avLst/>
-          </a:prstGeom>
-          <a:solidFill>
-            <a:srgbClr val="10B981"/>
-          </a:solidFill>
-          <a:ln>
-            <a:noFill/>
-          </a:ln>
-        </p:spPr>
-        <p:style>
-          <a:lnRef idx="1">
-            <a:schemeClr val="accent1"/>
-          </a:lnRef>
-          <a:fillRef idx="3">
-            <a:schemeClr val="accent1"/>
-          </a:fillRef>
-          <a:effectRef idx="2">
-            <a:schemeClr val="accent1"/>
-          </a:effectRef>
-          <a:fontRef idx="minor">
-            <a:schemeClr val="lt1"/>
-          </a:fontRef>
-        </p:style>
-        <p:txBody>
-          <a:bodyPr rtlCol="0" anchor="ctr"/>
-          <a:lstStyle/>
-          <a:p>
-            <a:pPr algn="ctr"/>
-          </a:p>
-        </p:txBody>
-      </p:sp>
-      <p:sp>
-        <p:nvSpPr>
-          <p:cNvPr id="5" name="Rounded Rectangle 4"/>
-          <p:cNvSpPr/>
-          <p:nvPr/>
-        </p:nvSpPr>
-        <p:spPr>
-          <a:xfrm>
-            <a:off x="11137392" y="502920"/>
-            <a:ext cx="201168" cy="201168"/>
-          </a:xfrm>
-          <a:prstGeom prst="roundRect">
-            <a:avLst/>
-          </a:prstGeom>
-          <a:solidFill>
-            <a:srgbClr val="F5BE14"/>
-          </a:solidFill>
-          <a:ln>
-            <a:noFill/>
-          </a:ln>
-        </p:spPr>
-        <p:style>
-          <a:lnRef idx="1">
-            <a:schemeClr val="accent1"/>
-          </a:lnRef>
-          <a:fillRef idx="3">
-            <a:schemeClr val="accent1"/>
-          </a:fillRef>
-          <a:effectRef idx="2">
-            <a:schemeClr val="accent1"/>
-          </a:effectRef>
-          <a:fontRef idx="minor">
-            <a:schemeClr val="lt1"/>
-          </a:fontRef>
-        </p:style>
-        <p:txBody>
-          <a:bodyPr rtlCol="0" anchor="ctr"/>
-          <a:lstStyle/>
-          <a:p>
-            <a:pPr algn="ctr"/>
-          </a:p>
-        </p:txBody>
-      </p:sp>
-      <p:sp>
-        <p:nvSpPr>
-          <p:cNvPr id="6" name="Rectangle 5"/>
-          <p:cNvSpPr/>
-          <p:nvPr/>
-        </p:nvSpPr>
-        <p:spPr>
-          <a:xfrm>
-            <a:off x="566928" y="310896"/>
-            <a:ext cx="3840480" cy="219456"/>
-          </a:xfrm>
-          <a:prstGeom prst="rect">
-            <a:avLst/>
-          </a:prstGeom>
-          <a:noFill/>
-          <a:ln>
-            <a:noFill/>
-          </a:ln>
-        </p:spPr>
-        <p:style>
-          <a:lnRef idx="1">
-            <a:schemeClr val="accent1"/>
-          </a:lnRef>
-          <a:fillRef idx="3">
-            <a:schemeClr val="accent1"/>
-          </a:fillRef>
-          <a:effectRef idx="2">
-            <a:schemeClr val="accent1"/>
-          </a:effectRef>
-          <a:fontRef idx="minor">
-            <a:schemeClr val="lt1"/>
-          </a:fontRef>
-        </p:style>
-        <p:txBody>
-          <a:bodyPr rtlCol="0" anchor="ctr" wrap="square" lIns="9144" rIns="9144" tIns="9144" bIns="9144">
-            <a:normAutofit/>
-          </a:bodyPr>
-          <a:lstStyle/>
-          <a:p>
-            <a:pPr algn="l">
-              <a:spcAft>
-                <a:spcPts val="200"/>
-              </a:spcAft>
-            </a:pPr>
-            <a:r>
-              <a:rPr sz="850" b="1">
-                <a:solidFill>
-                  <a:srgbClr val="10B981"/>
-                </a:solidFill>
-                <a:latin typeface="Noto Sans CJK KR"/>
-              </a:rPr>
-              <a:t>SCORECARD</a:t>
-            </a:r>
-          </a:p>
-        </p:txBody>
-      </p:sp>
-      <p:sp>
-        <p:nvSpPr>
-          <p:cNvPr id="7" name="Rectangle 6"/>
-          <p:cNvSpPr/>
-          <p:nvPr/>
-        </p:nvSpPr>
-        <p:spPr>
-          <a:xfrm>
-            <a:off x="566928" y="566928"/>
-            <a:ext cx="8412480" cy="493776"/>
-          </a:xfrm>
-          <a:prstGeom prst="rect">
-            <a:avLst/>
-          </a:prstGeom>
-          <a:noFill/>
-          <a:ln>
-            <a:noFill/>
-          </a:ln>
-        </p:spPr>
-        <p:style>
-          <a:lnRef idx="1">
-            <a:schemeClr val="accent1"/>
-          </a:lnRef>
-          <a:fillRef idx="3">
-            <a:schemeClr val="accent1"/>
-          </a:fillRef>
-          <a:effectRef idx="2">
-            <a:schemeClr val="accent1"/>
-          </a:effectRef>
-          <a:fontRef idx="minor">
-            <a:schemeClr val="lt1"/>
-          </a:fontRef>
-        </p:style>
-        <p:txBody>
-          <a:bodyPr rtlCol="0" anchor="ctr" wrap="square" lIns="9144" rIns="9144" tIns="9144" bIns="9144">
-            <a:normAutofit/>
-          </a:bodyPr>
-          <a:lstStyle/>
-          <a:p>
-            <a:pPr algn="l">
-              <a:spcAft>
-                <a:spcPts val="200"/>
-              </a:spcAft>
-            </a:pPr>
-            <a:r>
-              <a:rPr sz="2500" b="1">
-                <a:solidFill>
-                  <a:srgbClr val="141926"/>
-                </a:solidFill>
-                <a:latin typeface="Noto Sans CJK KR"/>
-              </a:rPr>
-              <a:t>최종 결론</a:t>
-            </a:r>
-          </a:p>
-        </p:txBody>
-      </p:sp>
-      <p:sp>
-        <p:nvSpPr>
-          <p:cNvPr id="8" name="Rounded Rectangle 7"/>
-          <p:cNvSpPr/>
-          <p:nvPr/>
-        </p:nvSpPr>
-        <p:spPr>
-          <a:xfrm>
-            <a:off x="685800" y="1243584"/>
-            <a:ext cx="5084064" cy="4187952"/>
-          </a:xfrm>
-          <a:prstGeom prst="roundRect">
-            <a:avLst/>
-          </a:prstGeom>
-          <a:solidFill>
-            <a:srgbClr val="FFFFFF"/>
-          </a:solidFill>
-          <a:ln w="7620">
-            <a:solidFill>
-              <a:srgbClr val="E1E8F0"/>
-            </a:solidFill>
-          </a:ln>
-        </p:spPr>
-        <p:style>
-          <a:lnRef idx="1">
-            <a:schemeClr val="accent1"/>
-          </a:lnRef>
-          <a:fillRef idx="3">
-            <a:schemeClr val="accent1"/>
-          </a:fillRef>
-          <a:effectRef idx="2">
-            <a:schemeClr val="accent1"/>
-          </a:effectRef>
-          <a:fontRef idx="minor">
-            <a:schemeClr val="lt1"/>
-          </a:fontRef>
-        </p:style>
-        <p:txBody>
-          <a:bodyPr rtlCol="0" anchor="ctr"/>
-          <a:lstStyle/>
-          <a:p>
-            <a:pPr algn="ctr"/>
-          </a:p>
-        </p:txBody>
-      </p:sp>
-      <p:sp>
-        <p:nvSpPr>
-          <p:cNvPr id="9" name="Rectangle 8"/>
-          <p:cNvSpPr/>
-          <p:nvPr/>
-        </p:nvSpPr>
-        <p:spPr>
-          <a:xfrm>
-            <a:off x="987552" y="1581912"/>
-            <a:ext cx="4389120" cy="292608"/>
-          </a:xfrm>
-          <a:prstGeom prst="rect">
-            <a:avLst/>
-          </a:prstGeom>
-          <a:noFill/>
-          <a:ln>
-            <a:noFill/>
-          </a:ln>
-        </p:spPr>
-        <p:style>
-          <a:lnRef idx="1">
-            <a:schemeClr val="accent1"/>
-          </a:lnRef>
-          <a:fillRef idx="3">
-            <a:schemeClr val="accent1"/>
-          </a:fillRef>
-          <a:effectRef idx="2">
-            <a:schemeClr val="accent1"/>
-          </a:effectRef>
-          <a:fontRef idx="minor">
-            <a:schemeClr val="lt1"/>
-          </a:fontRef>
-        </p:style>
-        <p:txBody>
-          <a:bodyPr rtlCol="0" anchor="ctr" wrap="square" lIns="9144" rIns="9144" tIns="9144" bIns="9144">
-            <a:normAutofit/>
-          </a:bodyPr>
-          <a:lstStyle/>
-          <a:p>
-            <a:pPr algn="l">
-              <a:spcAft>
-                <a:spcPts val="200"/>
-              </a:spcAft>
-            </a:pPr>
-            <a:r>
-              <a:rPr sz="1600" b="1">
-                <a:solidFill>
-                  <a:srgbClr val="141926"/>
-                </a:solidFill>
-                <a:latin typeface="Noto Sans CJK KR"/>
-              </a:rPr>
-              <a:t>Macro F1 비교</a:t>
-            </a:r>
-          </a:p>
-        </p:txBody>
-      </p:sp>
-      <p:sp>
-        <p:nvSpPr>
-          <p:cNvPr id="10" name="Rectangle 9"/>
-          <p:cNvSpPr/>
-          <p:nvPr/>
-        </p:nvSpPr>
-        <p:spPr>
-          <a:xfrm>
-            <a:off x="987552" y="2139696"/>
-            <a:ext cx="1600200" cy="201168"/>
-          </a:xfrm>
-          <a:prstGeom prst="rect">
-            <a:avLst/>
-          </a:prstGeom>
-          <a:noFill/>
-          <a:ln>
-            <a:noFill/>
-          </a:ln>
-        </p:spPr>
-        <p:style>
-          <a:lnRef idx="1">
-            <a:schemeClr val="accent1"/>
-          </a:lnRef>
-          <a:fillRef idx="3">
-            <a:schemeClr val="accent1"/>
-          </a:fillRef>
-          <a:effectRef idx="2">
-            <a:schemeClr val="accent1"/>
-          </a:effectRef>
-          <a:fontRef idx="minor">
-            <a:schemeClr val="lt1"/>
-          </a:fontRef>
-        </p:style>
-        <p:txBody>
-          <a:bodyPr rtlCol="0" anchor="ctr" wrap="square" lIns="9144" rIns="9144" tIns="9144" bIns="9144">
-            <a:normAutofit/>
-          </a:bodyPr>
-          <a:lstStyle/>
-          <a:p>
-            <a:pPr algn="l">
-              <a:spcAft>
-                <a:spcPts val="200"/>
-              </a:spcAft>
-            </a:pPr>
-            <a:r>
-              <a:rPr sz="869" b="1">
-                <a:solidFill>
-                  <a:srgbClr val="141926"/>
-                </a:solidFill>
-                <a:latin typeface="Noto Sans CJK KR"/>
-              </a:rPr>
-              <a:t>OBD-II/CAN</a:t>
-            </a:r>
-          </a:p>
-        </p:txBody>
-      </p:sp>
-      <p:sp>
-        <p:nvSpPr>
-          <p:cNvPr id="11" name="Rounded Rectangle 10"/>
-          <p:cNvSpPr/>
-          <p:nvPr/>
-        </p:nvSpPr>
-        <p:spPr>
-          <a:xfrm>
-            <a:off x="2697480" y="2194560"/>
-            <a:ext cx="2121408" cy="164592"/>
-          </a:xfrm>
-          <a:prstGeom prst="roundRect">
-            <a:avLst/>
-          </a:prstGeom>
-          <a:solidFill>
-            <a:srgbClr val="E6ECF2"/>
-          </a:solidFill>
-          <a:ln>
-            <a:noFill/>
-          </a:ln>
-        </p:spPr>
-        <p:style>
-          <a:lnRef idx="1">
-            <a:schemeClr val="accent1"/>
-          </a:lnRef>
-          <a:fillRef idx="3">
-            <a:schemeClr val="accent1"/>
-          </a:fillRef>
-          <a:effectRef idx="2">
-            <a:schemeClr val="accent1"/>
-          </a:effectRef>
-          <a:fontRef idx="minor">
-            <a:schemeClr val="lt1"/>
-          </a:fontRef>
-        </p:style>
-        <p:txBody>
-          <a:bodyPr rtlCol="0" anchor="ctr"/>
-          <a:lstStyle/>
-          <a:p>
-            <a:pPr algn="ctr"/>
-          </a:p>
-        </p:txBody>
-      </p:sp>
-      <p:sp>
-        <p:nvSpPr>
-          <p:cNvPr id="12" name="Rounded Rectangle 11"/>
-          <p:cNvSpPr/>
-          <p:nvPr/>
-        </p:nvSpPr>
-        <p:spPr>
-          <a:xfrm>
-            <a:off x="2697480" y="2194560"/>
-            <a:ext cx="2047156" cy="164592"/>
-          </a:xfrm>
-          <a:prstGeom prst="roundRect">
-            <a:avLst/>
-          </a:prstGeom>
-          <a:solidFill>
-            <a:srgbClr val="10B981"/>
-          </a:solidFill>
-          <a:ln>
-            <a:noFill/>
-          </a:ln>
-        </p:spPr>
-        <p:style>
-          <a:lnRef idx="1">
-            <a:schemeClr val="accent1"/>
-          </a:lnRef>
-          <a:fillRef idx="3">
-            <a:schemeClr val="accent1"/>
-          </a:fillRef>
-          <a:effectRef idx="2">
-            <a:schemeClr val="accent1"/>
-          </a:effectRef>
-          <a:fontRef idx="minor">
-            <a:schemeClr val="lt1"/>
-          </a:fontRef>
-        </p:style>
-        <p:txBody>
-          <a:bodyPr rtlCol="0" anchor="ctr"/>
-          <a:lstStyle/>
-          <a:p>
-            <a:pPr algn="ctr"/>
-          </a:p>
-        </p:txBody>
-      </p:sp>
-      <p:sp>
-        <p:nvSpPr>
-          <p:cNvPr id="13" name="Rectangle 12"/>
-          <p:cNvSpPr/>
-          <p:nvPr/>
-        </p:nvSpPr>
-        <p:spPr>
-          <a:xfrm>
-            <a:off x="4937760" y="2130552"/>
-            <a:ext cx="493776" cy="201168"/>
-          </a:xfrm>
-          <a:prstGeom prst="rect">
-            <a:avLst/>
-          </a:prstGeom>
-          <a:noFill/>
-          <a:ln>
-            <a:noFill/>
-          </a:ln>
-        </p:spPr>
-        <p:style>
-          <a:lnRef idx="1">
-            <a:schemeClr val="accent1"/>
-          </a:lnRef>
-          <a:fillRef idx="3">
-            <a:schemeClr val="accent1"/>
-          </a:fillRef>
-          <a:effectRef idx="2">
-            <a:schemeClr val="accent1"/>
-          </a:effectRef>
-          <a:fontRef idx="minor">
-            <a:schemeClr val="lt1"/>
-          </a:fontRef>
-        </p:style>
-        <p:txBody>
-          <a:bodyPr rtlCol="0" anchor="ctr" wrap="square" lIns="9144" rIns="9144" tIns="9144" bIns="9144">
-            <a:normAutofit/>
-          </a:bodyPr>
-          <a:lstStyle/>
-          <a:p>
-            <a:pPr algn="l">
-              <a:spcAft>
-                <a:spcPts val="200"/>
-              </a:spcAft>
-            </a:pPr>
-            <a:r>
-              <a:rPr sz="850" b="1">
-                <a:solidFill>
-                  <a:srgbClr val="10B981"/>
-                </a:solidFill>
-                <a:latin typeface="Noto Sans CJK KR"/>
-              </a:rPr>
-              <a:t>0.965</a:t>
-            </a:r>
-          </a:p>
-        </p:txBody>
-      </p:sp>
-      <p:sp>
-        <p:nvSpPr>
-          <p:cNvPr id="14" name="Rectangle 13"/>
-          <p:cNvSpPr/>
-          <p:nvPr/>
-        </p:nvSpPr>
-        <p:spPr>
-          <a:xfrm>
-            <a:off x="987552" y="2660903"/>
-            <a:ext cx="1600200" cy="201168"/>
-          </a:xfrm>
-          <a:prstGeom prst="rect">
-            <a:avLst/>
-          </a:prstGeom>
-          <a:noFill/>
-          <a:ln>
-            <a:noFill/>
-          </a:ln>
-        </p:spPr>
-        <p:style>
-          <a:lnRef idx="1">
-            <a:schemeClr val="accent1"/>
-          </a:lnRef>
-          <a:fillRef idx="3">
-            <a:schemeClr val="accent1"/>
-          </a:fillRef>
-          <a:effectRef idx="2">
-            <a:schemeClr val="accent1"/>
-          </a:effectRef>
-          <a:fontRef idx="minor">
-            <a:schemeClr val="lt1"/>
-          </a:fontRef>
-        </p:style>
-        <p:txBody>
-          <a:bodyPr rtlCol="0" anchor="ctr" wrap="square" lIns="9144" rIns="9144" tIns="9144" bIns="9144">
-            <a:normAutofit/>
-          </a:bodyPr>
-          <a:lstStyle/>
-          <a:p>
-            <a:pPr algn="l">
-              <a:spcAft>
-                <a:spcPts val="200"/>
-              </a:spcAft>
-            </a:pPr>
-            <a:r>
-              <a:rPr sz="869" b="1">
-                <a:solidFill>
-                  <a:srgbClr val="141926"/>
-                </a:solidFill>
-                <a:latin typeface="Noto Sans CJK KR"/>
-              </a:rPr>
-              <a:t>Mendeley</a:t>
-            </a:r>
-          </a:p>
-        </p:txBody>
-      </p:sp>
-      <p:sp>
-        <p:nvSpPr>
-          <p:cNvPr id="15" name="Rounded Rectangle 14"/>
-          <p:cNvSpPr/>
-          <p:nvPr/>
-        </p:nvSpPr>
-        <p:spPr>
-          <a:xfrm>
-            <a:off x="2697480" y="2715768"/>
-            <a:ext cx="2121408" cy="164592"/>
-          </a:xfrm>
-          <a:prstGeom prst="roundRect">
-            <a:avLst/>
-          </a:prstGeom>
-          <a:solidFill>
-            <a:srgbClr val="E6ECF2"/>
-          </a:solidFill>
-          <a:ln>
-            <a:noFill/>
-          </a:ln>
-        </p:spPr>
-        <p:style>
-          <a:lnRef idx="1">
-            <a:schemeClr val="accent1"/>
-          </a:lnRef>
-          <a:fillRef idx="3">
-            <a:schemeClr val="accent1"/>
-          </a:fillRef>
-          <a:effectRef idx="2">
-            <a:schemeClr val="accent1"/>
-          </a:effectRef>
-          <a:fontRef idx="minor">
-            <a:schemeClr val="lt1"/>
-          </a:fontRef>
-        </p:style>
-        <p:txBody>
-          <a:bodyPr rtlCol="0" anchor="ctr"/>
-          <a:lstStyle/>
-          <a:p>
-            <a:pPr algn="ctr"/>
-          </a:p>
-        </p:txBody>
-      </p:sp>
-      <p:sp>
-        <p:nvSpPr>
-          <p:cNvPr id="16" name="Rounded Rectangle 15"/>
-          <p:cNvSpPr/>
-          <p:nvPr/>
-        </p:nvSpPr>
-        <p:spPr>
-          <a:xfrm>
-            <a:off x="2697480" y="2715768"/>
-            <a:ext cx="1736060" cy="164592"/>
-          </a:xfrm>
-          <a:prstGeom prst="roundRect">
-            <a:avLst/>
-          </a:prstGeom>
-          <a:solidFill>
-            <a:srgbClr val="08BCDA"/>
-          </a:solidFill>
-          <a:ln>
-            <a:noFill/>
-          </a:ln>
-        </p:spPr>
-        <p:style>
-          <a:lnRef idx="1">
-            <a:schemeClr val="accent1"/>
-          </a:lnRef>
-          <a:fillRef idx="3">
-            <a:schemeClr val="accent1"/>
-          </a:fillRef>
-          <a:effectRef idx="2">
-            <a:schemeClr val="accent1"/>
-          </a:effectRef>
-          <a:fontRef idx="minor">
-            <a:schemeClr val="lt1"/>
-          </a:fontRef>
-        </p:style>
-        <p:txBody>
-          <a:bodyPr rtlCol="0" anchor="ctr"/>
-          <a:lstStyle/>
-          <a:p>
-            <a:pPr algn="ctr"/>
-          </a:p>
-        </p:txBody>
-      </p:sp>
-      <p:sp>
-        <p:nvSpPr>
-          <p:cNvPr id="17" name="Rectangle 16"/>
-          <p:cNvSpPr/>
-          <p:nvPr/>
-        </p:nvSpPr>
-        <p:spPr>
-          <a:xfrm>
-            <a:off x="4937760" y="2651760"/>
-            <a:ext cx="493776" cy="201168"/>
-          </a:xfrm>
-          <a:prstGeom prst="rect">
-            <a:avLst/>
-          </a:prstGeom>
-          <a:noFill/>
-          <a:ln>
-            <a:noFill/>
-          </a:ln>
-        </p:spPr>
-        <p:style>
-          <a:lnRef idx="1">
-            <a:schemeClr val="accent1"/>
-          </a:lnRef>
-          <a:fillRef idx="3">
-            <a:schemeClr val="accent1"/>
-          </a:fillRef>
-          <a:effectRef idx="2">
-            <a:schemeClr val="accent1"/>
-          </a:effectRef>
-          <a:fontRef idx="minor">
-            <a:schemeClr val="lt1"/>
-          </a:fontRef>
-        </p:style>
-        <p:txBody>
-          <a:bodyPr rtlCol="0" anchor="ctr" wrap="square" lIns="9144" rIns="9144" tIns="9144" bIns="9144">
-            <a:normAutofit/>
-          </a:bodyPr>
-          <a:lstStyle/>
-          <a:p>
-            <a:pPr algn="l">
-              <a:spcAft>
-                <a:spcPts val="200"/>
-              </a:spcAft>
-            </a:pPr>
-            <a:r>
-              <a:rPr sz="850" b="1">
-                <a:solidFill>
-                  <a:srgbClr val="08BCDA"/>
-                </a:solidFill>
-                <a:latin typeface="Noto Sans CJK KR"/>
-              </a:rPr>
-              <a:t>0.818</a:t>
-            </a:r>
-          </a:p>
-        </p:txBody>
-      </p:sp>
-      <p:sp>
-        <p:nvSpPr>
-          <p:cNvPr id="18" name="Rectangle 17"/>
-          <p:cNvSpPr/>
-          <p:nvPr/>
-        </p:nvSpPr>
-        <p:spPr>
-          <a:xfrm>
-            <a:off x="987552" y="3182111"/>
-            <a:ext cx="1600200" cy="201168"/>
-          </a:xfrm>
-          <a:prstGeom prst="rect">
-            <a:avLst/>
-          </a:prstGeom>
-          <a:noFill/>
-          <a:ln>
-            <a:noFill/>
-          </a:ln>
-        </p:spPr>
-        <p:style>
-          <a:lnRef idx="1">
-            <a:schemeClr val="accent1"/>
-          </a:lnRef>
-          <a:fillRef idx="3">
-            <a:schemeClr val="accent1"/>
-          </a:fillRef>
-          <a:effectRef idx="2">
-            <a:schemeClr val="accent1"/>
-          </a:effectRef>
-          <a:fontRef idx="minor">
-            <a:schemeClr val="lt1"/>
-          </a:fontRef>
-        </p:style>
-        <p:txBody>
-          <a:bodyPr rtlCol="0" anchor="ctr" wrap="square" lIns="9144" rIns="9144" tIns="9144" bIns="9144">
-            <a:normAutofit/>
-          </a:bodyPr>
-          <a:lstStyle/>
-          <a:p>
-            <a:pPr algn="l">
-              <a:spcAft>
-                <a:spcPts val="200"/>
-              </a:spcAft>
-            </a:pPr>
-            <a:r>
-              <a:rPr sz="869" b="1">
-                <a:solidFill>
-                  <a:srgbClr val="141926"/>
-                </a:solidFill>
-                <a:latin typeface="Noto Sans CJK KR"/>
-              </a:rPr>
-              <a:t>Vehicle Maintenance</a:t>
-            </a:r>
-          </a:p>
-        </p:txBody>
-      </p:sp>
-      <p:sp>
-        <p:nvSpPr>
-          <p:cNvPr id="19" name="Rounded Rectangle 18"/>
-          <p:cNvSpPr/>
-          <p:nvPr/>
-        </p:nvSpPr>
-        <p:spPr>
-          <a:xfrm>
-            <a:off x="2697480" y="3236975"/>
-            <a:ext cx="2121408" cy="164592"/>
-          </a:xfrm>
-          <a:prstGeom prst="roundRect">
-            <a:avLst/>
-          </a:prstGeom>
-          <a:solidFill>
-            <a:srgbClr val="E6ECF2"/>
-          </a:solidFill>
-          <a:ln>
-            <a:noFill/>
-          </a:ln>
-        </p:spPr>
-        <p:style>
-          <a:lnRef idx="1">
-            <a:schemeClr val="accent1"/>
-          </a:lnRef>
-          <a:fillRef idx="3">
-            <a:schemeClr val="accent1"/>
-          </a:fillRef>
-          <a:effectRef idx="2">
-            <a:schemeClr val="accent1"/>
-          </a:effectRef>
-          <a:fontRef idx="minor">
-            <a:schemeClr val="lt1"/>
-          </a:fontRef>
-        </p:style>
-        <p:txBody>
-          <a:bodyPr rtlCol="0" anchor="ctr"/>
-          <a:lstStyle/>
-          <a:p>
-            <a:pPr algn="ctr"/>
-          </a:p>
-        </p:txBody>
-      </p:sp>
-      <p:sp>
-        <p:nvSpPr>
-          <p:cNvPr id="20" name="Rounded Rectangle 19"/>
-          <p:cNvSpPr/>
-          <p:nvPr/>
-        </p:nvSpPr>
-        <p:spPr>
-          <a:xfrm>
-            <a:off x="2697480" y="3236975"/>
-            <a:ext cx="1677051" cy="164592"/>
-          </a:xfrm>
-          <a:prstGeom prst="roundRect">
-            <a:avLst/>
-          </a:prstGeom>
-          <a:solidFill>
-            <a:srgbClr val="F97316"/>
-          </a:solidFill>
-          <a:ln>
-            <a:noFill/>
-          </a:ln>
-        </p:spPr>
-        <p:style>
-          <a:lnRef idx="1">
-            <a:schemeClr val="accent1"/>
-          </a:lnRef>
-          <a:fillRef idx="3">
-            <a:schemeClr val="accent1"/>
-          </a:fillRef>
-          <a:effectRef idx="2">
-            <a:schemeClr val="accent1"/>
-          </a:effectRef>
-          <a:fontRef idx="minor">
-            <a:schemeClr val="lt1"/>
-          </a:fontRef>
-        </p:style>
-        <p:txBody>
-          <a:bodyPr rtlCol="0" anchor="ctr"/>
-          <a:lstStyle/>
-          <a:p>
-            <a:pPr algn="ctr"/>
-          </a:p>
-        </p:txBody>
-      </p:sp>
-      <p:sp>
-        <p:nvSpPr>
-          <p:cNvPr id="21" name="Rectangle 20"/>
-          <p:cNvSpPr/>
-          <p:nvPr/>
-        </p:nvSpPr>
-        <p:spPr>
-          <a:xfrm>
-            <a:off x="4937760" y="3172968"/>
-            <a:ext cx="493776" cy="201168"/>
-          </a:xfrm>
-          <a:prstGeom prst="rect">
-            <a:avLst/>
-          </a:prstGeom>
-          <a:noFill/>
-          <a:ln>
-            <a:noFill/>
-          </a:ln>
-        </p:spPr>
-        <p:style>
-          <a:lnRef idx="1">
-            <a:schemeClr val="accent1"/>
-          </a:lnRef>
-          <a:fillRef idx="3">
-            <a:schemeClr val="accent1"/>
-          </a:fillRef>
-          <a:effectRef idx="2">
-            <a:schemeClr val="accent1"/>
-          </a:effectRef>
-          <a:fontRef idx="minor">
-            <a:schemeClr val="lt1"/>
-          </a:fontRef>
-        </p:style>
-        <p:txBody>
-          <a:bodyPr rtlCol="0" anchor="ctr" wrap="square" lIns="9144" rIns="9144" tIns="9144" bIns="9144">
-            <a:normAutofit/>
-          </a:bodyPr>
-          <a:lstStyle/>
-          <a:p>
-            <a:pPr algn="l">
-              <a:spcAft>
-                <a:spcPts val="200"/>
-              </a:spcAft>
-            </a:pPr>
-            <a:r>
-              <a:rPr sz="850" b="1">
-                <a:solidFill>
-                  <a:srgbClr val="F97316"/>
-                </a:solidFill>
-                <a:latin typeface="Noto Sans CJK KR"/>
-              </a:rPr>
-              <a:t>0.791</a:t>
-            </a:r>
-          </a:p>
-        </p:txBody>
-      </p:sp>
-      <p:sp>
-        <p:nvSpPr>
-          <p:cNvPr id="22" name="Rectangle 21"/>
-          <p:cNvSpPr/>
-          <p:nvPr/>
-        </p:nvSpPr>
-        <p:spPr>
-          <a:xfrm>
-            <a:off x="987552" y="3703320"/>
-            <a:ext cx="1600200" cy="201168"/>
-          </a:xfrm>
-          <a:prstGeom prst="rect">
-            <a:avLst/>
-          </a:prstGeom>
-          <a:noFill/>
-          <a:ln>
-            <a:noFill/>
-          </a:ln>
-        </p:spPr>
-        <p:style>
-          <a:lnRef idx="1">
-            <a:schemeClr val="accent1"/>
-          </a:lnRef>
-          <a:fillRef idx="3">
-            <a:schemeClr val="accent1"/>
-          </a:fillRef>
-          <a:effectRef idx="2">
-            <a:schemeClr val="accent1"/>
-          </a:effectRef>
-          <a:fontRef idx="minor">
-            <a:schemeClr val="lt1"/>
-          </a:fontRef>
-        </p:style>
-        <p:txBody>
-          <a:bodyPr rtlCol="0" anchor="ctr" wrap="square" lIns="9144" rIns="9144" tIns="9144" bIns="9144">
-            <a:normAutofit/>
-          </a:bodyPr>
-          <a:lstStyle/>
-          <a:p>
-            <a:pPr algn="l">
-              <a:spcAft>
-                <a:spcPts val="200"/>
-              </a:spcAft>
-            </a:pPr>
-            <a:r>
-              <a:rPr sz="869" b="1">
-                <a:solidFill>
-                  <a:srgbClr val="141926"/>
-                </a:solidFill>
-                <a:latin typeface="Noto Sans CJK KR"/>
-              </a:rPr>
-              <a:t>AI4I</a:t>
-            </a:r>
-          </a:p>
-        </p:txBody>
-      </p:sp>
-      <p:sp>
-        <p:nvSpPr>
-          <p:cNvPr id="23" name="Rounded Rectangle 22"/>
-          <p:cNvSpPr/>
-          <p:nvPr/>
-        </p:nvSpPr>
-        <p:spPr>
-          <a:xfrm>
-            <a:off x="2697480" y="3758183"/>
-            <a:ext cx="2121408" cy="164592"/>
-          </a:xfrm>
-          <a:prstGeom prst="roundRect">
-            <a:avLst/>
-          </a:prstGeom>
-          <a:solidFill>
-            <a:srgbClr val="E6ECF2"/>
-          </a:solidFill>
-          <a:ln>
-            <a:noFill/>
-          </a:ln>
-        </p:spPr>
-        <p:style>
-          <a:lnRef idx="1">
-            <a:schemeClr val="accent1"/>
-          </a:lnRef>
-          <a:fillRef idx="3">
-            <a:schemeClr val="accent1"/>
-          </a:fillRef>
-          <a:effectRef idx="2">
-            <a:schemeClr val="accent1"/>
-          </a:effectRef>
-          <a:fontRef idx="minor">
-            <a:schemeClr val="lt1"/>
-          </a:fontRef>
-        </p:style>
-        <p:txBody>
-          <a:bodyPr rtlCol="0" anchor="ctr"/>
-          <a:lstStyle/>
-          <a:p>
-            <a:pPr algn="ctr"/>
-          </a:p>
-        </p:txBody>
-      </p:sp>
-      <p:sp>
-        <p:nvSpPr>
-          <p:cNvPr id="24" name="Rounded Rectangle 23"/>
-          <p:cNvSpPr/>
-          <p:nvPr/>
-        </p:nvSpPr>
-        <p:spPr>
-          <a:xfrm>
-            <a:off x="2697480" y="3758183"/>
-            <a:ext cx="1052464" cy="164592"/>
-          </a:xfrm>
-          <a:prstGeom prst="roundRect">
-            <a:avLst/>
-          </a:prstGeom>
-          <a:solidFill>
-            <a:srgbClr val="7C3AED"/>
-          </a:solidFill>
-          <a:ln>
-            <a:noFill/>
-          </a:ln>
-        </p:spPr>
-        <p:style>
-          <a:lnRef idx="1">
-            <a:schemeClr val="accent1"/>
-          </a:lnRef>
-          <a:fillRef idx="3">
-            <a:schemeClr val="accent1"/>
-          </a:fillRef>
-          <a:effectRef idx="2">
-            <a:schemeClr val="accent1"/>
-          </a:effectRef>
-          <a:fontRef idx="minor">
-            <a:schemeClr val="lt1"/>
-          </a:fontRef>
-        </p:style>
-        <p:txBody>
-          <a:bodyPr rtlCol="0" anchor="ctr"/>
-          <a:lstStyle/>
-          <a:p>
-            <a:pPr algn="ctr"/>
-          </a:p>
-        </p:txBody>
-      </p:sp>
-      <p:sp>
-        <p:nvSpPr>
-          <p:cNvPr id="25" name="Rectangle 24"/>
-          <p:cNvSpPr/>
-          <p:nvPr/>
-        </p:nvSpPr>
-        <p:spPr>
-          <a:xfrm>
-            <a:off x="4937760" y="3694175"/>
-            <a:ext cx="493776" cy="201168"/>
-          </a:xfrm>
-          <a:prstGeom prst="rect">
-            <a:avLst/>
-          </a:prstGeom>
-          <a:noFill/>
-          <a:ln>
-            <a:noFill/>
-          </a:ln>
-        </p:spPr>
-        <p:style>
-          <a:lnRef idx="1">
-            <a:schemeClr val="accent1"/>
-          </a:lnRef>
-          <a:fillRef idx="3">
-            <a:schemeClr val="accent1"/>
-          </a:fillRef>
-          <a:effectRef idx="2">
-            <a:schemeClr val="accent1"/>
-          </a:effectRef>
-          <a:fontRef idx="minor">
-            <a:schemeClr val="lt1"/>
-          </a:fontRef>
-        </p:style>
-        <p:txBody>
-          <a:bodyPr rtlCol="0" anchor="ctr" wrap="square" lIns="9144" rIns="9144" tIns="9144" bIns="9144">
-            <a:normAutofit/>
-          </a:bodyPr>
-          <a:lstStyle/>
-          <a:p>
-            <a:pPr algn="l">
-              <a:spcAft>
-                <a:spcPts val="200"/>
-              </a:spcAft>
-            </a:pPr>
-            <a:r>
-              <a:rPr sz="850" b="1">
-                <a:solidFill>
-                  <a:srgbClr val="7C3AED"/>
-                </a:solidFill>
-                <a:latin typeface="Noto Sans CJK KR"/>
-              </a:rPr>
-              <a:t>0.496</a:t>
-            </a:r>
-          </a:p>
-        </p:txBody>
-      </p:sp>
-      <p:sp>
-        <p:nvSpPr>
-          <p:cNvPr id="26" name="Rectangle 25"/>
-          <p:cNvSpPr/>
-          <p:nvPr/>
-        </p:nvSpPr>
-        <p:spPr>
-          <a:xfrm>
-            <a:off x="987552" y="4224528"/>
-            <a:ext cx="1600200" cy="201168"/>
-          </a:xfrm>
-          <a:prstGeom prst="rect">
-            <a:avLst/>
-          </a:prstGeom>
-          <a:noFill/>
-          <a:ln>
-            <a:noFill/>
-          </a:ln>
-        </p:spPr>
-        <p:style>
-          <a:lnRef idx="1">
-            <a:schemeClr val="accent1"/>
-          </a:lnRef>
-          <a:fillRef idx="3">
-            <a:schemeClr val="accent1"/>
-          </a:fillRef>
-          <a:effectRef idx="2">
-            <a:schemeClr val="accent1"/>
-          </a:effectRef>
-          <a:fontRef idx="minor">
-            <a:schemeClr val="lt1"/>
-          </a:fontRef>
-        </p:style>
-        <p:txBody>
-          <a:bodyPr rtlCol="0" anchor="ctr" wrap="square" lIns="9144" rIns="9144" tIns="9144" bIns="9144">
-            <a:normAutofit/>
-          </a:bodyPr>
-          <a:lstStyle/>
-          <a:p>
-            <a:pPr algn="l">
-              <a:spcAft>
-                <a:spcPts val="200"/>
-              </a:spcAft>
-            </a:pPr>
-            <a:r>
-              <a:rPr sz="869" b="1">
-                <a:solidFill>
-                  <a:srgbClr val="141926"/>
-                </a:solidFill>
-                <a:latin typeface="Noto Sans CJK KR"/>
-              </a:rPr>
-              <a:t>KIT OBD-II</a:t>
-            </a:r>
-          </a:p>
-        </p:txBody>
-      </p:sp>
-      <p:sp>
-        <p:nvSpPr>
-          <p:cNvPr id="27" name="Rounded Rectangle 26"/>
-          <p:cNvSpPr/>
-          <p:nvPr/>
-        </p:nvSpPr>
-        <p:spPr>
-          <a:xfrm>
-            <a:off x="2697480" y="4279392"/>
-            <a:ext cx="2121408" cy="164592"/>
-          </a:xfrm>
-          <a:prstGeom prst="roundRect">
-            <a:avLst/>
-          </a:prstGeom>
-          <a:solidFill>
-            <a:srgbClr val="E6ECF2"/>
-          </a:solidFill>
-          <a:ln>
-            <a:noFill/>
-          </a:ln>
-        </p:spPr>
-        <p:style>
-          <a:lnRef idx="1">
-            <a:schemeClr val="accent1"/>
-          </a:lnRef>
-          <a:fillRef idx="3">
-            <a:schemeClr val="accent1"/>
-          </a:fillRef>
-          <a:effectRef idx="2">
-            <a:schemeClr val="accent1"/>
-          </a:effectRef>
-          <a:fontRef idx="minor">
-            <a:schemeClr val="lt1"/>
-          </a:fontRef>
-        </p:style>
-        <p:txBody>
-          <a:bodyPr rtlCol="0" anchor="ctr"/>
-          <a:lstStyle/>
-          <a:p>
-            <a:pPr algn="ctr"/>
-          </a:p>
-        </p:txBody>
-      </p:sp>
-      <p:sp>
-        <p:nvSpPr>
-          <p:cNvPr id="28" name="Rounded Rectangle 27"/>
-          <p:cNvSpPr/>
-          <p:nvPr/>
-        </p:nvSpPr>
-        <p:spPr>
-          <a:xfrm>
-            <a:off x="2697480" y="4279392"/>
-            <a:ext cx="890317" cy="164592"/>
-          </a:xfrm>
-          <a:prstGeom prst="roundRect">
-            <a:avLst/>
-          </a:prstGeom>
-          <a:solidFill>
-            <a:srgbClr val="2563EB"/>
-          </a:solidFill>
-          <a:ln>
-            <a:noFill/>
-          </a:ln>
-        </p:spPr>
-        <p:style>
-          <a:lnRef idx="1">
-            <a:schemeClr val="accent1"/>
-          </a:lnRef>
-          <a:fillRef idx="3">
-            <a:schemeClr val="accent1"/>
-          </a:fillRef>
-          <a:effectRef idx="2">
-            <a:schemeClr val="accent1"/>
-          </a:effectRef>
-          <a:fontRef idx="minor">
-            <a:schemeClr val="lt1"/>
-          </a:fontRef>
-        </p:style>
-        <p:txBody>
-          <a:bodyPr rtlCol="0" anchor="ctr"/>
-          <a:lstStyle/>
-          <a:p>
-            <a:pPr algn="ctr"/>
-          </a:p>
-        </p:txBody>
-      </p:sp>
-      <p:sp>
-        <p:nvSpPr>
-          <p:cNvPr id="29" name="Rectangle 28"/>
-          <p:cNvSpPr/>
-          <p:nvPr/>
-        </p:nvSpPr>
-        <p:spPr>
-          <a:xfrm>
-            <a:off x="4937760" y="4215383"/>
-            <a:ext cx="493776" cy="201168"/>
-          </a:xfrm>
-          <a:prstGeom prst="rect">
-            <a:avLst/>
-          </a:prstGeom>
-          <a:noFill/>
-          <a:ln>
-            <a:noFill/>
-          </a:ln>
-        </p:spPr>
-        <p:style>
-          <a:lnRef idx="1">
-            <a:schemeClr val="accent1"/>
-          </a:lnRef>
-          <a:fillRef idx="3">
-            <a:schemeClr val="accent1"/>
-          </a:fillRef>
-          <a:effectRef idx="2">
-            <a:schemeClr val="accent1"/>
-          </a:effectRef>
-          <a:fontRef idx="minor">
-            <a:schemeClr val="lt1"/>
-          </a:fontRef>
-        </p:style>
-        <p:txBody>
-          <a:bodyPr rtlCol="0" anchor="ctr" wrap="square" lIns="9144" rIns="9144" tIns="9144" bIns="9144">
-            <a:normAutofit/>
-          </a:bodyPr>
-          <a:lstStyle/>
-          <a:p>
-            <a:pPr algn="l">
-              <a:spcAft>
-                <a:spcPts val="200"/>
-              </a:spcAft>
-            </a:pPr>
-            <a:r>
-              <a:rPr sz="850" b="1">
-                <a:solidFill>
-                  <a:srgbClr val="2563EB"/>
-                </a:solidFill>
-                <a:latin typeface="Noto Sans CJK KR"/>
-              </a:rPr>
-              <a:t>0.420</a:t>
-            </a:r>
-          </a:p>
-        </p:txBody>
-      </p:sp>
-      <p:sp>
-        <p:nvSpPr>
-          <p:cNvPr id="30" name="Rounded Rectangle 29"/>
-          <p:cNvSpPr/>
-          <p:nvPr/>
-        </p:nvSpPr>
-        <p:spPr>
-          <a:xfrm>
-            <a:off x="6172200" y="1243584"/>
-            <a:ext cx="5230368" cy="1572768"/>
-          </a:xfrm>
-          <a:prstGeom prst="roundRect">
-            <a:avLst/>
-          </a:prstGeom>
-          <a:solidFill>
-            <a:srgbClr val="E6F8F2"/>
-          </a:solidFill>
-          <a:ln>
-            <a:noFill/>
-          </a:ln>
-        </p:spPr>
-        <p:style>
-          <a:lnRef idx="1">
-            <a:schemeClr val="accent1"/>
-          </a:lnRef>
-          <a:fillRef idx="3">
-            <a:schemeClr val="accent1"/>
-          </a:fillRef>
-          <a:effectRef idx="2">
-            <a:schemeClr val="accent1"/>
-          </a:effectRef>
-          <a:fontRef idx="minor">
-            <a:schemeClr val="lt1"/>
-          </a:fontRef>
-        </p:style>
-        <p:txBody>
-          <a:bodyPr rtlCol="0" anchor="ctr"/>
-          <a:lstStyle/>
-          <a:p>
-            <a:pPr algn="ctr"/>
-          </a:p>
-        </p:txBody>
-      </p:sp>
-      <p:sp>
-        <p:nvSpPr>
-          <p:cNvPr id="31" name="Rectangle 30"/>
-          <p:cNvSpPr/>
-          <p:nvPr/>
-        </p:nvSpPr>
-        <p:spPr>
-          <a:xfrm>
-            <a:off x="6473952" y="1554480"/>
-            <a:ext cx="4389120" cy="274320"/>
-          </a:xfrm>
-          <a:prstGeom prst="rect">
-            <a:avLst/>
-          </a:prstGeom>
-          <a:noFill/>
-          <a:ln>
-            <a:noFill/>
-          </a:ln>
-        </p:spPr>
-        <p:style>
-          <a:lnRef idx="1">
-            <a:schemeClr val="accent1"/>
-          </a:lnRef>
-          <a:fillRef idx="3">
-            <a:schemeClr val="accent1"/>
-          </a:fillRef>
-          <a:effectRef idx="2">
-            <a:schemeClr val="accent1"/>
-          </a:effectRef>
-          <a:fontRef idx="minor">
-            <a:schemeClr val="lt1"/>
-          </a:fontRef>
-        </p:style>
-        <p:txBody>
-          <a:bodyPr rtlCol="0" anchor="ctr" wrap="square" lIns="9144" rIns="9144" tIns="9144" bIns="9144">
-            <a:normAutofit/>
-          </a:bodyPr>
-          <a:lstStyle/>
-          <a:p>
-            <a:pPr algn="l">
-              <a:spcAft>
-                <a:spcPts val="200"/>
-              </a:spcAft>
-            </a:pPr>
-            <a:r>
-              <a:rPr sz="1600" b="1">
-                <a:solidFill>
-                  <a:srgbClr val="10B981"/>
-                </a:solidFill>
-                <a:latin typeface="Noto Sans CJK KR"/>
-              </a:rPr>
-              <a:t>핵심 성과</a:t>
-            </a:r>
-          </a:p>
-        </p:txBody>
-      </p:sp>
-      <p:sp>
-        <p:nvSpPr>
-          <p:cNvPr id="32" name="Rectangle 31"/>
-          <p:cNvSpPr/>
-          <p:nvPr/>
-        </p:nvSpPr>
-        <p:spPr>
-          <a:xfrm>
-            <a:off x="6473952" y="1984248"/>
-            <a:ext cx="4251960" cy="640080"/>
-          </a:xfrm>
-          <a:prstGeom prst="rect">
-            <a:avLst/>
-          </a:prstGeom>
-          <a:noFill/>
-          <a:ln>
-            <a:noFill/>
-          </a:ln>
-        </p:spPr>
-        <p:style>
-          <a:lnRef idx="1">
-            <a:schemeClr val="accent1"/>
-          </a:lnRef>
-          <a:fillRef idx="3">
-            <a:schemeClr val="accent1"/>
-          </a:fillRef>
-          <a:effectRef idx="2">
-            <a:schemeClr val="accent1"/>
-          </a:effectRef>
-          <a:fontRef idx="minor">
-            <a:schemeClr val="lt1"/>
-          </a:fontRef>
-        </p:style>
-        <p:txBody>
-          <a:bodyPr rtlCol="0" anchor="ctr" wrap="square" lIns="9144" rIns="9144" tIns="9144" bIns="9144">
-            <a:normAutofit/>
-          </a:bodyPr>
-          <a:lstStyle/>
-          <a:p>
-            <a:pPr algn="l">
-              <a:spcAft>
-                <a:spcPts val="200"/>
-              </a:spcAft>
-            </a:pPr>
-            <a:r>
-              <a:rPr sz="950" b="0">
-                <a:solidFill>
-                  <a:srgbClr val="141926"/>
-                </a:solidFill>
-                <a:latin typeface="Noto Sans CJK KR"/>
-              </a:rPr>
-              <a:t>• 여러 데이터셋을 같은 평가 흐름으로 비교</a:t>
-            </a:r>
-          </a:p>
-          <a:p>
-            <a:pPr algn="l">
-              <a:spcAft>
-                <a:spcPts val="200"/>
-              </a:spcAft>
-            </a:pPr>
-            <a:r>
-              <a:rPr sz="950" b="0">
-                <a:solidFill>
-                  <a:srgbClr val="141926"/>
-                </a:solidFill>
-                <a:latin typeface="Noto Sans CJK KR"/>
-              </a:rPr>
-              <a:t>• 분류와 이상 탐지를 함께 활용</a:t>
-            </a:r>
-          </a:p>
-          <a:p>
-            <a:pPr algn="l">
-              <a:spcAft>
-                <a:spcPts val="200"/>
-              </a:spcAft>
-            </a:pPr>
-            <a:r>
-              <a:rPr sz="950" b="0">
-                <a:solidFill>
-                  <a:srgbClr val="141926"/>
-                </a:solidFill>
-                <a:latin typeface="Noto Sans CJK KR"/>
-              </a:rPr>
-              <a:t>• 그래프와 보고서 자동 생성</a:t>
-            </a:r>
-          </a:p>
-        </p:txBody>
-      </p:sp>
-      <p:sp>
-        <p:nvSpPr>
-          <p:cNvPr id="33" name="Rounded Rectangle 32"/>
-          <p:cNvSpPr/>
-          <p:nvPr/>
-        </p:nvSpPr>
-        <p:spPr>
-          <a:xfrm>
-            <a:off x="6172200" y="3127248"/>
-            <a:ext cx="5230368" cy="1572768"/>
-          </a:xfrm>
-          <a:prstGeom prst="roundRect">
-            <a:avLst/>
-          </a:prstGeom>
-          <a:solidFill>
-            <a:srgbClr val="FFEEE2"/>
-          </a:solidFill>
-          <a:ln>
-            <a:noFill/>
-          </a:ln>
-        </p:spPr>
-        <p:style>
-          <a:lnRef idx="1">
-            <a:schemeClr val="accent1"/>
-          </a:lnRef>
-          <a:fillRef idx="3">
-            <a:schemeClr val="accent1"/>
-          </a:fillRef>
-          <a:effectRef idx="2">
-            <a:schemeClr val="accent1"/>
-          </a:effectRef>
-          <a:fontRef idx="minor">
-            <a:schemeClr val="lt1"/>
-          </a:fontRef>
-        </p:style>
-        <p:txBody>
-          <a:bodyPr rtlCol="0" anchor="ctr"/>
-          <a:lstStyle/>
-          <a:p>
-            <a:pPr algn="ctr"/>
-          </a:p>
-        </p:txBody>
-      </p:sp>
-      <p:sp>
-        <p:nvSpPr>
-          <p:cNvPr id="34" name="Rectangle 33"/>
-          <p:cNvSpPr/>
-          <p:nvPr/>
-        </p:nvSpPr>
-        <p:spPr>
-          <a:xfrm>
-            <a:off x="6473952" y="3438144"/>
-            <a:ext cx="4389120" cy="274320"/>
-          </a:xfrm>
-          <a:prstGeom prst="rect">
-            <a:avLst/>
-          </a:prstGeom>
-          <a:noFill/>
-          <a:ln>
-            <a:noFill/>
-          </a:ln>
-        </p:spPr>
-        <p:style>
-          <a:lnRef idx="1">
-            <a:schemeClr val="accent1"/>
-          </a:lnRef>
-          <a:fillRef idx="3">
-            <a:schemeClr val="accent1"/>
-          </a:fillRef>
-          <a:effectRef idx="2">
-            <a:schemeClr val="accent1"/>
-          </a:effectRef>
-          <a:fontRef idx="minor">
-            <a:schemeClr val="lt1"/>
-          </a:fontRef>
-        </p:style>
-        <p:txBody>
-          <a:bodyPr rtlCol="0" anchor="ctr" wrap="square" lIns="9144" rIns="9144" tIns="9144" bIns="9144">
-            <a:normAutofit/>
-          </a:bodyPr>
-          <a:lstStyle/>
-          <a:p>
-            <a:pPr algn="l">
-              <a:spcAft>
-                <a:spcPts val="200"/>
-              </a:spcAft>
-            </a:pPr>
-            <a:r>
-              <a:rPr sz="1600" b="1">
-                <a:solidFill>
-                  <a:srgbClr val="F97316"/>
-                </a:solidFill>
-                <a:latin typeface="Noto Sans CJK KR"/>
-              </a:rPr>
-              <a:t>다음 단계</a:t>
-            </a:r>
-          </a:p>
-        </p:txBody>
-      </p:sp>
-      <p:sp>
-        <p:nvSpPr>
-          <p:cNvPr id="35" name="Rectangle 34"/>
-          <p:cNvSpPr/>
-          <p:nvPr/>
-        </p:nvSpPr>
-        <p:spPr>
-          <a:xfrm>
-            <a:off x="6473952" y="3867912"/>
-            <a:ext cx="4251960" cy="640080"/>
-          </a:xfrm>
-          <a:prstGeom prst="rect">
-            <a:avLst/>
-          </a:prstGeom>
-          <a:noFill/>
-          <a:ln>
-            <a:noFill/>
-          </a:ln>
-        </p:spPr>
-        <p:style>
-          <a:lnRef idx="1">
-            <a:schemeClr val="accent1"/>
-          </a:lnRef>
-          <a:fillRef idx="3">
-            <a:schemeClr val="accent1"/>
-          </a:fillRef>
-          <a:effectRef idx="2">
-            <a:schemeClr val="accent1"/>
-          </a:effectRef>
-          <a:fontRef idx="minor">
-            <a:schemeClr val="lt1"/>
-          </a:fontRef>
-        </p:style>
-        <p:txBody>
-          <a:bodyPr rtlCol="0" anchor="ctr" wrap="square" lIns="9144" rIns="9144" tIns="9144" bIns="9144">
-            <a:normAutofit/>
-          </a:bodyPr>
-          <a:lstStyle/>
-          <a:p>
-            <a:pPr algn="l">
-              <a:spcAft>
-                <a:spcPts val="200"/>
-              </a:spcAft>
-            </a:pPr>
-            <a:r>
-              <a:rPr sz="950" b="0">
-                <a:solidFill>
-                  <a:srgbClr val="141926"/>
-                </a:solidFill>
-                <a:latin typeface="Noto Sans CJK KR"/>
-              </a:rPr>
-              <a:t>• KIT OBD-II 추가 라벨 데이터 확보</a:t>
-            </a:r>
-          </a:p>
-          <a:p>
-            <a:pPr algn="l">
-              <a:spcAft>
-                <a:spcPts val="200"/>
-              </a:spcAft>
-            </a:pPr>
-            <a:r>
-              <a:rPr sz="950" b="0">
-                <a:solidFill>
-                  <a:srgbClr val="141926"/>
-                </a:solidFill>
-                <a:latin typeface="Noto Sans CJK KR"/>
-              </a:rPr>
-              <a:t>• 실제 차량 고장/정비 라벨 확장</a:t>
-            </a:r>
-          </a:p>
-          <a:p>
-            <a:pPr algn="l">
-              <a:spcAft>
-                <a:spcPts val="200"/>
-              </a:spcAft>
-            </a:pPr>
-            <a:r>
-              <a:rPr sz="950" b="0">
-                <a:solidFill>
-                  <a:srgbClr val="141926"/>
-                </a:solidFill>
-                <a:latin typeface="Noto Sans CJK KR"/>
-              </a:rPr>
-              <a:t>• 시계열 모델과 실시간 적용 구조로 개선</a:t>
-            </a:r>
-          </a:p>
-        </p:txBody>
-      </p:sp>
-      <p:sp>
-        <p:nvSpPr>
-          <p:cNvPr id="36" name="Rounded Rectangle 35"/>
-          <p:cNvSpPr/>
-          <p:nvPr/>
-        </p:nvSpPr>
-        <p:spPr>
-          <a:xfrm>
-            <a:off x="713232" y="5806440"/>
-            <a:ext cx="10698480" cy="502920"/>
-          </a:xfrm>
-          <a:prstGeom prst="roundRect">
-            <a:avLst/>
-          </a:prstGeom>
-          <a:solidFill>
-            <a:srgbClr val="E8F0FF"/>
-          </a:solidFill>
-          <a:ln>
-            <a:noFill/>
-          </a:ln>
-        </p:spPr>
-        <p:style>
-          <a:lnRef idx="1">
-            <a:schemeClr val="accent1"/>
-          </a:lnRef>
-          <a:fillRef idx="3">
-            <a:schemeClr val="accent1"/>
-          </a:fillRef>
-          <a:effectRef idx="2">
-            <a:schemeClr val="accent1"/>
-          </a:effectRef>
-          <a:fontRef idx="minor">
-            <a:schemeClr val="lt1"/>
-          </a:fontRef>
-        </p:style>
-        <p:txBody>
-          <a:bodyPr rtlCol="0" anchor="ctr"/>
-          <a:lstStyle/>
-          <a:p>
-            <a:pPr algn="ctr"/>
-          </a:p>
-        </p:txBody>
-      </p:sp>
-      <p:sp>
-        <p:nvSpPr>
-          <p:cNvPr id="37" name="Rectangle 36"/>
-          <p:cNvSpPr/>
-          <p:nvPr/>
-        </p:nvSpPr>
-        <p:spPr>
-          <a:xfrm>
-            <a:off x="987552" y="5943600"/>
-            <a:ext cx="10012680" cy="182880"/>
-          </a:xfrm>
-          <a:prstGeom prst="rect">
-            <a:avLst/>
-          </a:prstGeom>
-          <a:noFill/>
-          <a:ln>
-            <a:noFill/>
-          </a:ln>
-        </p:spPr>
-        <p:style>
-          <a:lnRef idx="1">
-            <a:schemeClr val="accent1"/>
-          </a:lnRef>
-          <a:fillRef idx="3">
-            <a:schemeClr val="accent1"/>
-          </a:fillRef>
-          <a:effectRef idx="2">
-            <a:schemeClr val="accent1"/>
-          </a:effectRef>
-          <a:fontRef idx="minor">
-            <a:schemeClr val="lt1"/>
-          </a:fontRef>
-        </p:style>
-        <p:txBody>
-          <a:bodyPr rtlCol="0" anchor="ctr" wrap="square" lIns="9144" rIns="9144" tIns="9144" bIns="9144">
-            <a:normAutofit/>
-          </a:bodyPr>
-          <a:lstStyle/>
-          <a:p>
-            <a:pPr algn="l">
-              <a:spcAft>
-                <a:spcPts val="200"/>
-              </a:spcAft>
-            </a:pPr>
-            <a:r>
-              <a:rPr sz="1019" b="1">
-                <a:solidFill>
-                  <a:srgbClr val="2563EB"/>
-                </a:solidFill>
-                <a:latin typeface="Noto Sans CJK KR"/>
-              </a:rPr>
-              <a:t>수업자료 연결: 데이터 전처리, 지도학습 분류, 이상 탐지, 성능 평가, 시각화를 실제 프로젝트 흐름으로 구현</a:t>
-            </a:r>
-          </a:p>
-        </p:txBody>
-      </p:sp>
     </p:spTree>
   </p:cSld>
   <p:clrMapOvr>
@@ -8147,7 +6111,7 @@
                 </a:solidFill>
                 <a:latin typeface="Noto Sans CJK KR"/>
               </a:rPr>
-              <a:t>metrics JSON, confusion matrix, feature importance, F1, distribution 그래프와 최종 PDF/PPT를 생성했습니다.</a:t>
+              <a:t>metrics JSON, confusion matrix, feature importance, distribution 그래프와 최종 PDF/PPT를 생성했습니다.</a:t>
             </a:r>
           </a:p>
         </p:txBody>
@@ -8393,7 +6357,7 @@
                 </a:solidFill>
                 <a:latin typeface="Noto Sans CJK KR"/>
               </a:rPr>
-              <a:t>FIVE EXPERIMENTS + ONE VERIFIED DATASET</a:t>
+              <a:t>THREE MAIN EXPERIMENTS + TWO BENCHMARKS</a:t>
             </a:r>
           </a:p>
         </p:txBody>
@@ -11100,14 +9064,115 @@
       </p:sp>
       <p:sp>
         <p:nvSpPr>
-          <p:cNvPr id="10" name="Rectangle 9"/>
-          <p:cNvSpPr/>
-          <p:nvPr/>
-        </p:nvSpPr>
-        <p:spPr>
-          <a:xfrm>
-            <a:off x="1005840" y="2121408"/>
-            <a:ext cx="4343400" cy="1874519"/>
+          <p:cNvPr id="10" name="Rounded Rectangle 9"/>
+          <p:cNvSpPr/>
+          <p:nvPr/>
+        </p:nvSpPr>
+        <p:spPr>
+          <a:xfrm>
+            <a:off x="987552" y="2103120"/>
+            <a:ext cx="4526280" cy="566928"/>
+          </a:xfrm>
+          <a:prstGeom prst="roundRect">
+            <a:avLst/>
+          </a:prstGeom>
+          <a:solidFill>
+            <a:srgbClr val="FFEEE2"/>
+          </a:solidFill>
+          <a:ln>
+            <a:noFill/>
+          </a:ln>
+        </p:spPr>
+        <p:style>
+          <a:lnRef idx="1">
+            <a:schemeClr val="accent1"/>
+          </a:lnRef>
+          <a:fillRef idx="3">
+            <a:schemeClr val="accent1"/>
+          </a:fillRef>
+          <a:effectRef idx="2">
+            <a:schemeClr val="accent1"/>
+          </a:effectRef>
+          <a:fontRef idx="minor">
+            <a:schemeClr val="lt1"/>
+          </a:fontRef>
+        </p:style>
+        <p:txBody>
+          <a:bodyPr rtlCol="0" anchor="ctr"/>
+          <a:lstStyle/>
+          <a:p>
+            <a:pPr algn="ctr"/>
+          </a:p>
+        </p:txBody>
+      </p:sp>
+      <p:sp>
+        <p:nvSpPr>
+          <p:cNvPr id="11" name="Rounded Rectangle 10"/>
+          <p:cNvSpPr/>
+          <p:nvPr/>
+        </p:nvSpPr>
+        <p:spPr>
+          <a:xfrm>
+            <a:off x="1170432" y="2249424"/>
+            <a:ext cx="420624" cy="201168"/>
+          </a:xfrm>
+          <a:prstGeom prst="roundRect">
+            <a:avLst/>
+          </a:prstGeom>
+          <a:solidFill>
+            <a:srgbClr val="FFFFFF"/>
+          </a:solidFill>
+          <a:ln>
+            <a:noFill/>
+          </a:ln>
+        </p:spPr>
+        <p:style>
+          <a:lnRef idx="1">
+            <a:schemeClr val="accent1"/>
+          </a:lnRef>
+          <a:fillRef idx="3">
+            <a:schemeClr val="accent1"/>
+          </a:fillRef>
+          <a:effectRef idx="2">
+            <a:schemeClr val="accent1"/>
+          </a:effectRef>
+          <a:fontRef idx="minor">
+            <a:schemeClr val="lt1"/>
+          </a:fontRef>
+        </p:style>
+        <p:txBody>
+          <a:bodyPr rtlCol="0" anchor="ctr" wrap="square" lIns="9144" rIns="9144" tIns="9144" bIns="9144">
+            <a:normAutofit/>
+          </a:bodyPr>
+          <a:lstStyle/>
+          <a:p>
+            <a:pPr algn="ctr">
+              <a:spcAft>
+                <a:spcPts val="200"/>
+              </a:spcAft>
+            </a:pPr>
+            <a:r>
+              <a:rPr sz="950" b="1">
+                <a:solidFill>
+                  <a:srgbClr val="F97316"/>
+                </a:solidFill>
+                <a:latin typeface="Noto Sans CJK KR"/>
+              </a:rPr>
+              <a:t>01</a:t>
+            </a:r>
+          </a:p>
+        </p:txBody>
+      </p:sp>
+      <p:sp>
+        <p:nvSpPr>
+          <p:cNvPr id="12" name="Rectangle 11"/>
+          <p:cNvSpPr/>
+          <p:nvPr/>
+        </p:nvSpPr>
+        <p:spPr>
+          <a:xfrm>
+            <a:off x="1755648" y="2212848"/>
+            <a:ext cx="950976" cy="219456"/>
           </a:xfrm>
           <a:prstGeom prst="rect">
             <a:avLst/>
@@ -11143,15 +9208,55 @@
               </a:spcAft>
             </a:pPr>
             <a:r>
-              <a:rPr sz="980" b="0">
-                <a:solidFill>
-                  <a:srgbClr val="141926"/>
+              <a:rPr sz="1030" b="1">
+                <a:solidFill>
+                  <a:srgbClr val="F97316"/>
                 </a:solidFill>
                 <a:latin typeface="Noto Sans CJK KR"/>
               </a:rPr>
-              <a:t>• 원천 CSV/ZIP 로드 후 표준 feature명으로 컬럼 매핑</a:t>
-            </a:r>
-          </a:p>
+              <a:t>컬럼 매핑</a:t>
+            </a:r>
+          </a:p>
+        </p:txBody>
+      </p:sp>
+      <p:sp>
+        <p:nvSpPr>
+          <p:cNvPr id="13" name="Rectangle 12"/>
+          <p:cNvSpPr/>
+          <p:nvPr/>
+        </p:nvSpPr>
+        <p:spPr>
+          <a:xfrm>
+            <a:off x="2816352" y="2203703"/>
+            <a:ext cx="2331720" cy="219456"/>
+          </a:xfrm>
+          <a:prstGeom prst="rect">
+            <a:avLst/>
+          </a:prstGeom>
+          <a:noFill/>
+          <a:ln>
+            <a:noFill/>
+          </a:ln>
+        </p:spPr>
+        <p:style>
+          <a:lnRef idx="1">
+            <a:schemeClr val="accent1"/>
+          </a:lnRef>
+          <a:fillRef idx="3">
+            <a:schemeClr val="accent1"/>
+          </a:fillRef>
+          <a:effectRef idx="2">
+            <a:schemeClr val="accent1"/>
+          </a:effectRef>
+          <a:fontRef idx="minor">
+            <a:schemeClr val="lt1"/>
+          </a:fontRef>
+        </p:style>
+        <p:txBody>
+          <a:bodyPr rtlCol="0" anchor="ctr" wrap="square" lIns="9144" rIns="9144" tIns="9144" bIns="9144">
+            <a:normAutofit/>
+          </a:bodyPr>
+          <a:lstStyle/>
           <a:p>
             <a:pPr algn="l">
               <a:spcAft>
@@ -11159,15 +9264,156 @@
               </a:spcAft>
             </a:pPr>
             <a:r>
-              <a:rPr sz="980" b="0">
+              <a:rPr sz="830" b="0">
                 <a:solidFill>
                   <a:srgbClr val="141926"/>
                 </a:solidFill>
                 <a:latin typeface="Noto Sans CJK KR"/>
               </a:rPr>
-              <a:t>• 수치형 변환, 필수 feature와 라벨 기준 결측 행 제거</a:t>
-            </a:r>
-          </a:p>
+              <a:t>원천 CSV/ZIP을 표준 feature명으로 통일</a:t>
+            </a:r>
+          </a:p>
+        </p:txBody>
+      </p:sp>
+      <p:sp>
+        <p:nvSpPr>
+          <p:cNvPr id="14" name="Rounded Rectangle 13"/>
+          <p:cNvSpPr/>
+          <p:nvPr/>
+        </p:nvSpPr>
+        <p:spPr>
+          <a:xfrm>
+            <a:off x="987552" y="2834640"/>
+            <a:ext cx="4526280" cy="566928"/>
+          </a:xfrm>
+          <a:prstGeom prst="roundRect">
+            <a:avLst/>
+          </a:prstGeom>
+          <a:solidFill>
+            <a:srgbClr val="E2F9FC"/>
+          </a:solidFill>
+          <a:ln>
+            <a:noFill/>
+          </a:ln>
+        </p:spPr>
+        <p:style>
+          <a:lnRef idx="1">
+            <a:schemeClr val="accent1"/>
+          </a:lnRef>
+          <a:fillRef idx="3">
+            <a:schemeClr val="accent1"/>
+          </a:fillRef>
+          <a:effectRef idx="2">
+            <a:schemeClr val="accent1"/>
+          </a:effectRef>
+          <a:fontRef idx="minor">
+            <a:schemeClr val="lt1"/>
+          </a:fontRef>
+        </p:style>
+        <p:txBody>
+          <a:bodyPr rtlCol="0" anchor="ctr"/>
+          <a:lstStyle/>
+          <a:p>
+            <a:pPr algn="ctr"/>
+          </a:p>
+        </p:txBody>
+      </p:sp>
+      <p:sp>
+        <p:nvSpPr>
+          <p:cNvPr id="15" name="Rounded Rectangle 14"/>
+          <p:cNvSpPr/>
+          <p:nvPr/>
+        </p:nvSpPr>
+        <p:spPr>
+          <a:xfrm>
+            <a:off x="1170432" y="2980944"/>
+            <a:ext cx="420624" cy="201168"/>
+          </a:xfrm>
+          <a:prstGeom prst="roundRect">
+            <a:avLst/>
+          </a:prstGeom>
+          <a:solidFill>
+            <a:srgbClr val="FFFFFF"/>
+          </a:solidFill>
+          <a:ln>
+            <a:noFill/>
+          </a:ln>
+        </p:spPr>
+        <p:style>
+          <a:lnRef idx="1">
+            <a:schemeClr val="accent1"/>
+          </a:lnRef>
+          <a:fillRef idx="3">
+            <a:schemeClr val="accent1"/>
+          </a:fillRef>
+          <a:effectRef idx="2">
+            <a:schemeClr val="accent1"/>
+          </a:effectRef>
+          <a:fontRef idx="minor">
+            <a:schemeClr val="lt1"/>
+          </a:fontRef>
+        </p:style>
+        <p:txBody>
+          <a:bodyPr rtlCol="0" anchor="ctr" wrap="square" lIns="9144" rIns="9144" tIns="9144" bIns="9144">
+            <a:normAutofit/>
+          </a:bodyPr>
+          <a:lstStyle/>
+          <a:p>
+            <a:pPr algn="ctr">
+              <a:spcAft>
+                <a:spcPts val="200"/>
+              </a:spcAft>
+            </a:pPr>
+            <a:r>
+              <a:rPr sz="950" b="1">
+                <a:solidFill>
+                  <a:srgbClr val="08BCDA"/>
+                </a:solidFill>
+                <a:latin typeface="Noto Sans CJK KR"/>
+              </a:rPr>
+              <a:t>02</a:t>
+            </a:r>
+          </a:p>
+        </p:txBody>
+      </p:sp>
+      <p:sp>
+        <p:nvSpPr>
+          <p:cNvPr id="16" name="Rectangle 15"/>
+          <p:cNvSpPr/>
+          <p:nvPr/>
+        </p:nvSpPr>
+        <p:spPr>
+          <a:xfrm>
+            <a:off x="1755648" y="2944368"/>
+            <a:ext cx="950976" cy="219456"/>
+          </a:xfrm>
+          <a:prstGeom prst="rect">
+            <a:avLst/>
+          </a:prstGeom>
+          <a:noFill/>
+          <a:ln>
+            <a:noFill/>
+          </a:ln>
+        </p:spPr>
+        <p:style>
+          <a:lnRef idx="1">
+            <a:schemeClr val="accent1"/>
+          </a:lnRef>
+          <a:fillRef idx="3">
+            <a:schemeClr val="accent1"/>
+          </a:fillRef>
+          <a:effectRef idx="2">
+            <a:schemeClr val="accent1"/>
+          </a:effectRef>
+          <a:fontRef idx="minor">
+            <a:schemeClr val="lt1"/>
+          </a:fontRef>
+        </p:style>
+        <p:txBody>
+          <a:bodyPr rtlCol="0" anchor="ctr" wrap="square" lIns="9144" rIns="9144" tIns="9144" bIns="9144">
+            <a:normAutofit/>
+          </a:bodyPr>
+          <a:lstStyle/>
           <a:p>
             <a:pPr algn="l">
               <a:spcAft>
@@ -11175,15 +9421,55 @@
               </a:spcAft>
             </a:pPr>
             <a:r>
-              <a:rPr sz="980" b="0">
-                <a:solidFill>
-                  <a:srgbClr val="141926"/>
+              <a:rPr sz="1030" b="1">
+                <a:solidFill>
+                  <a:srgbClr val="08BCDA"/>
                 </a:solidFill>
                 <a:latin typeface="Noto Sans CJK KR"/>
               </a:rPr>
-              <a:t>• OBD Label 0-&gt;aggressive, Label 1-&gt;moderate</a:t>
-            </a:r>
-          </a:p>
+              <a:t>정제</a:t>
+            </a:r>
+          </a:p>
+        </p:txBody>
+      </p:sp>
+      <p:sp>
+        <p:nvSpPr>
+          <p:cNvPr id="17" name="Rectangle 16"/>
+          <p:cNvSpPr/>
+          <p:nvPr/>
+        </p:nvSpPr>
+        <p:spPr>
+          <a:xfrm>
+            <a:off x="2816352" y="2935224"/>
+            <a:ext cx="2331720" cy="219456"/>
+          </a:xfrm>
+          <a:prstGeom prst="rect">
+            <a:avLst/>
+          </a:prstGeom>
+          <a:noFill/>
+          <a:ln>
+            <a:noFill/>
+          </a:ln>
+        </p:spPr>
+        <p:style>
+          <a:lnRef idx="1">
+            <a:schemeClr val="accent1"/>
+          </a:lnRef>
+          <a:fillRef idx="3">
+            <a:schemeClr val="accent1"/>
+          </a:fillRef>
+          <a:effectRef idx="2">
+            <a:schemeClr val="accent1"/>
+          </a:effectRef>
+          <a:fontRef idx="minor">
+            <a:schemeClr val="lt1"/>
+          </a:fontRef>
+        </p:style>
+        <p:txBody>
+          <a:bodyPr rtlCol="0" anchor="ctr" wrap="square" lIns="9144" rIns="9144" tIns="9144" bIns="9144">
+            <a:normAutofit/>
+          </a:bodyPr>
+          <a:lstStyle/>
           <a:p>
             <a:pPr algn="l">
               <a:spcAft>
@@ -11191,15 +9477,156 @@
               </a:spcAft>
             </a:pPr>
             <a:r>
-              <a:rPr sz="980" b="0">
+              <a:rPr sz="830" b="0">
                 <a:solidFill>
                   <a:srgbClr val="141926"/>
                 </a:solidFill>
                 <a:latin typeface="Noto Sans CJK KR"/>
               </a:rPr>
-              <a:t>• 정비 데이터 failure flag를 issue_label로 통합</a:t>
-            </a:r>
-          </a:p>
+              <a:t>수치형 변환, 결측 행 제거, 필수 feature 검증</a:t>
+            </a:r>
+          </a:p>
+        </p:txBody>
+      </p:sp>
+      <p:sp>
+        <p:nvSpPr>
+          <p:cNvPr id="18" name="Rounded Rectangle 17"/>
+          <p:cNvSpPr/>
+          <p:nvPr/>
+        </p:nvSpPr>
+        <p:spPr>
+          <a:xfrm>
+            <a:off x="987552" y="3566160"/>
+            <a:ext cx="4526280" cy="566928"/>
+          </a:xfrm>
+          <a:prstGeom prst="roundRect">
+            <a:avLst/>
+          </a:prstGeom>
+          <a:solidFill>
+            <a:srgbClr val="E8F0FF"/>
+          </a:solidFill>
+          <a:ln>
+            <a:noFill/>
+          </a:ln>
+        </p:spPr>
+        <p:style>
+          <a:lnRef idx="1">
+            <a:schemeClr val="accent1"/>
+          </a:lnRef>
+          <a:fillRef idx="3">
+            <a:schemeClr val="accent1"/>
+          </a:fillRef>
+          <a:effectRef idx="2">
+            <a:schemeClr val="accent1"/>
+          </a:effectRef>
+          <a:fontRef idx="minor">
+            <a:schemeClr val="lt1"/>
+          </a:fontRef>
+        </p:style>
+        <p:txBody>
+          <a:bodyPr rtlCol="0" anchor="ctr"/>
+          <a:lstStyle/>
+          <a:p>
+            <a:pPr algn="ctr"/>
+          </a:p>
+        </p:txBody>
+      </p:sp>
+      <p:sp>
+        <p:nvSpPr>
+          <p:cNvPr id="19" name="Rounded Rectangle 18"/>
+          <p:cNvSpPr/>
+          <p:nvPr/>
+        </p:nvSpPr>
+        <p:spPr>
+          <a:xfrm>
+            <a:off x="1170432" y="3712463"/>
+            <a:ext cx="420624" cy="201168"/>
+          </a:xfrm>
+          <a:prstGeom prst="roundRect">
+            <a:avLst/>
+          </a:prstGeom>
+          <a:solidFill>
+            <a:srgbClr val="FFFFFF"/>
+          </a:solidFill>
+          <a:ln>
+            <a:noFill/>
+          </a:ln>
+        </p:spPr>
+        <p:style>
+          <a:lnRef idx="1">
+            <a:schemeClr val="accent1"/>
+          </a:lnRef>
+          <a:fillRef idx="3">
+            <a:schemeClr val="accent1"/>
+          </a:fillRef>
+          <a:effectRef idx="2">
+            <a:schemeClr val="accent1"/>
+          </a:effectRef>
+          <a:fontRef idx="minor">
+            <a:schemeClr val="lt1"/>
+          </a:fontRef>
+        </p:style>
+        <p:txBody>
+          <a:bodyPr rtlCol="0" anchor="ctr" wrap="square" lIns="9144" rIns="9144" tIns="9144" bIns="9144">
+            <a:normAutofit/>
+          </a:bodyPr>
+          <a:lstStyle/>
+          <a:p>
+            <a:pPr algn="ctr">
+              <a:spcAft>
+                <a:spcPts val="200"/>
+              </a:spcAft>
+            </a:pPr>
+            <a:r>
+              <a:rPr sz="950" b="1">
+                <a:solidFill>
+                  <a:srgbClr val="2563EB"/>
+                </a:solidFill>
+                <a:latin typeface="Noto Sans CJK KR"/>
+              </a:rPr>
+              <a:t>03</a:t>
+            </a:r>
+          </a:p>
+        </p:txBody>
+      </p:sp>
+      <p:sp>
+        <p:nvSpPr>
+          <p:cNvPr id="20" name="Rectangle 19"/>
+          <p:cNvSpPr/>
+          <p:nvPr/>
+        </p:nvSpPr>
+        <p:spPr>
+          <a:xfrm>
+            <a:off x="1755648" y="3675887"/>
+            <a:ext cx="950976" cy="219456"/>
+          </a:xfrm>
+          <a:prstGeom prst="rect">
+            <a:avLst/>
+          </a:prstGeom>
+          <a:noFill/>
+          <a:ln>
+            <a:noFill/>
+          </a:ln>
+        </p:spPr>
+        <p:style>
+          <a:lnRef idx="1">
+            <a:schemeClr val="accent1"/>
+          </a:lnRef>
+          <a:fillRef idx="3">
+            <a:schemeClr val="accent1"/>
+          </a:fillRef>
+          <a:effectRef idx="2">
+            <a:schemeClr val="accent1"/>
+          </a:effectRef>
+          <a:fontRef idx="minor">
+            <a:schemeClr val="lt1"/>
+          </a:fontRef>
+        </p:style>
+        <p:txBody>
+          <a:bodyPr rtlCol="0" anchor="ctr" wrap="square" lIns="9144" rIns="9144" tIns="9144" bIns="9144">
+            <a:normAutofit/>
+          </a:bodyPr>
+          <a:lstStyle/>
           <a:p>
             <a:pPr algn="l">
               <a:spcAft>
@@ -11207,20 +9634,345 @@
               </a:spcAft>
             </a:pPr>
             <a:r>
-              <a:rPr sz="980" b="0">
-                <a:solidFill>
-                  <a:srgbClr val="141926"/>
+              <a:rPr sz="1030" b="1">
+                <a:solidFill>
+                  <a:srgbClr val="2563EB"/>
                 </a:solidFill>
                 <a:latin typeface="Noto Sans CJK KR"/>
               </a:rPr>
-              <a:t>• train/test 75/25 stratified split, seed=42</a:t>
-            </a:r>
-          </a:p>
-        </p:txBody>
-      </p:sp>
-      <p:sp>
-        <p:nvSpPr>
-          <p:cNvPr id="11" name="Rounded Rectangle 10"/>
+              <a:t>라벨 통합</a:t>
+            </a:r>
+          </a:p>
+        </p:txBody>
+      </p:sp>
+      <p:sp>
+        <p:nvSpPr>
+          <p:cNvPr id="21" name="Rectangle 20"/>
+          <p:cNvSpPr/>
+          <p:nvPr/>
+        </p:nvSpPr>
+        <p:spPr>
+          <a:xfrm>
+            <a:off x="2816352" y="3666744"/>
+            <a:ext cx="2331720" cy="219456"/>
+          </a:xfrm>
+          <a:prstGeom prst="rect">
+            <a:avLst/>
+          </a:prstGeom>
+          <a:noFill/>
+          <a:ln>
+            <a:noFill/>
+          </a:ln>
+        </p:spPr>
+        <p:style>
+          <a:lnRef idx="1">
+            <a:schemeClr val="accent1"/>
+          </a:lnRef>
+          <a:fillRef idx="3">
+            <a:schemeClr val="accent1"/>
+          </a:fillRef>
+          <a:effectRef idx="2">
+            <a:schemeClr val="accent1"/>
+          </a:effectRef>
+          <a:fontRef idx="minor">
+            <a:schemeClr val="lt1"/>
+          </a:fontRef>
+        </p:style>
+        <p:txBody>
+          <a:bodyPr rtlCol="0" anchor="ctr" wrap="square" lIns="9144" rIns="9144" tIns="9144" bIns="9144">
+            <a:normAutofit/>
+          </a:bodyPr>
+          <a:lstStyle/>
+          <a:p>
+            <a:pPr algn="l">
+              <a:spcAft>
+                <a:spcPts val="200"/>
+              </a:spcAft>
+            </a:pPr>
+            <a:r>
+              <a:rPr sz="830" b="0">
+                <a:solidFill>
+                  <a:srgbClr val="141926"/>
+                </a:solidFill>
+                <a:latin typeface="Noto Sans CJK KR"/>
+              </a:rPr>
+              <a:t>주행 습관·정비 상태 라벨을 모델 target으로 변환</a:t>
+            </a:r>
+          </a:p>
+        </p:txBody>
+      </p:sp>
+      <p:sp>
+        <p:nvSpPr>
+          <p:cNvPr id="22" name="Rounded Rectangle 21"/>
+          <p:cNvSpPr/>
+          <p:nvPr/>
+        </p:nvSpPr>
+        <p:spPr>
+          <a:xfrm>
+            <a:off x="987552" y="4297680"/>
+            <a:ext cx="4526280" cy="566928"/>
+          </a:xfrm>
+          <a:prstGeom prst="roundRect">
+            <a:avLst/>
+          </a:prstGeom>
+          <a:solidFill>
+            <a:srgbClr val="E6F8F2"/>
+          </a:solidFill>
+          <a:ln>
+            <a:noFill/>
+          </a:ln>
+        </p:spPr>
+        <p:style>
+          <a:lnRef idx="1">
+            <a:schemeClr val="accent1"/>
+          </a:lnRef>
+          <a:fillRef idx="3">
+            <a:schemeClr val="accent1"/>
+          </a:fillRef>
+          <a:effectRef idx="2">
+            <a:schemeClr val="accent1"/>
+          </a:effectRef>
+          <a:fontRef idx="minor">
+            <a:schemeClr val="lt1"/>
+          </a:fontRef>
+        </p:style>
+        <p:txBody>
+          <a:bodyPr rtlCol="0" anchor="ctr"/>
+          <a:lstStyle/>
+          <a:p>
+            <a:pPr algn="ctr"/>
+          </a:p>
+        </p:txBody>
+      </p:sp>
+      <p:sp>
+        <p:nvSpPr>
+          <p:cNvPr id="23" name="Rounded Rectangle 22"/>
+          <p:cNvSpPr/>
+          <p:nvPr/>
+        </p:nvSpPr>
+        <p:spPr>
+          <a:xfrm>
+            <a:off x="1170432" y="4443984"/>
+            <a:ext cx="420624" cy="201168"/>
+          </a:xfrm>
+          <a:prstGeom prst="roundRect">
+            <a:avLst/>
+          </a:prstGeom>
+          <a:solidFill>
+            <a:srgbClr val="FFFFFF"/>
+          </a:solidFill>
+          <a:ln>
+            <a:noFill/>
+          </a:ln>
+        </p:spPr>
+        <p:style>
+          <a:lnRef idx="1">
+            <a:schemeClr val="accent1"/>
+          </a:lnRef>
+          <a:fillRef idx="3">
+            <a:schemeClr val="accent1"/>
+          </a:fillRef>
+          <a:effectRef idx="2">
+            <a:schemeClr val="accent1"/>
+          </a:effectRef>
+          <a:fontRef idx="minor">
+            <a:schemeClr val="lt1"/>
+          </a:fontRef>
+        </p:style>
+        <p:txBody>
+          <a:bodyPr rtlCol="0" anchor="ctr" wrap="square" lIns="9144" rIns="9144" tIns="9144" bIns="9144">
+            <a:normAutofit/>
+          </a:bodyPr>
+          <a:lstStyle/>
+          <a:p>
+            <a:pPr algn="ctr">
+              <a:spcAft>
+                <a:spcPts val="200"/>
+              </a:spcAft>
+            </a:pPr>
+            <a:r>
+              <a:rPr sz="950" b="1">
+                <a:solidFill>
+                  <a:srgbClr val="10B981"/>
+                </a:solidFill>
+                <a:latin typeface="Noto Sans CJK KR"/>
+              </a:rPr>
+              <a:t>04</a:t>
+            </a:r>
+          </a:p>
+        </p:txBody>
+      </p:sp>
+      <p:sp>
+        <p:nvSpPr>
+          <p:cNvPr id="24" name="Rectangle 23"/>
+          <p:cNvSpPr/>
+          <p:nvPr/>
+        </p:nvSpPr>
+        <p:spPr>
+          <a:xfrm>
+            <a:off x="1755648" y="4407408"/>
+            <a:ext cx="950976" cy="219456"/>
+          </a:xfrm>
+          <a:prstGeom prst="rect">
+            <a:avLst/>
+          </a:prstGeom>
+          <a:noFill/>
+          <a:ln>
+            <a:noFill/>
+          </a:ln>
+        </p:spPr>
+        <p:style>
+          <a:lnRef idx="1">
+            <a:schemeClr val="accent1"/>
+          </a:lnRef>
+          <a:fillRef idx="3">
+            <a:schemeClr val="accent1"/>
+          </a:fillRef>
+          <a:effectRef idx="2">
+            <a:schemeClr val="accent1"/>
+          </a:effectRef>
+          <a:fontRef idx="minor">
+            <a:schemeClr val="lt1"/>
+          </a:fontRef>
+        </p:style>
+        <p:txBody>
+          <a:bodyPr rtlCol="0" anchor="ctr" wrap="square" lIns="9144" rIns="9144" tIns="9144" bIns="9144">
+            <a:normAutofit/>
+          </a:bodyPr>
+          <a:lstStyle/>
+          <a:p>
+            <a:pPr algn="l">
+              <a:spcAft>
+                <a:spcPts val="200"/>
+              </a:spcAft>
+            </a:pPr>
+            <a:r>
+              <a:rPr sz="1030" b="1">
+                <a:solidFill>
+                  <a:srgbClr val="10B981"/>
+                </a:solidFill>
+                <a:latin typeface="Noto Sans CJK KR"/>
+              </a:rPr>
+              <a:t>분리</a:t>
+            </a:r>
+          </a:p>
+        </p:txBody>
+      </p:sp>
+      <p:sp>
+        <p:nvSpPr>
+          <p:cNvPr id="25" name="Rectangle 24"/>
+          <p:cNvSpPr/>
+          <p:nvPr/>
+        </p:nvSpPr>
+        <p:spPr>
+          <a:xfrm>
+            <a:off x="2816352" y="4398264"/>
+            <a:ext cx="2331720" cy="219456"/>
+          </a:xfrm>
+          <a:prstGeom prst="rect">
+            <a:avLst/>
+          </a:prstGeom>
+          <a:noFill/>
+          <a:ln>
+            <a:noFill/>
+          </a:ln>
+        </p:spPr>
+        <p:style>
+          <a:lnRef idx="1">
+            <a:schemeClr val="accent1"/>
+          </a:lnRef>
+          <a:fillRef idx="3">
+            <a:schemeClr val="accent1"/>
+          </a:fillRef>
+          <a:effectRef idx="2">
+            <a:schemeClr val="accent1"/>
+          </a:effectRef>
+          <a:fontRef idx="minor">
+            <a:schemeClr val="lt1"/>
+          </a:fontRef>
+        </p:style>
+        <p:txBody>
+          <a:bodyPr rtlCol="0" anchor="ctr" wrap="square" lIns="9144" rIns="9144" tIns="9144" bIns="9144">
+            <a:normAutofit/>
+          </a:bodyPr>
+          <a:lstStyle/>
+          <a:p>
+            <a:pPr algn="l">
+              <a:spcAft>
+                <a:spcPts val="200"/>
+              </a:spcAft>
+            </a:pPr>
+            <a:r>
+              <a:rPr sz="830" b="0">
+                <a:solidFill>
+                  <a:srgbClr val="141926"/>
+                </a:solidFill>
+                <a:latin typeface="Noto Sans CJK KR"/>
+              </a:rPr>
+              <a:t>train/test 75/25 stratified split, seed=42</a:t>
+            </a:r>
+          </a:p>
+        </p:txBody>
+      </p:sp>
+      <p:sp>
+        <p:nvSpPr>
+          <p:cNvPr id="26" name="Rectangle 25"/>
+          <p:cNvSpPr/>
+          <p:nvPr/>
+        </p:nvSpPr>
+        <p:spPr>
+          <a:xfrm>
+            <a:off x="1051560" y="5230368"/>
+            <a:ext cx="4389120" cy="219456"/>
+          </a:xfrm>
+          <a:prstGeom prst="rect">
+            <a:avLst/>
+          </a:prstGeom>
+          <a:noFill/>
+          <a:ln>
+            <a:noFill/>
+          </a:ln>
+        </p:spPr>
+        <p:style>
+          <a:lnRef idx="1">
+            <a:schemeClr val="accent1"/>
+          </a:lnRef>
+          <a:fillRef idx="3">
+            <a:schemeClr val="accent1"/>
+          </a:fillRef>
+          <a:effectRef idx="2">
+            <a:schemeClr val="accent1"/>
+          </a:effectRef>
+          <a:fontRef idx="minor">
+            <a:schemeClr val="lt1"/>
+          </a:fontRef>
+        </p:style>
+        <p:txBody>
+          <a:bodyPr rtlCol="0" anchor="ctr" wrap="square" lIns="9144" rIns="9144" tIns="9144" bIns="9144">
+            <a:normAutofit/>
+          </a:bodyPr>
+          <a:lstStyle/>
+          <a:p>
+            <a:pPr algn="l">
+              <a:spcAft>
+                <a:spcPts val="200"/>
+              </a:spcAft>
+            </a:pPr>
+            <a:r>
+              <a:rPr sz="869" b="1">
+                <a:solidFill>
+                  <a:srgbClr val="606E80"/>
+                </a:solidFill>
+                <a:latin typeface="Noto Sans CJK KR"/>
+              </a:rPr>
+              <a:t>같은 전처리 schema를 새 데이터에도 적용해 실험 간 비교가 가능하도록 구성</a:t>
+            </a:r>
+          </a:p>
+        </p:txBody>
+      </p:sp>
+      <p:sp>
+        <p:nvSpPr>
+          <p:cNvPr id="27" name="Rounded Rectangle 26"/>
           <p:cNvSpPr/>
           <p:nvPr/>
         </p:nvSpPr>
@@ -11265,7 +10017,7 @@
       </p:sp>
       <p:sp>
         <p:nvSpPr>
-          <p:cNvPr id="12" name="Rectangle 11"/>
+          <p:cNvPr id="28" name="Rectangle 27"/>
           <p:cNvSpPr/>
           <p:nvPr/>
         </p:nvSpPr>
@@ -11321,7 +10073,7 @@
       </p:sp>
       <p:sp>
         <p:nvSpPr>
-          <p:cNvPr id="13" name="Rounded Rectangle 12"/>
+          <p:cNvPr id="29" name="Rounded Rectangle 28"/>
           <p:cNvSpPr/>
           <p:nvPr/>
         </p:nvSpPr>
@@ -11379,7 +10131,7 @@
       </p:sp>
       <p:sp>
         <p:nvSpPr>
-          <p:cNvPr id="14" name="Rectangle 13"/>
+          <p:cNvPr id="30" name="Rectangle 29"/>
           <p:cNvSpPr/>
           <p:nvPr/>
         </p:nvSpPr>
@@ -11435,7 +10187,7 @@
       </p:sp>
       <p:sp>
         <p:nvSpPr>
-          <p:cNvPr id="15" name="Rounded Rectangle 14"/>
+          <p:cNvPr id="31" name="Rounded Rectangle 30"/>
           <p:cNvSpPr/>
           <p:nvPr/>
         </p:nvSpPr>
@@ -11493,7 +10245,7 @@
       </p:sp>
       <p:sp>
         <p:nvSpPr>
-          <p:cNvPr id="16" name="Rectangle 15"/>
+          <p:cNvPr id="32" name="Rectangle 31"/>
           <p:cNvSpPr/>
           <p:nvPr/>
         </p:nvSpPr>
@@ -11549,7 +10301,7 @@
       </p:sp>
       <p:sp>
         <p:nvSpPr>
-          <p:cNvPr id="17" name="Rounded Rectangle 16"/>
+          <p:cNvPr id="33" name="Rounded Rectangle 32"/>
           <p:cNvSpPr/>
           <p:nvPr/>
         </p:nvSpPr>
@@ -11607,7 +10359,7 @@
       </p:sp>
       <p:sp>
         <p:nvSpPr>
-          <p:cNvPr id="18" name="Rectangle 17"/>
+          <p:cNvPr id="34" name="Rectangle 33"/>
           <p:cNvSpPr/>
           <p:nvPr/>
         </p:nvSpPr>
@@ -11972,7 +10724,7 @@
         <p:spPr>
           <a:xfrm>
             <a:off x="566928" y="1261872"/>
-            <a:ext cx="2423160" cy="5120640"/>
+            <a:ext cx="2743200" cy="5120640"/>
           </a:xfrm>
           <a:prstGeom prst="roundRect">
             <a:avLst/>
@@ -12017,7 +10769,7 @@
         <p:spPr>
           <a:xfrm>
             <a:off x="822960" y="1572768"/>
-            <a:ext cx="1828800" cy="256032"/>
+            <a:ext cx="2103120" cy="256032"/>
           </a:xfrm>
           <a:prstGeom prst="rect">
             <a:avLst/>
@@ -12538,7 +11290,7 @@
         <p:spPr>
           <a:xfrm>
             <a:off x="841248" y="4480560"/>
-            <a:ext cx="1901952" cy="27432"/>
+            <a:ext cx="2249424" cy="27432"/>
           </a:xfrm>
           <a:prstGeom prst="rect">
             <a:avLst/>
@@ -12581,7 +11333,7 @@
         <p:spPr>
           <a:xfrm>
             <a:off x="822960" y="4718304"/>
-            <a:ext cx="1965960" cy="1060704"/>
+            <a:ext cx="2286000" cy="1060704"/>
           </a:xfrm>
           <a:prstGeom prst="rect">
             <a:avLst/>
@@ -12669,7 +11421,7 @@
         <p:spPr>
           <a:xfrm>
             <a:off x="3364992" y="1261872"/>
-            <a:ext cx="3675887" cy="2578608"/>
+            <a:ext cx="3675887" cy="2468880"/>
           </a:xfrm>
           <a:prstGeom prst="roundRect">
             <a:avLst/>
@@ -12799,7 +11551,7 @@
                 </a:solidFill>
                 <a:latin typeface="Noto Sans CJK KR"/>
               </a:rPr>
-              <a:t>Confusion Matrix</a:t>
+              <a:t>예측 결과</a:t>
             </a:r>
           </a:p>
         </p:txBody>
@@ -12820,8 +11572,8 @@
         </p:blipFill>
         <p:spPr>
           <a:xfrm>
-            <a:off x="3917696" y="1627631"/>
-            <a:ext cx="2570480" cy="2103120"/>
+            <a:off x="3984752" y="1627631"/>
+            <a:ext cx="2436368" cy="1993392"/>
           </a:xfrm>
           <a:prstGeom prst="rect">
             <a:avLst/>
@@ -12837,7 +11589,7 @@
         <p:spPr>
           <a:xfrm>
             <a:off x="7360920" y="1261872"/>
-            <a:ext cx="3675887" cy="2578608"/>
+            <a:ext cx="3675887" cy="2468880"/>
           </a:xfrm>
           <a:prstGeom prst="roundRect">
             <a:avLst/>
@@ -12967,7 +11719,7 @@
                 </a:solidFill>
                 <a:latin typeface="Noto Sans CJK KR"/>
               </a:rPr>
-              <a:t>Feature Importance</a:t>
+              <a:t>판단 근거</a:t>
             </a:r>
           </a:p>
         </p:txBody>
@@ -12988,8 +11740,8 @@
         </p:blipFill>
         <p:spPr>
           <a:xfrm>
-            <a:off x="7665339" y="1627631"/>
-            <a:ext cx="3067050" cy="2103120"/>
+            <a:off x="7745349" y="1627631"/>
+            <a:ext cx="2907030" cy="1993392"/>
           </a:xfrm>
           <a:prstGeom prst="rect">
             <a:avLst/>
@@ -13004,8 +11756,8 @@
         </p:nvSpPr>
         <p:spPr>
           <a:xfrm>
-            <a:off x="3364992" y="4096512"/>
-            <a:ext cx="2834640" cy="1993392"/>
+            <a:off x="3364992" y="4059936"/>
+            <a:ext cx="7671816" cy="2121408"/>
           </a:xfrm>
           <a:prstGeom prst="roundRect">
             <a:avLst/>
@@ -13049,14 +11801,14 @@
         </p:nvSpPr>
         <p:spPr>
           <a:xfrm>
-            <a:off x="3364992" y="4096512"/>
-            <a:ext cx="2834640" cy="73152"/>
+            <a:off x="3364992" y="4059936"/>
+            <a:ext cx="7671816" cy="73152"/>
           </a:xfrm>
           <a:prstGeom prst="rect">
             <a:avLst/>
           </a:prstGeom>
           <a:solidFill>
-            <a:srgbClr val="F97316"/>
+            <a:srgbClr val="10B981"/>
           </a:solidFill>
           <a:ln>
             <a:noFill/>
@@ -13092,8 +11844,8 @@
         </p:nvSpPr>
         <p:spPr>
           <a:xfrm>
-            <a:off x="3493008" y="4215384"/>
-            <a:ext cx="2578608" cy="182880"/>
+            <a:off x="3493008" y="4178808"/>
+            <a:ext cx="7415784" cy="182880"/>
           </a:xfrm>
           <a:prstGeom prst="rect">
             <a:avLst/>
@@ -13135,14 +11887,14 @@
                 </a:solidFill>
                 <a:latin typeface="Noto Sans CJK KR"/>
               </a:rPr>
-              <a:t>F1 Scores</a:t>
+              <a:t>센서 분포</a:t>
             </a:r>
           </a:p>
         </p:txBody>
       </p:sp>
       <p:pic>
         <p:nvPicPr>
-          <p:cNvPr id="32" name="Picture 31" descr="mendeley_f1_scores.png"/>
+          <p:cNvPr id="32" name="Picture 31" descr="mendeley_sensor_distribution.png"/>
           <p:cNvPicPr>
             <a:picLocks noChangeAspect="1"/>
           </p:cNvPicPr>
@@ -13156,176 +11908,8 @@
         </p:blipFill>
         <p:spPr>
           <a:xfrm>
-            <a:off x="3788446" y="4462272"/>
-            <a:ext cx="1987731" cy="1517904"/>
-          </a:xfrm>
-          <a:prstGeom prst="rect">
-            <a:avLst/>
-          </a:prstGeom>
-        </p:spPr>
-      </p:pic>
-      <p:sp>
-        <p:nvSpPr>
-          <p:cNvPr id="33" name="Rounded Rectangle 32"/>
-          <p:cNvSpPr/>
-          <p:nvPr/>
-        </p:nvSpPr>
-        <p:spPr>
-          <a:xfrm>
-            <a:off x="6510528" y="4096512"/>
-            <a:ext cx="4526280" cy="1993392"/>
-          </a:xfrm>
-          <a:prstGeom prst="roundRect">
-            <a:avLst/>
-          </a:prstGeom>
-          <a:solidFill>
-            <a:srgbClr val="FFFFFF"/>
-          </a:solidFill>
-          <a:ln w="7620">
-            <a:solidFill>
-              <a:srgbClr val="E1E8F0"/>
-            </a:solidFill>
-          </a:ln>
-        </p:spPr>
-        <p:style>
-          <a:lnRef idx="1">
-            <a:schemeClr val="accent1"/>
-          </a:lnRef>
-          <a:fillRef idx="3">
-            <a:schemeClr val="accent1"/>
-          </a:fillRef>
-          <a:effectRef idx="2">
-            <a:schemeClr val="accent1"/>
-          </a:effectRef>
-          <a:fontRef idx="minor">
-            <a:schemeClr val="lt1"/>
-          </a:fontRef>
-        </p:style>
-        <p:txBody>
-          <a:bodyPr rtlCol="0" anchor="ctr"/>
-          <a:lstStyle/>
-          <a:p>
-            <a:pPr algn="ctr"/>
-          </a:p>
-        </p:txBody>
-      </p:sp>
-      <p:sp>
-        <p:nvSpPr>
-          <p:cNvPr id="34" name="Rectangle 33"/>
-          <p:cNvSpPr/>
-          <p:nvPr/>
-        </p:nvSpPr>
-        <p:spPr>
-          <a:xfrm>
-            <a:off x="6510528" y="4096512"/>
-            <a:ext cx="4526280" cy="73152"/>
-          </a:xfrm>
-          <a:prstGeom prst="rect">
-            <a:avLst/>
-          </a:prstGeom>
-          <a:solidFill>
-            <a:srgbClr val="10B981"/>
-          </a:solidFill>
-          <a:ln>
-            <a:noFill/>
-          </a:ln>
-        </p:spPr>
-        <p:style>
-          <a:lnRef idx="1">
-            <a:schemeClr val="accent1"/>
-          </a:lnRef>
-          <a:fillRef idx="3">
-            <a:schemeClr val="accent1"/>
-          </a:fillRef>
-          <a:effectRef idx="2">
-            <a:schemeClr val="accent1"/>
-          </a:effectRef>
-          <a:fontRef idx="minor">
-            <a:schemeClr val="lt1"/>
-          </a:fontRef>
-        </p:style>
-        <p:txBody>
-          <a:bodyPr rtlCol="0" anchor="ctr"/>
-          <a:lstStyle/>
-          <a:p>
-            <a:pPr algn="ctr"/>
-          </a:p>
-        </p:txBody>
-      </p:sp>
-      <p:sp>
-        <p:nvSpPr>
-          <p:cNvPr id="35" name="Rectangle 34"/>
-          <p:cNvSpPr/>
-          <p:nvPr/>
-        </p:nvSpPr>
-        <p:spPr>
-          <a:xfrm>
-            <a:off x="6638544" y="4215384"/>
-            <a:ext cx="4270248" cy="182880"/>
-          </a:xfrm>
-          <a:prstGeom prst="rect">
-            <a:avLst/>
-          </a:prstGeom>
-          <a:noFill/>
-          <a:ln>
-            <a:noFill/>
-          </a:ln>
-        </p:spPr>
-        <p:style>
-          <a:lnRef idx="1">
-            <a:schemeClr val="accent1"/>
-          </a:lnRef>
-          <a:fillRef idx="3">
-            <a:schemeClr val="accent1"/>
-          </a:fillRef>
-          <a:effectRef idx="2">
-            <a:schemeClr val="accent1"/>
-          </a:effectRef>
-          <a:fontRef idx="minor">
-            <a:schemeClr val="lt1"/>
-          </a:fontRef>
-        </p:style>
-        <p:txBody>
-          <a:bodyPr rtlCol="0" anchor="ctr" wrap="square" lIns="9144" rIns="9144" tIns="9144" bIns="9144">
-            <a:normAutofit/>
-          </a:bodyPr>
-          <a:lstStyle/>
-          <a:p>
-            <a:pPr algn="l">
-              <a:spcAft>
-                <a:spcPts val="200"/>
-              </a:spcAft>
-            </a:pPr>
-            <a:r>
-              <a:rPr sz="800" b="1">
-                <a:solidFill>
-                  <a:srgbClr val="606E80"/>
-                </a:solidFill>
-                <a:latin typeface="Noto Sans CJK KR"/>
-              </a:rPr>
-              <a:t>Sensor Distribution</a:t>
-            </a:r>
-          </a:p>
-        </p:txBody>
-      </p:sp>
-      <p:pic>
-        <p:nvPicPr>
-          <p:cNvPr id="36" name="Picture 35" descr="mendeley_sensor_distribution.png"/>
-          <p:cNvPicPr>
-            <a:picLocks noChangeAspect="1"/>
-          </p:cNvPicPr>
-          <p:nvPr/>
-        </p:nvPicPr>
-        <p:blipFill>
-          <a:blip r:embed="rId5"/>
-          <a:stretch>
-            <a:fillRect/>
-          </a:stretch>
-        </p:blipFill>
-        <p:spPr>
-          <a:xfrm>
-            <a:off x="6966639" y="4462272"/>
-            <a:ext cx="3614057" cy="1517904"/>
+            <a:off x="5241471" y="4425696"/>
+            <a:ext cx="3918857" cy="1645919"/>
           </a:xfrm>
           <a:prstGeom prst="rect">
             <a:avLst/>
@@ -13643,7 +12227,7 @@
         <p:spPr>
           <a:xfrm>
             <a:off x="566928" y="1261872"/>
-            <a:ext cx="2423160" cy="5120640"/>
+            <a:ext cx="2743200" cy="5120640"/>
           </a:xfrm>
           <a:prstGeom prst="roundRect">
             <a:avLst/>
@@ -13688,7 +12272,7 @@
         <p:spPr>
           <a:xfrm>
             <a:off x="822960" y="1572768"/>
-            <a:ext cx="1828800" cy="256032"/>
+            <a:ext cx="2103120" cy="256032"/>
           </a:xfrm>
           <a:prstGeom prst="rect">
             <a:avLst/>
@@ -14209,7 +12793,7 @@
         <p:spPr>
           <a:xfrm>
             <a:off x="841248" y="4480560"/>
-            <a:ext cx="1901952" cy="27432"/>
+            <a:ext cx="2249424" cy="27432"/>
           </a:xfrm>
           <a:prstGeom prst="rect">
             <a:avLst/>
@@ -14252,7 +12836,7 @@
         <p:spPr>
           <a:xfrm>
             <a:off x="822960" y="4718304"/>
-            <a:ext cx="1965960" cy="1060704"/>
+            <a:ext cx="2286000" cy="1060704"/>
           </a:xfrm>
           <a:prstGeom prst="rect">
             <a:avLst/>
@@ -14340,7 +12924,7 @@
         <p:spPr>
           <a:xfrm>
             <a:off x="3364992" y="1261872"/>
-            <a:ext cx="3675887" cy="2578608"/>
+            <a:ext cx="3675887" cy="2468880"/>
           </a:xfrm>
           <a:prstGeom prst="roundRect">
             <a:avLst/>
@@ -14470,7 +13054,7 @@
                 </a:solidFill>
                 <a:latin typeface="Noto Sans CJK KR"/>
               </a:rPr>
-              <a:t>Confusion Matrix</a:t>
+              <a:t>예측 결과</a:t>
             </a:r>
           </a:p>
         </p:txBody>
@@ -14491,8 +13075,8 @@
         </p:blipFill>
         <p:spPr>
           <a:xfrm>
-            <a:off x="3917696" y="1627631"/>
-            <a:ext cx="2570480" cy="2103120"/>
+            <a:off x="3984752" y="1627631"/>
+            <a:ext cx="2436368" cy="1993392"/>
           </a:xfrm>
           <a:prstGeom prst="rect">
             <a:avLst/>
@@ -14508,7 +13092,7 @@
         <p:spPr>
           <a:xfrm>
             <a:off x="7360920" y="1261872"/>
-            <a:ext cx="3675887" cy="2578608"/>
+            <a:ext cx="3675887" cy="2468880"/>
           </a:xfrm>
           <a:prstGeom prst="roundRect">
             <a:avLst/>
@@ -14638,7 +13222,7 @@
                 </a:solidFill>
                 <a:latin typeface="Noto Sans CJK KR"/>
               </a:rPr>
-              <a:t>Feature Importance</a:t>
+              <a:t>판단 근거</a:t>
             </a:r>
           </a:p>
         </p:txBody>
@@ -14659,8 +13243,8 @@
         </p:blipFill>
         <p:spPr>
           <a:xfrm>
-            <a:off x="7665339" y="1627631"/>
-            <a:ext cx="3067050" cy="2103120"/>
+            <a:off x="7745349" y="1627631"/>
+            <a:ext cx="2907030" cy="1993392"/>
           </a:xfrm>
           <a:prstGeom prst="rect">
             <a:avLst/>
@@ -14675,8 +13259,8 @@
         </p:nvSpPr>
         <p:spPr>
           <a:xfrm>
-            <a:off x="3364992" y="4096512"/>
-            <a:ext cx="2834640" cy="1993392"/>
+            <a:off x="3364992" y="4059936"/>
+            <a:ext cx="7671816" cy="2121408"/>
           </a:xfrm>
           <a:prstGeom prst="roundRect">
             <a:avLst/>
@@ -14720,14 +13304,14 @@
         </p:nvSpPr>
         <p:spPr>
           <a:xfrm>
-            <a:off x="3364992" y="4096512"/>
-            <a:ext cx="2834640" cy="73152"/>
+            <a:off x="3364992" y="4059936"/>
+            <a:ext cx="7671816" cy="73152"/>
           </a:xfrm>
           <a:prstGeom prst="rect">
             <a:avLst/>
           </a:prstGeom>
           <a:solidFill>
-            <a:srgbClr val="F97316"/>
+            <a:srgbClr val="F5BE14"/>
           </a:solidFill>
           <a:ln>
             <a:noFill/>
@@ -14763,8 +13347,8 @@
         </p:nvSpPr>
         <p:spPr>
           <a:xfrm>
-            <a:off x="3493008" y="4215384"/>
-            <a:ext cx="2578608" cy="182880"/>
+            <a:off x="3493008" y="4178808"/>
+            <a:ext cx="7415784" cy="182880"/>
           </a:xfrm>
           <a:prstGeom prst="rect">
             <a:avLst/>
@@ -14806,14 +13390,14 @@
                 </a:solidFill>
                 <a:latin typeface="Noto Sans CJK KR"/>
               </a:rPr>
-              <a:t>F1 Scores</a:t>
+              <a:t>전처리 패턴</a:t>
             </a:r>
           </a:p>
         </p:txBody>
       </p:sp>
       <p:pic>
         <p:nvPicPr>
-          <p:cNvPr id="32" name="Picture 31" descr="obd_can_f1_scores.png"/>
+          <p:cNvPr id="32" name="Picture 31" descr="obd_can_feature_distribution.png"/>
           <p:cNvPicPr>
             <a:picLocks noChangeAspect="1"/>
           </p:cNvPicPr>
@@ -14827,176 +13411,8 @@
         </p:blipFill>
         <p:spPr>
           <a:xfrm>
-            <a:off x="3788446" y="4462272"/>
-            <a:ext cx="1987731" cy="1517904"/>
-          </a:xfrm>
-          <a:prstGeom prst="rect">
-            <a:avLst/>
-          </a:prstGeom>
-        </p:spPr>
-      </p:pic>
-      <p:sp>
-        <p:nvSpPr>
-          <p:cNvPr id="33" name="Rounded Rectangle 32"/>
-          <p:cNvSpPr/>
-          <p:nvPr/>
-        </p:nvSpPr>
-        <p:spPr>
-          <a:xfrm>
-            <a:off x="6510528" y="4096512"/>
-            <a:ext cx="4526280" cy="1993392"/>
-          </a:xfrm>
-          <a:prstGeom prst="roundRect">
-            <a:avLst/>
-          </a:prstGeom>
-          <a:solidFill>
-            <a:srgbClr val="FFFFFF"/>
-          </a:solidFill>
-          <a:ln w="7620">
-            <a:solidFill>
-              <a:srgbClr val="E1E8F0"/>
-            </a:solidFill>
-          </a:ln>
-        </p:spPr>
-        <p:style>
-          <a:lnRef idx="1">
-            <a:schemeClr val="accent1"/>
-          </a:lnRef>
-          <a:fillRef idx="3">
-            <a:schemeClr val="accent1"/>
-          </a:fillRef>
-          <a:effectRef idx="2">
-            <a:schemeClr val="accent1"/>
-          </a:effectRef>
-          <a:fontRef idx="minor">
-            <a:schemeClr val="lt1"/>
-          </a:fontRef>
-        </p:style>
-        <p:txBody>
-          <a:bodyPr rtlCol="0" anchor="ctr"/>
-          <a:lstStyle/>
-          <a:p>
-            <a:pPr algn="ctr"/>
-          </a:p>
-        </p:txBody>
-      </p:sp>
-      <p:sp>
-        <p:nvSpPr>
-          <p:cNvPr id="34" name="Rectangle 33"/>
-          <p:cNvSpPr/>
-          <p:nvPr/>
-        </p:nvSpPr>
-        <p:spPr>
-          <a:xfrm>
-            <a:off x="6510528" y="4096512"/>
-            <a:ext cx="4526280" cy="73152"/>
-          </a:xfrm>
-          <a:prstGeom prst="rect">
-            <a:avLst/>
-          </a:prstGeom>
-          <a:solidFill>
-            <a:srgbClr val="F5BE14"/>
-          </a:solidFill>
-          <a:ln>
-            <a:noFill/>
-          </a:ln>
-        </p:spPr>
-        <p:style>
-          <a:lnRef idx="1">
-            <a:schemeClr val="accent1"/>
-          </a:lnRef>
-          <a:fillRef idx="3">
-            <a:schemeClr val="accent1"/>
-          </a:fillRef>
-          <a:effectRef idx="2">
-            <a:schemeClr val="accent1"/>
-          </a:effectRef>
-          <a:fontRef idx="minor">
-            <a:schemeClr val="lt1"/>
-          </a:fontRef>
-        </p:style>
-        <p:txBody>
-          <a:bodyPr rtlCol="0" anchor="ctr"/>
-          <a:lstStyle/>
-          <a:p>
-            <a:pPr algn="ctr"/>
-          </a:p>
-        </p:txBody>
-      </p:sp>
-      <p:sp>
-        <p:nvSpPr>
-          <p:cNvPr id="35" name="Rectangle 34"/>
-          <p:cNvSpPr/>
-          <p:nvPr/>
-        </p:nvSpPr>
-        <p:spPr>
-          <a:xfrm>
-            <a:off x="6638544" y="4215384"/>
-            <a:ext cx="4270248" cy="182880"/>
-          </a:xfrm>
-          <a:prstGeom prst="rect">
-            <a:avLst/>
-          </a:prstGeom>
-          <a:noFill/>
-          <a:ln>
-            <a:noFill/>
-          </a:ln>
-        </p:spPr>
-        <p:style>
-          <a:lnRef idx="1">
-            <a:schemeClr val="accent1"/>
-          </a:lnRef>
-          <a:fillRef idx="3">
-            <a:schemeClr val="accent1"/>
-          </a:fillRef>
-          <a:effectRef idx="2">
-            <a:schemeClr val="accent1"/>
-          </a:effectRef>
-          <a:fontRef idx="minor">
-            <a:schemeClr val="lt1"/>
-          </a:fontRef>
-        </p:style>
-        <p:txBody>
-          <a:bodyPr rtlCol="0" anchor="ctr" wrap="square" lIns="9144" rIns="9144" tIns="9144" bIns="9144">
-            <a:normAutofit/>
-          </a:bodyPr>
-          <a:lstStyle/>
-          <a:p>
-            <a:pPr algn="l">
-              <a:spcAft>
-                <a:spcPts val="200"/>
-              </a:spcAft>
-            </a:pPr>
-            <a:r>
-              <a:rPr sz="800" b="1">
-                <a:solidFill>
-                  <a:srgbClr val="606E80"/>
-                </a:solidFill>
-                <a:latin typeface="Noto Sans CJK KR"/>
-              </a:rPr>
-              <a:t>Feature Distribution</a:t>
-            </a:r>
-          </a:p>
-        </p:txBody>
-      </p:sp>
-      <p:pic>
-        <p:nvPicPr>
-          <p:cNvPr id="36" name="Picture 35" descr="obd_can_feature_distribution.png"/>
-          <p:cNvPicPr>
-            <a:picLocks noChangeAspect="1"/>
-          </p:cNvPicPr>
-          <p:nvPr/>
-        </p:nvPicPr>
-        <p:blipFill>
-          <a:blip r:embed="rId5"/>
-          <a:stretch>
-            <a:fillRect/>
-          </a:stretch>
-        </p:blipFill>
-        <p:spPr>
-          <a:xfrm>
-            <a:off x="6930498" y="4462272"/>
-            <a:ext cx="3686338" cy="1517904"/>
+            <a:off x="5202282" y="4425696"/>
+            <a:ext cx="3997234" cy="1645919"/>
           </a:xfrm>
           <a:prstGeom prst="rect">
             <a:avLst/>
@@ -15314,7 +13730,7 @@
         <p:spPr>
           <a:xfrm>
             <a:off x="566928" y="1261872"/>
-            <a:ext cx="2423160" cy="5120640"/>
+            <a:ext cx="2743200" cy="5120640"/>
           </a:xfrm>
           <a:prstGeom prst="roundRect">
             <a:avLst/>
@@ -15359,7 +13775,7 @@
         <p:spPr>
           <a:xfrm>
             <a:off x="822960" y="1572768"/>
-            <a:ext cx="1828800" cy="256032"/>
+            <a:ext cx="2103120" cy="256032"/>
           </a:xfrm>
           <a:prstGeom prst="rect">
             <a:avLst/>
@@ -15880,7 +14296,7 @@
         <p:spPr>
           <a:xfrm>
             <a:off x="841248" y="4480560"/>
-            <a:ext cx="1901952" cy="27432"/>
+            <a:ext cx="2249424" cy="27432"/>
           </a:xfrm>
           <a:prstGeom prst="rect">
             <a:avLst/>
@@ -15923,7 +14339,7 @@
         <p:spPr>
           <a:xfrm>
             <a:off x="822960" y="4718304"/>
-            <a:ext cx="1965960" cy="1060704"/>
+            <a:ext cx="2286000" cy="1060704"/>
           </a:xfrm>
           <a:prstGeom prst="rect">
             <a:avLst/>
@@ -16011,7 +14427,7 @@
         <p:spPr>
           <a:xfrm>
             <a:off x="3364992" y="1261872"/>
-            <a:ext cx="3675887" cy="2578608"/>
+            <a:ext cx="3675887" cy="2468880"/>
           </a:xfrm>
           <a:prstGeom prst="roundRect">
             <a:avLst/>
@@ -16141,7 +14557,7 @@
                 </a:solidFill>
                 <a:latin typeface="Noto Sans CJK KR"/>
               </a:rPr>
-              <a:t>Confusion Matrix</a:t>
+              <a:t>예측 결과</a:t>
             </a:r>
           </a:p>
         </p:txBody>
@@ -16162,8 +14578,8 @@
         </p:blipFill>
         <p:spPr>
           <a:xfrm>
-            <a:off x="3917696" y="1627631"/>
-            <a:ext cx="2570480" cy="2103120"/>
+            <a:off x="3984752" y="1627631"/>
+            <a:ext cx="2436368" cy="1993392"/>
           </a:xfrm>
           <a:prstGeom prst="rect">
             <a:avLst/>
@@ -16179,7 +14595,7 @@
         <p:spPr>
           <a:xfrm>
             <a:off x="7360920" y="1261872"/>
-            <a:ext cx="3675887" cy="2578608"/>
+            <a:ext cx="3675887" cy="2468880"/>
           </a:xfrm>
           <a:prstGeom prst="roundRect">
             <a:avLst/>
@@ -16309,7 +14725,7 @@
                 </a:solidFill>
                 <a:latin typeface="Noto Sans CJK KR"/>
               </a:rPr>
-              <a:t>Feature Importance</a:t>
+              <a:t>판단 근거</a:t>
             </a:r>
           </a:p>
         </p:txBody>
@@ -16330,8 +14746,8 @@
         </p:blipFill>
         <p:spPr>
           <a:xfrm>
-            <a:off x="7665339" y="1627631"/>
-            <a:ext cx="3067050" cy="2103120"/>
+            <a:off x="7745349" y="1627631"/>
+            <a:ext cx="2907030" cy="1993392"/>
           </a:xfrm>
           <a:prstGeom prst="rect">
             <a:avLst/>
@@ -16346,8 +14762,8 @@
         </p:nvSpPr>
         <p:spPr>
           <a:xfrm>
-            <a:off x="3364992" y="4096512"/>
-            <a:ext cx="2834640" cy="1993392"/>
+            <a:off x="3364992" y="4059936"/>
+            <a:ext cx="7671816" cy="2121408"/>
           </a:xfrm>
           <a:prstGeom prst="roundRect">
             <a:avLst/>
@@ -16391,14 +14807,14 @@
         </p:nvSpPr>
         <p:spPr>
           <a:xfrm>
-            <a:off x="3364992" y="4096512"/>
-            <a:ext cx="2834640" cy="73152"/>
+            <a:off x="3364992" y="4059936"/>
+            <a:ext cx="7671816" cy="73152"/>
           </a:xfrm>
           <a:prstGeom prst="rect">
             <a:avLst/>
           </a:prstGeom>
           <a:solidFill>
-            <a:srgbClr val="10B981"/>
+            <a:srgbClr val="F5BE14"/>
           </a:solidFill>
           <a:ln>
             <a:noFill/>
@@ -16434,8 +14850,8 @@
         </p:nvSpPr>
         <p:spPr>
           <a:xfrm>
-            <a:off x="3493008" y="4215384"/>
-            <a:ext cx="2578608" cy="182880"/>
+            <a:off x="3493008" y="4178808"/>
+            <a:ext cx="7415784" cy="182880"/>
           </a:xfrm>
           <a:prstGeom prst="rect">
             <a:avLst/>
@@ -16477,14 +14893,14 @@
                 </a:solidFill>
                 <a:latin typeface="Noto Sans CJK KR"/>
               </a:rPr>
-              <a:t>F1 Scores</a:t>
+              <a:t>전처리 패턴</a:t>
             </a:r>
           </a:p>
         </p:txBody>
       </p:sp>
       <p:pic>
         <p:nvPicPr>
-          <p:cNvPr id="32" name="Picture 31" descr="vehicle_maintenance_f1_scores.png"/>
+          <p:cNvPr id="32" name="Picture 31" descr="vehicle_maintenance_feature_distribution.png"/>
           <p:cNvPicPr>
             <a:picLocks noChangeAspect="1"/>
           </p:cNvPicPr>
@@ -16498,176 +14914,8 @@
         </p:blipFill>
         <p:spPr>
           <a:xfrm>
-            <a:off x="3788446" y="4462272"/>
-            <a:ext cx="1987731" cy="1517904"/>
-          </a:xfrm>
-          <a:prstGeom prst="rect">
-            <a:avLst/>
-          </a:prstGeom>
-        </p:spPr>
-      </p:pic>
-      <p:sp>
-        <p:nvSpPr>
-          <p:cNvPr id="33" name="Rounded Rectangle 32"/>
-          <p:cNvSpPr/>
-          <p:nvPr/>
-        </p:nvSpPr>
-        <p:spPr>
-          <a:xfrm>
-            <a:off x="6510528" y="4096512"/>
-            <a:ext cx="4526280" cy="1993392"/>
-          </a:xfrm>
-          <a:prstGeom prst="roundRect">
-            <a:avLst/>
-          </a:prstGeom>
-          <a:solidFill>
-            <a:srgbClr val="FFFFFF"/>
-          </a:solidFill>
-          <a:ln w="7620">
-            <a:solidFill>
-              <a:srgbClr val="E1E8F0"/>
-            </a:solidFill>
-          </a:ln>
-        </p:spPr>
-        <p:style>
-          <a:lnRef idx="1">
-            <a:schemeClr val="accent1"/>
-          </a:lnRef>
-          <a:fillRef idx="3">
-            <a:schemeClr val="accent1"/>
-          </a:fillRef>
-          <a:effectRef idx="2">
-            <a:schemeClr val="accent1"/>
-          </a:effectRef>
-          <a:fontRef idx="minor">
-            <a:schemeClr val="lt1"/>
-          </a:fontRef>
-        </p:style>
-        <p:txBody>
-          <a:bodyPr rtlCol="0" anchor="ctr"/>
-          <a:lstStyle/>
-          <a:p>
-            <a:pPr algn="ctr"/>
-          </a:p>
-        </p:txBody>
-      </p:sp>
-      <p:sp>
-        <p:nvSpPr>
-          <p:cNvPr id="34" name="Rectangle 33"/>
-          <p:cNvSpPr/>
-          <p:nvPr/>
-        </p:nvSpPr>
-        <p:spPr>
-          <a:xfrm>
-            <a:off x="6510528" y="4096512"/>
-            <a:ext cx="4526280" cy="73152"/>
-          </a:xfrm>
-          <a:prstGeom prst="rect">
-            <a:avLst/>
-          </a:prstGeom>
-          <a:solidFill>
-            <a:srgbClr val="F5BE14"/>
-          </a:solidFill>
-          <a:ln>
-            <a:noFill/>
-          </a:ln>
-        </p:spPr>
-        <p:style>
-          <a:lnRef idx="1">
-            <a:schemeClr val="accent1"/>
-          </a:lnRef>
-          <a:fillRef idx="3">
-            <a:schemeClr val="accent1"/>
-          </a:fillRef>
-          <a:effectRef idx="2">
-            <a:schemeClr val="accent1"/>
-          </a:effectRef>
-          <a:fontRef idx="minor">
-            <a:schemeClr val="lt1"/>
-          </a:fontRef>
-        </p:style>
-        <p:txBody>
-          <a:bodyPr rtlCol="0" anchor="ctr"/>
-          <a:lstStyle/>
-          <a:p>
-            <a:pPr algn="ctr"/>
-          </a:p>
-        </p:txBody>
-      </p:sp>
-      <p:sp>
-        <p:nvSpPr>
-          <p:cNvPr id="35" name="Rectangle 34"/>
-          <p:cNvSpPr/>
-          <p:nvPr/>
-        </p:nvSpPr>
-        <p:spPr>
-          <a:xfrm>
-            <a:off x="6638544" y="4215384"/>
-            <a:ext cx="4270248" cy="182880"/>
-          </a:xfrm>
-          <a:prstGeom prst="rect">
-            <a:avLst/>
-          </a:prstGeom>
-          <a:noFill/>
-          <a:ln>
-            <a:noFill/>
-          </a:ln>
-        </p:spPr>
-        <p:style>
-          <a:lnRef idx="1">
-            <a:schemeClr val="accent1"/>
-          </a:lnRef>
-          <a:fillRef idx="3">
-            <a:schemeClr val="accent1"/>
-          </a:fillRef>
-          <a:effectRef idx="2">
-            <a:schemeClr val="accent1"/>
-          </a:effectRef>
-          <a:fontRef idx="minor">
-            <a:schemeClr val="lt1"/>
-          </a:fontRef>
-        </p:style>
-        <p:txBody>
-          <a:bodyPr rtlCol="0" anchor="ctr" wrap="square" lIns="9144" rIns="9144" tIns="9144" bIns="9144">
-            <a:normAutofit/>
-          </a:bodyPr>
-          <a:lstStyle/>
-          <a:p>
-            <a:pPr algn="l">
-              <a:spcAft>
-                <a:spcPts val="200"/>
-              </a:spcAft>
-            </a:pPr>
-            <a:r>
-              <a:rPr sz="800" b="1">
-                <a:solidFill>
-                  <a:srgbClr val="606E80"/>
-                </a:solidFill>
-                <a:latin typeface="Noto Sans CJK KR"/>
-              </a:rPr>
-              <a:t>Feature Distribution</a:t>
-            </a:r>
-          </a:p>
-        </p:txBody>
-      </p:sp>
-      <p:pic>
-        <p:nvPicPr>
-          <p:cNvPr id="36" name="Picture 35" descr="vehicle_maintenance_feature_distribution.png"/>
-          <p:cNvPicPr>
-            <a:picLocks noChangeAspect="1"/>
-          </p:cNvPicPr>
-          <p:nvPr/>
-        </p:nvPicPr>
-        <p:blipFill>
-          <a:blip r:embed="rId5"/>
-          <a:stretch>
-            <a:fillRect/>
-          </a:stretch>
-        </p:blipFill>
-        <p:spPr>
-          <a:xfrm>
-            <a:off x="6620256" y="4630091"/>
-            <a:ext cx="4306824" cy="1182265"/>
+            <a:off x="4202974" y="4425696"/>
+            <a:ext cx="5995851" cy="1645919"/>
           </a:xfrm>
           <a:prstGeom prst="rect">
             <a:avLst/>
@@ -16750,7 +14998,7 @@
             <a:avLst/>
           </a:prstGeom>
           <a:solidFill>
-            <a:srgbClr val="2563EB"/>
+            <a:srgbClr val="10B981"/>
           </a:solidFill>
           <a:ln>
             <a:noFill/>
@@ -16793,7 +15041,7 @@
             <a:avLst/>
           </a:prstGeom>
           <a:solidFill>
-            <a:srgbClr val="2563EB"/>
+            <a:srgbClr val="10B981"/>
           </a:solidFill>
           <a:ln>
             <a:noFill/>
@@ -16911,11 +15159,11 @@
             <a:r>
               <a:rPr sz="850" b="1">
                 <a:solidFill>
-                  <a:srgbClr val="2563EB"/>
+                  <a:srgbClr val="10B981"/>
                 </a:solidFill>
                 <a:latin typeface="Noto Sans CJK KR"/>
               </a:rPr>
-              <a:t>RESULT 04</a:t>
+              <a:t>SCORECARD</a:t>
             </a:r>
           </a:p>
         </p:txBody>
@@ -16971,7 +15219,7 @@
                 </a:solidFill>
                 <a:latin typeface="Noto Sans CJK KR"/>
               </a:rPr>
-              <a:t>KIT Automotive OBD-II</a:t>
+              <a:t>최종 결론</a:t>
             </a:r>
           </a:p>
         </p:txBody>
@@ -16984,8 +15232,8 @@
         </p:nvSpPr>
         <p:spPr>
           <a:xfrm>
-            <a:off x="566928" y="1261872"/>
-            <a:ext cx="2423160" cy="5120640"/>
+            <a:off x="685800" y="1243584"/>
+            <a:ext cx="5084064" cy="4187952"/>
           </a:xfrm>
           <a:prstGeom prst="roundRect">
             <a:avLst/>
@@ -17029,8 +15277,8 @@
         </p:nvSpPr>
         <p:spPr>
           <a:xfrm>
-            <a:off x="822960" y="1572768"/>
-            <a:ext cx="1828800" cy="256032"/>
+            <a:off x="987552" y="1581912"/>
+            <a:ext cx="4389120" cy="292608"/>
           </a:xfrm>
           <a:prstGeom prst="rect">
             <a:avLst/>
@@ -17066,70 +15314,27 @@
               </a:spcAft>
             </a:pPr>
             <a:r>
-              <a:rPr sz="1400" b="1">
-                <a:solidFill>
-                  <a:srgbClr val="2563EB"/>
+              <a:rPr sz="1600" b="1">
+                <a:solidFill>
+                  <a:srgbClr val="141926"/>
                 </a:solidFill>
                 <a:latin typeface="Noto Sans CJK KR"/>
               </a:rPr>
-              <a:t>핵심 해석</a:t>
-            </a:r>
-          </a:p>
-        </p:txBody>
-      </p:sp>
-      <p:sp>
-        <p:nvSpPr>
-          <p:cNvPr id="10" name="Rounded Rectangle 9"/>
-          <p:cNvSpPr/>
-          <p:nvPr/>
-        </p:nvSpPr>
-        <p:spPr>
-          <a:xfrm>
-            <a:off x="841248" y="2011680"/>
-            <a:ext cx="2359152" cy="676656"/>
-          </a:xfrm>
-          <a:prstGeom prst="roundRect">
-            <a:avLst/>
-          </a:prstGeom>
-          <a:solidFill>
-            <a:srgbClr val="E2F9FC"/>
-          </a:solidFill>
-          <a:ln>
-            <a:noFill/>
-          </a:ln>
-        </p:spPr>
-        <p:style>
-          <a:lnRef idx="1">
-            <a:schemeClr val="accent1"/>
-          </a:lnRef>
-          <a:fillRef idx="3">
-            <a:schemeClr val="accent1"/>
-          </a:fillRef>
-          <a:effectRef idx="2">
-            <a:schemeClr val="accent1"/>
-          </a:effectRef>
-          <a:fontRef idx="minor">
-            <a:schemeClr val="lt1"/>
-          </a:fontRef>
-        </p:style>
-        <p:txBody>
-          <a:bodyPr rtlCol="0" anchor="ctr"/>
-          <a:lstStyle/>
-          <a:p>
-            <a:pPr algn="ctr"/>
-          </a:p>
-        </p:txBody>
-      </p:sp>
-      <p:sp>
-        <p:nvSpPr>
-          <p:cNvPr id="11" name="Rectangle 10"/>
-          <p:cNvSpPr/>
-          <p:nvPr/>
-        </p:nvSpPr>
-        <p:spPr>
-          <a:xfrm>
-            <a:off x="1005840" y="2103120"/>
-            <a:ext cx="914400" cy="237744"/>
+              <a:t>Macro F1 비교</a:t>
+            </a:r>
+          </a:p>
+        </p:txBody>
+      </p:sp>
+      <p:sp>
+        <p:nvSpPr>
+          <p:cNvPr id="10" name="Rectangle 9"/>
+          <p:cNvSpPr/>
+          <p:nvPr/>
+        </p:nvSpPr>
+        <p:spPr>
+          <a:xfrm>
+            <a:off x="987552" y="2139696"/>
+            <a:ext cx="1600200" cy="201168"/>
           </a:xfrm>
           <a:prstGeom prst="rect">
             <a:avLst/>
@@ -17165,27 +15370,113 @@
               </a:spcAft>
             </a:pPr>
             <a:r>
-              <a:rPr sz="1700" b="1">
-                <a:solidFill>
-                  <a:srgbClr val="08BCDA"/>
+              <a:rPr sz="869" b="1">
+                <a:solidFill>
+                  <a:srgbClr val="141926"/>
                 </a:solidFill>
                 <a:latin typeface="Noto Sans CJK KR"/>
               </a:rPr>
-              <a:t>0.526</a:t>
-            </a:r>
-          </a:p>
-        </p:txBody>
-      </p:sp>
-      <p:sp>
-        <p:nvSpPr>
-          <p:cNvPr id="12" name="Rectangle 11"/>
-          <p:cNvSpPr/>
-          <p:nvPr/>
-        </p:nvSpPr>
-        <p:spPr>
-          <a:xfrm>
-            <a:off x="1005840" y="2395728"/>
-            <a:ext cx="1938528" cy="164592"/>
+              <a:t>OBD-II/CAN</a:t>
+            </a:r>
+          </a:p>
+        </p:txBody>
+      </p:sp>
+      <p:sp>
+        <p:nvSpPr>
+          <p:cNvPr id="11" name="Rounded Rectangle 10"/>
+          <p:cNvSpPr/>
+          <p:nvPr/>
+        </p:nvSpPr>
+        <p:spPr>
+          <a:xfrm>
+            <a:off x="2697480" y="2194560"/>
+            <a:ext cx="2121408" cy="164592"/>
+          </a:xfrm>
+          <a:prstGeom prst="roundRect">
+            <a:avLst/>
+          </a:prstGeom>
+          <a:solidFill>
+            <a:srgbClr val="E6ECF2"/>
+          </a:solidFill>
+          <a:ln>
+            <a:noFill/>
+          </a:ln>
+        </p:spPr>
+        <p:style>
+          <a:lnRef idx="1">
+            <a:schemeClr val="accent1"/>
+          </a:lnRef>
+          <a:fillRef idx="3">
+            <a:schemeClr val="accent1"/>
+          </a:fillRef>
+          <a:effectRef idx="2">
+            <a:schemeClr val="accent1"/>
+          </a:effectRef>
+          <a:fontRef idx="minor">
+            <a:schemeClr val="lt1"/>
+          </a:fontRef>
+        </p:style>
+        <p:txBody>
+          <a:bodyPr rtlCol="0" anchor="ctr"/>
+          <a:lstStyle/>
+          <a:p>
+            <a:pPr algn="ctr"/>
+          </a:p>
+        </p:txBody>
+      </p:sp>
+      <p:sp>
+        <p:nvSpPr>
+          <p:cNvPr id="12" name="Rounded Rectangle 11"/>
+          <p:cNvSpPr/>
+          <p:nvPr/>
+        </p:nvSpPr>
+        <p:spPr>
+          <a:xfrm>
+            <a:off x="2697480" y="2194560"/>
+            <a:ext cx="2047156" cy="164592"/>
+          </a:xfrm>
+          <a:prstGeom prst="roundRect">
+            <a:avLst/>
+          </a:prstGeom>
+          <a:solidFill>
+            <a:srgbClr val="10B981"/>
+          </a:solidFill>
+          <a:ln>
+            <a:noFill/>
+          </a:ln>
+        </p:spPr>
+        <p:style>
+          <a:lnRef idx="1">
+            <a:schemeClr val="accent1"/>
+          </a:lnRef>
+          <a:fillRef idx="3">
+            <a:schemeClr val="accent1"/>
+          </a:fillRef>
+          <a:effectRef idx="2">
+            <a:schemeClr val="accent1"/>
+          </a:effectRef>
+          <a:fontRef idx="minor">
+            <a:schemeClr val="lt1"/>
+          </a:fontRef>
+        </p:style>
+        <p:txBody>
+          <a:bodyPr rtlCol="0" anchor="ctr"/>
+          <a:lstStyle/>
+          <a:p>
+            <a:pPr algn="ctr"/>
+          </a:p>
+        </p:txBody>
+      </p:sp>
+      <p:sp>
+        <p:nvSpPr>
+          <p:cNvPr id="13" name="Rectangle 12"/>
+          <p:cNvSpPr/>
+          <p:nvPr/>
+        </p:nvSpPr>
+        <p:spPr>
+          <a:xfrm>
+            <a:off x="4937760" y="2130552"/>
+            <a:ext cx="493776" cy="201168"/>
           </a:xfrm>
           <a:prstGeom prst="rect">
             <a:avLst/>
@@ -17221,57 +15512,14 @@
               </a:spcAft>
             </a:pPr>
             <a:r>
-              <a:rPr sz="760" b="1">
-                <a:solidFill>
-                  <a:srgbClr val="606E80"/>
+              <a:rPr sz="850" b="1">
+                <a:solidFill>
+                  <a:srgbClr val="10B981"/>
                 </a:solidFill>
                 <a:latin typeface="Noto Sans CJK KR"/>
               </a:rPr>
-              <a:t>Accuracy</a:t>
-            </a:r>
-          </a:p>
-        </p:txBody>
-      </p:sp>
-      <p:sp>
-        <p:nvSpPr>
-          <p:cNvPr id="13" name="Rounded Rectangle 12"/>
-          <p:cNvSpPr/>
-          <p:nvPr/>
-        </p:nvSpPr>
-        <p:spPr>
-          <a:xfrm>
-            <a:off x="841248" y="2798064"/>
-            <a:ext cx="2359152" cy="676656"/>
-          </a:xfrm>
-          <a:prstGeom prst="roundRect">
-            <a:avLst/>
-          </a:prstGeom>
-          <a:solidFill>
-            <a:srgbClr val="FFEBF5"/>
-          </a:solidFill>
-          <a:ln>
-            <a:noFill/>
-          </a:ln>
-        </p:spPr>
-        <p:style>
-          <a:lnRef idx="1">
-            <a:schemeClr val="accent1"/>
-          </a:lnRef>
-          <a:fillRef idx="3">
-            <a:schemeClr val="accent1"/>
-          </a:fillRef>
-          <a:effectRef idx="2">
-            <a:schemeClr val="accent1"/>
-          </a:effectRef>
-          <a:fontRef idx="minor">
-            <a:schemeClr val="lt1"/>
-          </a:fontRef>
-        </p:style>
-        <p:txBody>
-          <a:bodyPr rtlCol="0" anchor="ctr"/>
-          <a:lstStyle/>
-          <a:p>
-            <a:pPr algn="ctr"/>
+              <a:t>0.965</a:t>
+            </a:r>
           </a:p>
         </p:txBody>
       </p:sp>
@@ -17283,8 +15531,8 @@
         </p:nvSpPr>
         <p:spPr>
           <a:xfrm>
-            <a:off x="1005840" y="2889504"/>
-            <a:ext cx="914400" cy="237744"/>
+            <a:off x="987552" y="2660903"/>
+            <a:ext cx="1600200" cy="201168"/>
           </a:xfrm>
           <a:prstGeom prst="rect">
             <a:avLst/>
@@ -17320,27 +15568,113 @@
               </a:spcAft>
             </a:pPr>
             <a:r>
-              <a:rPr sz="1700" b="1">
-                <a:solidFill>
-                  <a:srgbClr val="EC4899"/>
+              <a:rPr sz="869" b="1">
+                <a:solidFill>
+                  <a:srgbClr val="141926"/>
                 </a:solidFill>
                 <a:latin typeface="Noto Sans CJK KR"/>
               </a:rPr>
-              <a:t>0.420</a:t>
-            </a:r>
-          </a:p>
-        </p:txBody>
-      </p:sp>
-      <p:sp>
-        <p:nvSpPr>
-          <p:cNvPr id="15" name="Rectangle 14"/>
-          <p:cNvSpPr/>
-          <p:nvPr/>
-        </p:nvSpPr>
-        <p:spPr>
-          <a:xfrm>
-            <a:off x="1005840" y="3182112"/>
-            <a:ext cx="1938528" cy="164592"/>
+              <a:t>Mendeley</a:t>
+            </a:r>
+          </a:p>
+        </p:txBody>
+      </p:sp>
+      <p:sp>
+        <p:nvSpPr>
+          <p:cNvPr id="15" name="Rounded Rectangle 14"/>
+          <p:cNvSpPr/>
+          <p:nvPr/>
+        </p:nvSpPr>
+        <p:spPr>
+          <a:xfrm>
+            <a:off x="2697480" y="2715768"/>
+            <a:ext cx="2121408" cy="164592"/>
+          </a:xfrm>
+          <a:prstGeom prst="roundRect">
+            <a:avLst/>
+          </a:prstGeom>
+          <a:solidFill>
+            <a:srgbClr val="E6ECF2"/>
+          </a:solidFill>
+          <a:ln>
+            <a:noFill/>
+          </a:ln>
+        </p:spPr>
+        <p:style>
+          <a:lnRef idx="1">
+            <a:schemeClr val="accent1"/>
+          </a:lnRef>
+          <a:fillRef idx="3">
+            <a:schemeClr val="accent1"/>
+          </a:fillRef>
+          <a:effectRef idx="2">
+            <a:schemeClr val="accent1"/>
+          </a:effectRef>
+          <a:fontRef idx="minor">
+            <a:schemeClr val="lt1"/>
+          </a:fontRef>
+        </p:style>
+        <p:txBody>
+          <a:bodyPr rtlCol="0" anchor="ctr"/>
+          <a:lstStyle/>
+          <a:p>
+            <a:pPr algn="ctr"/>
+          </a:p>
+        </p:txBody>
+      </p:sp>
+      <p:sp>
+        <p:nvSpPr>
+          <p:cNvPr id="16" name="Rounded Rectangle 15"/>
+          <p:cNvSpPr/>
+          <p:nvPr/>
+        </p:nvSpPr>
+        <p:spPr>
+          <a:xfrm>
+            <a:off x="2697480" y="2715768"/>
+            <a:ext cx="1736060" cy="164592"/>
+          </a:xfrm>
+          <a:prstGeom prst="roundRect">
+            <a:avLst/>
+          </a:prstGeom>
+          <a:solidFill>
+            <a:srgbClr val="08BCDA"/>
+          </a:solidFill>
+          <a:ln>
+            <a:noFill/>
+          </a:ln>
+        </p:spPr>
+        <p:style>
+          <a:lnRef idx="1">
+            <a:schemeClr val="accent1"/>
+          </a:lnRef>
+          <a:fillRef idx="3">
+            <a:schemeClr val="accent1"/>
+          </a:fillRef>
+          <a:effectRef idx="2">
+            <a:schemeClr val="accent1"/>
+          </a:effectRef>
+          <a:fontRef idx="minor">
+            <a:schemeClr val="lt1"/>
+          </a:fontRef>
+        </p:style>
+        <p:txBody>
+          <a:bodyPr rtlCol="0" anchor="ctr"/>
+          <a:lstStyle/>
+          <a:p>
+            <a:pPr algn="ctr"/>
+          </a:p>
+        </p:txBody>
+      </p:sp>
+      <p:sp>
+        <p:nvSpPr>
+          <p:cNvPr id="17" name="Rectangle 16"/>
+          <p:cNvSpPr/>
+          <p:nvPr/>
+        </p:nvSpPr>
+        <p:spPr>
+          <a:xfrm>
+            <a:off x="4937760" y="2651760"/>
+            <a:ext cx="493776" cy="201168"/>
           </a:xfrm>
           <a:prstGeom prst="rect">
             <a:avLst/>
@@ -17376,70 +15710,27 @@
               </a:spcAft>
             </a:pPr>
             <a:r>
-              <a:rPr sz="760" b="1">
-                <a:solidFill>
-                  <a:srgbClr val="606E80"/>
+              <a:rPr sz="850" b="1">
+                <a:solidFill>
+                  <a:srgbClr val="08BCDA"/>
                 </a:solidFill>
                 <a:latin typeface="Noto Sans CJK KR"/>
               </a:rPr>
-              <a:t>Macro F1</a:t>
-            </a:r>
-          </a:p>
-        </p:txBody>
-      </p:sp>
-      <p:sp>
-        <p:nvSpPr>
-          <p:cNvPr id="16" name="Rounded Rectangle 15"/>
-          <p:cNvSpPr/>
-          <p:nvPr/>
-        </p:nvSpPr>
-        <p:spPr>
-          <a:xfrm>
-            <a:off x="841248" y="3584448"/>
-            <a:ext cx="2359152" cy="676656"/>
-          </a:xfrm>
-          <a:prstGeom prst="roundRect">
-            <a:avLst/>
-          </a:prstGeom>
-          <a:solidFill>
-            <a:srgbClr val="E8F0FF"/>
-          </a:solidFill>
-          <a:ln>
-            <a:noFill/>
-          </a:ln>
-        </p:spPr>
-        <p:style>
-          <a:lnRef idx="1">
-            <a:schemeClr val="accent1"/>
-          </a:lnRef>
-          <a:fillRef idx="3">
-            <a:schemeClr val="accent1"/>
-          </a:fillRef>
-          <a:effectRef idx="2">
-            <a:schemeClr val="accent1"/>
-          </a:effectRef>
-          <a:fontRef idx="minor">
-            <a:schemeClr val="lt1"/>
-          </a:fontRef>
-        </p:style>
-        <p:txBody>
-          <a:bodyPr rtlCol="0" anchor="ctr"/>
-          <a:lstStyle/>
-          <a:p>
-            <a:pPr algn="ctr"/>
-          </a:p>
-        </p:txBody>
-      </p:sp>
-      <p:sp>
-        <p:nvSpPr>
-          <p:cNvPr id="17" name="Rectangle 16"/>
-          <p:cNvSpPr/>
-          <p:nvPr/>
-        </p:nvSpPr>
-        <p:spPr>
-          <a:xfrm>
-            <a:off x="1005840" y="3675887"/>
-            <a:ext cx="914400" cy="237744"/>
+              <a:t>0.818</a:t>
+            </a:r>
+          </a:p>
+        </p:txBody>
+      </p:sp>
+      <p:sp>
+        <p:nvSpPr>
+          <p:cNvPr id="18" name="Rectangle 17"/>
+          <p:cNvSpPr/>
+          <p:nvPr/>
+        </p:nvSpPr>
+        <p:spPr>
+          <a:xfrm>
+            <a:off x="987552" y="3182111"/>
+            <a:ext cx="1600200" cy="201168"/>
           </a:xfrm>
           <a:prstGeom prst="rect">
             <a:avLst/>
@@ -17475,27 +15766,113 @@
               </a:spcAft>
             </a:pPr>
             <a:r>
-              <a:rPr sz="1700" b="1">
-                <a:solidFill>
-                  <a:srgbClr val="2563EB"/>
+              <a:rPr sz="869" b="1">
+                <a:solidFill>
+                  <a:srgbClr val="141926"/>
                 </a:solidFill>
                 <a:latin typeface="Noto Sans CJK KR"/>
               </a:rPr>
-              <a:t>81</a:t>
-            </a:r>
-          </a:p>
-        </p:txBody>
-      </p:sp>
-      <p:sp>
-        <p:nvSpPr>
-          <p:cNvPr id="18" name="Rectangle 17"/>
-          <p:cNvSpPr/>
-          <p:nvPr/>
-        </p:nvSpPr>
-        <p:spPr>
-          <a:xfrm>
-            <a:off x="1005840" y="3968496"/>
-            <a:ext cx="1938528" cy="164592"/>
+              <a:t>Vehicle Maintenance</a:t>
+            </a:r>
+          </a:p>
+        </p:txBody>
+      </p:sp>
+      <p:sp>
+        <p:nvSpPr>
+          <p:cNvPr id="19" name="Rounded Rectangle 18"/>
+          <p:cNvSpPr/>
+          <p:nvPr/>
+        </p:nvSpPr>
+        <p:spPr>
+          <a:xfrm>
+            <a:off x="2697480" y="3236975"/>
+            <a:ext cx="2121408" cy="164592"/>
+          </a:xfrm>
+          <a:prstGeom prst="roundRect">
+            <a:avLst/>
+          </a:prstGeom>
+          <a:solidFill>
+            <a:srgbClr val="E6ECF2"/>
+          </a:solidFill>
+          <a:ln>
+            <a:noFill/>
+          </a:ln>
+        </p:spPr>
+        <p:style>
+          <a:lnRef idx="1">
+            <a:schemeClr val="accent1"/>
+          </a:lnRef>
+          <a:fillRef idx="3">
+            <a:schemeClr val="accent1"/>
+          </a:fillRef>
+          <a:effectRef idx="2">
+            <a:schemeClr val="accent1"/>
+          </a:effectRef>
+          <a:fontRef idx="minor">
+            <a:schemeClr val="lt1"/>
+          </a:fontRef>
+        </p:style>
+        <p:txBody>
+          <a:bodyPr rtlCol="0" anchor="ctr"/>
+          <a:lstStyle/>
+          <a:p>
+            <a:pPr algn="ctr"/>
+          </a:p>
+        </p:txBody>
+      </p:sp>
+      <p:sp>
+        <p:nvSpPr>
+          <p:cNvPr id="20" name="Rounded Rectangle 19"/>
+          <p:cNvSpPr/>
+          <p:nvPr/>
+        </p:nvSpPr>
+        <p:spPr>
+          <a:xfrm>
+            <a:off x="2697480" y="3236975"/>
+            <a:ext cx="1677051" cy="164592"/>
+          </a:xfrm>
+          <a:prstGeom prst="roundRect">
+            <a:avLst/>
+          </a:prstGeom>
+          <a:solidFill>
+            <a:srgbClr val="F97316"/>
+          </a:solidFill>
+          <a:ln>
+            <a:noFill/>
+          </a:ln>
+        </p:spPr>
+        <p:style>
+          <a:lnRef idx="1">
+            <a:schemeClr val="accent1"/>
+          </a:lnRef>
+          <a:fillRef idx="3">
+            <a:schemeClr val="accent1"/>
+          </a:fillRef>
+          <a:effectRef idx="2">
+            <a:schemeClr val="accent1"/>
+          </a:effectRef>
+          <a:fontRef idx="minor">
+            <a:schemeClr val="lt1"/>
+          </a:fontRef>
+        </p:style>
+        <p:txBody>
+          <a:bodyPr rtlCol="0" anchor="ctr"/>
+          <a:lstStyle/>
+          <a:p>
+            <a:pPr algn="ctr"/>
+          </a:p>
+        </p:txBody>
+      </p:sp>
+      <p:sp>
+        <p:nvSpPr>
+          <p:cNvPr id="21" name="Rectangle 20"/>
+          <p:cNvSpPr/>
+          <p:nvPr/>
+        </p:nvSpPr>
+        <p:spPr>
+          <a:xfrm>
+            <a:off x="4937760" y="3172968"/>
+            <a:ext cx="493776" cy="201168"/>
           </a:xfrm>
           <a:prstGeom prst="rect">
             <a:avLst/>
@@ -17531,70 +15908,27 @@
               </a:spcAft>
             </a:pPr>
             <a:r>
-              <a:rPr sz="760" b="1">
-                <a:solidFill>
-                  <a:srgbClr val="606E80"/>
+              <a:rPr sz="850" b="1">
+                <a:solidFill>
+                  <a:srgbClr val="F97316"/>
                 </a:solidFill>
                 <a:latin typeface="Noto Sans CJK KR"/>
               </a:rPr>
-              <a:t>Trip files</a:t>
-            </a:r>
-          </a:p>
-        </p:txBody>
-      </p:sp>
-      <p:sp>
-        <p:nvSpPr>
-          <p:cNvPr id="19" name="Rectangle 18"/>
-          <p:cNvSpPr/>
-          <p:nvPr/>
-        </p:nvSpPr>
-        <p:spPr>
-          <a:xfrm>
-            <a:off x="841248" y="4480560"/>
-            <a:ext cx="1901952" cy="27432"/>
-          </a:xfrm>
-          <a:prstGeom prst="rect">
-            <a:avLst/>
-          </a:prstGeom>
-          <a:solidFill>
-            <a:srgbClr val="E6ECF2"/>
-          </a:solidFill>
-          <a:ln>
-            <a:noFill/>
-          </a:ln>
-        </p:spPr>
-        <p:style>
-          <a:lnRef idx="1">
-            <a:schemeClr val="accent1"/>
-          </a:lnRef>
-          <a:fillRef idx="3">
-            <a:schemeClr val="accent1"/>
-          </a:fillRef>
-          <a:effectRef idx="2">
-            <a:schemeClr val="accent1"/>
-          </a:effectRef>
-          <a:fontRef idx="minor">
-            <a:schemeClr val="lt1"/>
-          </a:fontRef>
-        </p:style>
-        <p:txBody>
-          <a:bodyPr rtlCol="0" anchor="ctr"/>
-          <a:lstStyle/>
-          <a:p>
-            <a:pPr algn="ctr"/>
-          </a:p>
-        </p:txBody>
-      </p:sp>
-      <p:sp>
-        <p:nvSpPr>
-          <p:cNvPr id="20" name="Rectangle 19"/>
-          <p:cNvSpPr/>
-          <p:nvPr/>
-        </p:nvSpPr>
-        <p:spPr>
-          <a:xfrm>
-            <a:off x="822960" y="4718304"/>
-            <a:ext cx="1965960" cy="1060704"/>
+              <a:t>0.791</a:t>
+            </a:r>
+          </a:p>
+        </p:txBody>
+      </p:sp>
+      <p:sp>
+        <p:nvSpPr>
+          <p:cNvPr id="22" name="Rectangle 21"/>
+          <p:cNvSpPr/>
+          <p:nvPr/>
+        </p:nvSpPr>
+        <p:spPr>
+          <a:xfrm>
+            <a:off x="987552" y="3703320"/>
+            <a:ext cx="1600200" cy="201168"/>
           </a:xfrm>
           <a:prstGeom prst="rect">
             <a:avLst/>
@@ -17630,15 +15964,141 @@
               </a:spcAft>
             </a:pPr>
             <a:r>
-              <a:rPr sz="869" b="0">
+              <a:rPr sz="869" b="1">
                 <a:solidFill>
                   <a:srgbClr val="141926"/>
                 </a:solidFill>
                 <a:latin typeface="Noto Sans CJK KR"/>
               </a:rPr>
-              <a:t>• OBD 로그를 trip 단위 집계</a:t>
-            </a:r>
-          </a:p>
+              <a:t>AI4I</a:t>
+            </a:r>
+          </a:p>
+        </p:txBody>
+      </p:sp>
+      <p:sp>
+        <p:nvSpPr>
+          <p:cNvPr id="23" name="Rounded Rectangle 22"/>
+          <p:cNvSpPr/>
+          <p:nvPr/>
+        </p:nvSpPr>
+        <p:spPr>
+          <a:xfrm>
+            <a:off x="2697480" y="3758183"/>
+            <a:ext cx="2121408" cy="164592"/>
+          </a:xfrm>
+          <a:prstGeom prst="roundRect">
+            <a:avLst/>
+          </a:prstGeom>
+          <a:solidFill>
+            <a:srgbClr val="E6ECF2"/>
+          </a:solidFill>
+          <a:ln>
+            <a:noFill/>
+          </a:ln>
+        </p:spPr>
+        <p:style>
+          <a:lnRef idx="1">
+            <a:schemeClr val="accent1"/>
+          </a:lnRef>
+          <a:fillRef idx="3">
+            <a:schemeClr val="accent1"/>
+          </a:fillRef>
+          <a:effectRef idx="2">
+            <a:schemeClr val="accent1"/>
+          </a:effectRef>
+          <a:fontRef idx="minor">
+            <a:schemeClr val="lt1"/>
+          </a:fontRef>
+        </p:style>
+        <p:txBody>
+          <a:bodyPr rtlCol="0" anchor="ctr"/>
+          <a:lstStyle/>
+          <a:p>
+            <a:pPr algn="ctr"/>
+          </a:p>
+        </p:txBody>
+      </p:sp>
+      <p:sp>
+        <p:nvSpPr>
+          <p:cNvPr id="24" name="Rounded Rectangle 23"/>
+          <p:cNvSpPr/>
+          <p:nvPr/>
+        </p:nvSpPr>
+        <p:spPr>
+          <a:xfrm>
+            <a:off x="2697480" y="3758183"/>
+            <a:ext cx="1052464" cy="164592"/>
+          </a:xfrm>
+          <a:prstGeom prst="roundRect">
+            <a:avLst/>
+          </a:prstGeom>
+          <a:solidFill>
+            <a:srgbClr val="7C3AED"/>
+          </a:solidFill>
+          <a:ln>
+            <a:noFill/>
+          </a:ln>
+        </p:spPr>
+        <p:style>
+          <a:lnRef idx="1">
+            <a:schemeClr val="accent1"/>
+          </a:lnRef>
+          <a:fillRef idx="3">
+            <a:schemeClr val="accent1"/>
+          </a:fillRef>
+          <a:effectRef idx="2">
+            <a:schemeClr val="accent1"/>
+          </a:effectRef>
+          <a:fontRef idx="minor">
+            <a:schemeClr val="lt1"/>
+          </a:fontRef>
+        </p:style>
+        <p:txBody>
+          <a:bodyPr rtlCol="0" anchor="ctr"/>
+          <a:lstStyle/>
+          <a:p>
+            <a:pPr algn="ctr"/>
+          </a:p>
+        </p:txBody>
+      </p:sp>
+      <p:sp>
+        <p:nvSpPr>
+          <p:cNvPr id="25" name="Rectangle 24"/>
+          <p:cNvSpPr/>
+          <p:nvPr/>
+        </p:nvSpPr>
+        <p:spPr>
+          <a:xfrm>
+            <a:off x="4937760" y="3694175"/>
+            <a:ext cx="493776" cy="201168"/>
+          </a:xfrm>
+          <a:prstGeom prst="rect">
+            <a:avLst/>
+          </a:prstGeom>
+          <a:noFill/>
+          <a:ln>
+            <a:noFill/>
+          </a:ln>
+        </p:spPr>
+        <p:style>
+          <a:lnRef idx="1">
+            <a:schemeClr val="accent1"/>
+          </a:lnRef>
+          <a:fillRef idx="3">
+            <a:schemeClr val="accent1"/>
+          </a:fillRef>
+          <a:effectRef idx="2">
+            <a:schemeClr val="accent1"/>
+          </a:effectRef>
+          <a:fontRef idx="minor">
+            <a:schemeClr val="lt1"/>
+          </a:fontRef>
+        </p:style>
+        <p:txBody>
+          <a:bodyPr rtlCol="0" anchor="ctr" wrap="square" lIns="9144" rIns="9144" tIns="9144" bIns="9144">
+            <a:normAutofit/>
+          </a:bodyPr>
+          <a:lstStyle/>
           <a:p>
             <a:pPr algn="l">
               <a:spcAft>
@@ -17646,15 +16106,55 @@
               </a:spcAft>
             </a:pPr>
             <a:r>
-              <a:rPr sz="869" b="0">
-                <a:solidFill>
-                  <a:srgbClr val="141926"/>
+              <a:rPr sz="850" b="1">
+                <a:solidFill>
+                  <a:srgbClr val="7C3AED"/>
                 </a:solidFill>
                 <a:latin typeface="Noto Sans CJK KR"/>
               </a:rPr>
-              <a:t>• 도로 조건 3-class 분류</a:t>
-            </a:r>
-          </a:p>
+              <a:t>0.496</a:t>
+            </a:r>
+          </a:p>
+        </p:txBody>
+      </p:sp>
+      <p:sp>
+        <p:nvSpPr>
+          <p:cNvPr id="26" name="Rectangle 25"/>
+          <p:cNvSpPr/>
+          <p:nvPr/>
+        </p:nvSpPr>
+        <p:spPr>
+          <a:xfrm>
+            <a:off x="987552" y="4224528"/>
+            <a:ext cx="1600200" cy="201168"/>
+          </a:xfrm>
+          <a:prstGeom prst="rect">
+            <a:avLst/>
+          </a:prstGeom>
+          <a:noFill/>
+          <a:ln>
+            <a:noFill/>
+          </a:ln>
+        </p:spPr>
+        <p:style>
+          <a:lnRef idx="1">
+            <a:schemeClr val="accent1"/>
+          </a:lnRef>
+          <a:fillRef idx="3">
+            <a:schemeClr val="accent1"/>
+          </a:fillRef>
+          <a:effectRef idx="2">
+            <a:schemeClr val="accent1"/>
+          </a:effectRef>
+          <a:fontRef idx="minor">
+            <a:schemeClr val="lt1"/>
+          </a:fontRef>
+        </p:style>
+        <p:txBody>
+          <a:bodyPr rtlCol="0" anchor="ctr" wrap="square" lIns="9144" rIns="9144" tIns="9144" bIns="9144">
+            <a:normAutofit/>
+          </a:bodyPr>
+          <a:lstStyle/>
           <a:p>
             <a:pPr algn="l">
               <a:spcAft>
@@ -17662,38 +16162,36 @@
               </a:spcAft>
             </a:pPr>
             <a:r>
-              <a:rPr sz="869" b="0">
+              <a:rPr sz="869" b="1">
                 <a:solidFill>
                   <a:srgbClr val="141926"/>
                 </a:solidFill>
                 <a:latin typeface="Noto Sans CJK KR"/>
               </a:rPr>
-              <a:t>• 추가 데이터 필요</a:t>
-            </a:r>
-          </a:p>
-        </p:txBody>
-      </p:sp>
-      <p:sp>
-        <p:nvSpPr>
-          <p:cNvPr id="21" name="Rounded Rectangle 20"/>
-          <p:cNvSpPr/>
-          <p:nvPr/>
-        </p:nvSpPr>
-        <p:spPr>
-          <a:xfrm>
-            <a:off x="3364992" y="1261872"/>
-            <a:ext cx="3675887" cy="2578608"/>
+              <a:t>KIT OBD-II</a:t>
+            </a:r>
+          </a:p>
+        </p:txBody>
+      </p:sp>
+      <p:sp>
+        <p:nvSpPr>
+          <p:cNvPr id="27" name="Rounded Rectangle 26"/>
+          <p:cNvSpPr/>
+          <p:nvPr/>
+        </p:nvSpPr>
+        <p:spPr>
+          <a:xfrm>
+            <a:off x="2697480" y="4279392"/>
+            <a:ext cx="2121408" cy="164592"/>
           </a:xfrm>
           <a:prstGeom prst="roundRect">
             <a:avLst/>
           </a:prstGeom>
           <a:solidFill>
-            <a:srgbClr val="FFFFFF"/>
+            <a:srgbClr val="E6ECF2"/>
           </a:solidFill>
-          <a:ln w="7620">
-            <a:solidFill>
-              <a:srgbClr val="E1E8F0"/>
-            </a:solidFill>
+          <a:ln>
+            <a:noFill/>
           </a:ln>
         </p:spPr>
         <p:style>
@@ -17720,16 +16218,16 @@
       </p:sp>
       <p:sp>
         <p:nvSpPr>
-          <p:cNvPr id="22" name="Rectangle 21"/>
-          <p:cNvSpPr/>
-          <p:nvPr/>
-        </p:nvSpPr>
-        <p:spPr>
-          <a:xfrm>
-            <a:off x="3364992" y="1261872"/>
-            <a:ext cx="3675887" cy="73152"/>
-          </a:xfrm>
-          <a:prstGeom prst="rect">
+          <p:cNvPr id="28" name="Rounded Rectangle 27"/>
+          <p:cNvSpPr/>
+          <p:nvPr/>
+        </p:nvSpPr>
+        <p:spPr>
+          <a:xfrm>
+            <a:off x="2697480" y="4279392"/>
+            <a:ext cx="890317" cy="164592"/>
+          </a:xfrm>
+          <a:prstGeom prst="roundRect">
             <a:avLst/>
           </a:prstGeom>
           <a:solidFill>
@@ -17763,14 +16261,14 @@
       </p:sp>
       <p:sp>
         <p:nvSpPr>
-          <p:cNvPr id="23" name="Rectangle 22"/>
-          <p:cNvSpPr/>
-          <p:nvPr/>
-        </p:nvSpPr>
-        <p:spPr>
-          <a:xfrm>
-            <a:off x="3493008" y="1380743"/>
-            <a:ext cx="3419855" cy="182880"/>
+          <p:cNvPr id="29" name="Rectangle 28"/>
+          <p:cNvSpPr/>
+          <p:nvPr/>
+        </p:nvSpPr>
+        <p:spPr>
+          <a:xfrm>
+            <a:off x="4937760" y="4215383"/>
+            <a:ext cx="493776" cy="201168"/>
           </a:xfrm>
           <a:prstGeom prst="rect">
             <a:avLst/>
@@ -17806,62 +16304,36 @@
               </a:spcAft>
             </a:pPr>
             <a:r>
-              <a:rPr sz="800" b="1">
-                <a:solidFill>
-                  <a:srgbClr val="606E80"/>
+              <a:rPr sz="850" b="1">
+                <a:solidFill>
+                  <a:srgbClr val="2563EB"/>
                 </a:solidFill>
                 <a:latin typeface="Noto Sans CJK KR"/>
               </a:rPr>
-              <a:t>Confusion Matrix</a:t>
-            </a:r>
-          </a:p>
-        </p:txBody>
-      </p:sp>
-      <p:pic>
-        <p:nvPicPr>
-          <p:cNvPr id="24" name="Picture 23" descr="automotive_obd_ii_confusion_matrix.png"/>
-          <p:cNvPicPr>
-            <a:picLocks noChangeAspect="1"/>
-          </p:cNvPicPr>
-          <p:nvPr/>
-        </p:nvPicPr>
-        <p:blipFill>
-          <a:blip r:embed="rId2"/>
-          <a:stretch>
-            <a:fillRect/>
-          </a:stretch>
-        </p:blipFill>
-        <p:spPr>
-          <a:xfrm>
-            <a:off x="3917696" y="1627631"/>
-            <a:ext cx="2570480" cy="2103120"/>
-          </a:xfrm>
-          <a:prstGeom prst="rect">
-            <a:avLst/>
-          </a:prstGeom>
-        </p:spPr>
-      </p:pic>
-      <p:sp>
-        <p:nvSpPr>
-          <p:cNvPr id="25" name="Rounded Rectangle 24"/>
-          <p:cNvSpPr/>
-          <p:nvPr/>
-        </p:nvSpPr>
-        <p:spPr>
-          <a:xfrm>
-            <a:off x="7360920" y="1261872"/>
-            <a:ext cx="3675887" cy="2578608"/>
+              <a:t>0.420</a:t>
+            </a:r>
+          </a:p>
+        </p:txBody>
+      </p:sp>
+      <p:sp>
+        <p:nvSpPr>
+          <p:cNvPr id="30" name="Rounded Rectangle 29"/>
+          <p:cNvSpPr/>
+          <p:nvPr/>
+        </p:nvSpPr>
+        <p:spPr>
+          <a:xfrm>
+            <a:off x="6172200" y="1243584"/>
+            <a:ext cx="5230368" cy="1572768"/>
           </a:xfrm>
           <a:prstGeom prst="roundRect">
             <a:avLst/>
           </a:prstGeom>
           <a:solidFill>
-            <a:srgbClr val="FFFFFF"/>
+            <a:srgbClr val="E6F8F2"/>
           </a:solidFill>
-          <a:ln w="7620">
-            <a:solidFill>
-              <a:srgbClr val="E1E8F0"/>
-            </a:solidFill>
+          <a:ln>
+            <a:noFill/>
           </a:ln>
         </p:spPr>
         <p:style>
@@ -17888,57 +16360,14 @@
       </p:sp>
       <p:sp>
         <p:nvSpPr>
-          <p:cNvPr id="26" name="Rectangle 25"/>
-          <p:cNvSpPr/>
-          <p:nvPr/>
-        </p:nvSpPr>
-        <p:spPr>
-          <a:xfrm>
-            <a:off x="7360920" y="1261872"/>
-            <a:ext cx="3675887" cy="73152"/>
-          </a:xfrm>
-          <a:prstGeom prst="rect">
-            <a:avLst/>
-          </a:prstGeom>
-          <a:solidFill>
-            <a:srgbClr val="08BCDA"/>
-          </a:solidFill>
-          <a:ln>
-            <a:noFill/>
-          </a:ln>
-        </p:spPr>
-        <p:style>
-          <a:lnRef idx="1">
-            <a:schemeClr val="accent1"/>
-          </a:lnRef>
-          <a:fillRef idx="3">
-            <a:schemeClr val="accent1"/>
-          </a:fillRef>
-          <a:effectRef idx="2">
-            <a:schemeClr val="accent1"/>
-          </a:effectRef>
-          <a:fontRef idx="minor">
-            <a:schemeClr val="lt1"/>
-          </a:fontRef>
-        </p:style>
-        <p:txBody>
-          <a:bodyPr rtlCol="0" anchor="ctr"/>
-          <a:lstStyle/>
-          <a:p>
-            <a:pPr algn="ctr"/>
-          </a:p>
-        </p:txBody>
-      </p:sp>
-      <p:sp>
-        <p:nvSpPr>
-          <p:cNvPr id="27" name="Rectangle 26"/>
-          <p:cNvSpPr/>
-          <p:nvPr/>
-        </p:nvSpPr>
-        <p:spPr>
-          <a:xfrm>
-            <a:off x="7488936" y="1380743"/>
-            <a:ext cx="3419855" cy="182880"/>
+          <p:cNvPr id="31" name="Rectangle 30"/>
+          <p:cNvSpPr/>
+          <p:nvPr/>
+        </p:nvSpPr>
+        <p:spPr>
+          <a:xfrm>
+            <a:off x="6473952" y="1554480"/>
+            <a:ext cx="4389120" cy="274320"/>
           </a:xfrm>
           <a:prstGeom prst="rect">
             <a:avLst/>
@@ -17974,139 +16403,27 @@
               </a:spcAft>
             </a:pPr>
             <a:r>
-              <a:rPr sz="800" b="1">
-                <a:solidFill>
-                  <a:srgbClr val="606E80"/>
+              <a:rPr sz="1600" b="1">
+                <a:solidFill>
+                  <a:srgbClr val="10B981"/>
                 </a:solidFill>
                 <a:latin typeface="Noto Sans CJK KR"/>
               </a:rPr>
-              <a:t>Feature Importance</a:t>
-            </a:r>
-          </a:p>
-        </p:txBody>
-      </p:sp>
-      <p:pic>
-        <p:nvPicPr>
-          <p:cNvPr id="28" name="Picture 27" descr="automotive_obd_ii_feature_importance.png"/>
-          <p:cNvPicPr>
-            <a:picLocks noChangeAspect="1"/>
-          </p:cNvPicPr>
-          <p:nvPr/>
-        </p:nvPicPr>
-        <p:blipFill>
-          <a:blip r:embed="rId3"/>
-          <a:stretch>
-            <a:fillRect/>
-          </a:stretch>
-        </p:blipFill>
-        <p:spPr>
-          <a:xfrm>
-            <a:off x="7665339" y="1627631"/>
-            <a:ext cx="3067050" cy="2103120"/>
-          </a:xfrm>
-          <a:prstGeom prst="rect">
-            <a:avLst/>
-          </a:prstGeom>
-        </p:spPr>
-      </p:pic>
-      <p:sp>
-        <p:nvSpPr>
-          <p:cNvPr id="29" name="Rounded Rectangle 28"/>
-          <p:cNvSpPr/>
-          <p:nvPr/>
-        </p:nvSpPr>
-        <p:spPr>
-          <a:xfrm>
-            <a:off x="3364992" y="4096512"/>
-            <a:ext cx="2834640" cy="1993392"/>
-          </a:xfrm>
-          <a:prstGeom prst="roundRect">
-            <a:avLst/>
-          </a:prstGeom>
-          <a:solidFill>
-            <a:srgbClr val="FFFFFF"/>
-          </a:solidFill>
-          <a:ln w="7620">
-            <a:solidFill>
-              <a:srgbClr val="E1E8F0"/>
-            </a:solidFill>
-          </a:ln>
-        </p:spPr>
-        <p:style>
-          <a:lnRef idx="1">
-            <a:schemeClr val="accent1"/>
-          </a:lnRef>
-          <a:fillRef idx="3">
-            <a:schemeClr val="accent1"/>
-          </a:fillRef>
-          <a:effectRef idx="2">
-            <a:schemeClr val="accent1"/>
-          </a:effectRef>
-          <a:fontRef idx="minor">
-            <a:schemeClr val="lt1"/>
-          </a:fontRef>
-        </p:style>
-        <p:txBody>
-          <a:bodyPr rtlCol="0" anchor="ctr"/>
-          <a:lstStyle/>
-          <a:p>
-            <a:pPr algn="ctr"/>
-          </a:p>
-        </p:txBody>
-      </p:sp>
-      <p:sp>
-        <p:nvSpPr>
-          <p:cNvPr id="30" name="Rectangle 29"/>
-          <p:cNvSpPr/>
-          <p:nvPr/>
-        </p:nvSpPr>
-        <p:spPr>
-          <a:xfrm>
-            <a:off x="3364992" y="4096512"/>
-            <a:ext cx="2834640" cy="73152"/>
-          </a:xfrm>
-          <a:prstGeom prst="rect">
-            <a:avLst/>
-          </a:prstGeom>
-          <a:solidFill>
-            <a:srgbClr val="F97316"/>
-          </a:solidFill>
-          <a:ln>
-            <a:noFill/>
-          </a:ln>
-        </p:spPr>
-        <p:style>
-          <a:lnRef idx="1">
-            <a:schemeClr val="accent1"/>
-          </a:lnRef>
-          <a:fillRef idx="3">
-            <a:schemeClr val="accent1"/>
-          </a:fillRef>
-          <a:effectRef idx="2">
-            <a:schemeClr val="accent1"/>
-          </a:effectRef>
-          <a:fontRef idx="minor">
-            <a:schemeClr val="lt1"/>
-          </a:fontRef>
-        </p:style>
-        <p:txBody>
-          <a:bodyPr rtlCol="0" anchor="ctr"/>
-          <a:lstStyle/>
-          <a:p>
-            <a:pPr algn="ctr"/>
-          </a:p>
-        </p:txBody>
-      </p:sp>
-      <p:sp>
-        <p:nvSpPr>
-          <p:cNvPr id="31" name="Rectangle 30"/>
-          <p:cNvSpPr/>
-          <p:nvPr/>
-        </p:nvSpPr>
-        <p:spPr>
-          <a:xfrm>
-            <a:off x="3493008" y="4215384"/>
-            <a:ext cx="2578608" cy="182880"/>
+              <a:t>핵심 성과</a:t>
+            </a:r>
+          </a:p>
+        </p:txBody>
+      </p:sp>
+      <p:sp>
+        <p:nvSpPr>
+          <p:cNvPr id="32" name="Rectangle 31"/>
+          <p:cNvSpPr/>
+          <p:nvPr/>
+        </p:nvSpPr>
+        <p:spPr>
+          <a:xfrm>
+            <a:off x="6473952" y="1984248"/>
+            <a:ext cx="4251960" cy="640080"/>
           </a:xfrm>
           <a:prstGeom prst="rect">
             <a:avLst/>
@@ -18142,167 +16459,15 @@
               </a:spcAft>
             </a:pPr>
             <a:r>
-              <a:rPr sz="800" b="1">
-                <a:solidFill>
-                  <a:srgbClr val="606E80"/>
+              <a:rPr sz="950" b="0">
+                <a:solidFill>
+                  <a:srgbClr val="141926"/>
                 </a:solidFill>
                 <a:latin typeface="Noto Sans CJK KR"/>
               </a:rPr>
-              <a:t>F1 Scores</a:t>
-            </a:r>
-          </a:p>
-        </p:txBody>
-      </p:sp>
-      <p:pic>
-        <p:nvPicPr>
-          <p:cNvPr id="32" name="Picture 31" descr="automotive_obd_ii_f1_scores.png"/>
-          <p:cNvPicPr>
-            <a:picLocks noChangeAspect="1"/>
-          </p:cNvPicPr>
-          <p:nvPr/>
-        </p:nvPicPr>
-        <p:blipFill>
-          <a:blip r:embed="rId4"/>
-          <a:stretch>
-            <a:fillRect/>
-          </a:stretch>
-        </p:blipFill>
-        <p:spPr>
-          <a:xfrm>
-            <a:off x="3788446" y="4462272"/>
-            <a:ext cx="1987731" cy="1517904"/>
-          </a:xfrm>
-          <a:prstGeom prst="rect">
-            <a:avLst/>
-          </a:prstGeom>
-        </p:spPr>
-      </p:pic>
-      <p:sp>
-        <p:nvSpPr>
-          <p:cNvPr id="33" name="Rounded Rectangle 32"/>
-          <p:cNvSpPr/>
-          <p:nvPr/>
-        </p:nvSpPr>
-        <p:spPr>
-          <a:xfrm>
-            <a:off x="6510528" y="4096512"/>
-            <a:ext cx="4526280" cy="1993392"/>
-          </a:xfrm>
-          <a:prstGeom prst="roundRect">
-            <a:avLst/>
-          </a:prstGeom>
-          <a:solidFill>
-            <a:srgbClr val="FFFFFF"/>
-          </a:solidFill>
-          <a:ln w="7620">
-            <a:solidFill>
-              <a:srgbClr val="E1E8F0"/>
-            </a:solidFill>
-          </a:ln>
-        </p:spPr>
-        <p:style>
-          <a:lnRef idx="1">
-            <a:schemeClr val="accent1"/>
-          </a:lnRef>
-          <a:fillRef idx="3">
-            <a:schemeClr val="accent1"/>
-          </a:fillRef>
-          <a:effectRef idx="2">
-            <a:schemeClr val="accent1"/>
-          </a:effectRef>
-          <a:fontRef idx="minor">
-            <a:schemeClr val="lt1"/>
-          </a:fontRef>
-        </p:style>
-        <p:txBody>
-          <a:bodyPr rtlCol="0" anchor="ctr"/>
-          <a:lstStyle/>
-          <a:p>
-            <a:pPr algn="ctr"/>
-          </a:p>
-        </p:txBody>
-      </p:sp>
-      <p:sp>
-        <p:nvSpPr>
-          <p:cNvPr id="34" name="Rectangle 33"/>
-          <p:cNvSpPr/>
-          <p:nvPr/>
-        </p:nvSpPr>
-        <p:spPr>
-          <a:xfrm>
-            <a:off x="6510528" y="4096512"/>
-            <a:ext cx="4526280" cy="73152"/>
-          </a:xfrm>
-          <a:prstGeom prst="rect">
-            <a:avLst/>
-          </a:prstGeom>
-          <a:solidFill>
-            <a:srgbClr val="F5BE14"/>
-          </a:solidFill>
-          <a:ln>
-            <a:noFill/>
-          </a:ln>
-        </p:spPr>
-        <p:style>
-          <a:lnRef idx="1">
-            <a:schemeClr val="accent1"/>
-          </a:lnRef>
-          <a:fillRef idx="3">
-            <a:schemeClr val="accent1"/>
-          </a:fillRef>
-          <a:effectRef idx="2">
-            <a:schemeClr val="accent1"/>
-          </a:effectRef>
-          <a:fontRef idx="minor">
-            <a:schemeClr val="lt1"/>
-          </a:fontRef>
-        </p:style>
-        <p:txBody>
-          <a:bodyPr rtlCol="0" anchor="ctr"/>
-          <a:lstStyle/>
-          <a:p>
-            <a:pPr algn="ctr"/>
-          </a:p>
-        </p:txBody>
-      </p:sp>
-      <p:sp>
-        <p:nvSpPr>
-          <p:cNvPr id="35" name="Rectangle 34"/>
-          <p:cNvSpPr/>
-          <p:nvPr/>
-        </p:nvSpPr>
-        <p:spPr>
-          <a:xfrm>
-            <a:off x="6638544" y="4215384"/>
-            <a:ext cx="4270248" cy="182880"/>
-          </a:xfrm>
-          <a:prstGeom prst="rect">
-            <a:avLst/>
-          </a:prstGeom>
-          <a:noFill/>
-          <a:ln>
-            <a:noFill/>
-          </a:ln>
-        </p:spPr>
-        <p:style>
-          <a:lnRef idx="1">
-            <a:schemeClr val="accent1"/>
-          </a:lnRef>
-          <a:fillRef idx="3">
-            <a:schemeClr val="accent1"/>
-          </a:fillRef>
-          <a:effectRef idx="2">
-            <a:schemeClr val="accent1"/>
-          </a:effectRef>
-          <a:fontRef idx="minor">
-            <a:schemeClr val="lt1"/>
-          </a:fontRef>
-        </p:style>
-        <p:txBody>
-          <a:bodyPr rtlCol="0" anchor="ctr" wrap="square" lIns="9144" rIns="9144" tIns="9144" bIns="9144">
-            <a:normAutofit/>
-          </a:bodyPr>
-          <a:lstStyle/>
+              <a:t>• 여러 데이터셋을 같은 평가 흐름으로 비교</a:t>
+            </a:r>
+          </a:p>
           <a:p>
             <a:pPr algn="l">
               <a:spcAft>
@@ -18310,269 +16475,15 @@
               </a:spcAft>
             </a:pPr>
             <a:r>
-              <a:rPr sz="800" b="1">
-                <a:solidFill>
-                  <a:srgbClr val="606E80"/>
+              <a:rPr sz="950" b="0">
+                <a:solidFill>
+                  <a:srgbClr val="141926"/>
                 </a:solidFill>
                 <a:latin typeface="Noto Sans CJK KR"/>
               </a:rPr>
-              <a:t>Feature Distribution</a:t>
-            </a:r>
-          </a:p>
-        </p:txBody>
-      </p:sp>
-      <p:pic>
-        <p:nvPicPr>
-          <p:cNvPr id="36" name="Picture 35" descr="automotive_obd_ii_feature_distribution.png"/>
-          <p:cNvPicPr>
-            <a:picLocks noChangeAspect="1"/>
-          </p:cNvPicPr>
-          <p:nvPr/>
-        </p:nvPicPr>
-        <p:blipFill>
-          <a:blip r:embed="rId5"/>
-          <a:stretch>
-            <a:fillRect/>
-          </a:stretch>
-        </p:blipFill>
-        <p:spPr>
-          <a:xfrm>
-            <a:off x="6930498" y="4462272"/>
-            <a:ext cx="3686338" cy="1517904"/>
-          </a:xfrm>
-          <a:prstGeom prst="rect">
-            <a:avLst/>
-          </a:prstGeom>
-        </p:spPr>
-      </p:pic>
-    </p:spTree>
-  </p:cSld>
-  <p:clrMapOvr>
-    <a:masterClrMapping/>
-  </p:clrMapOvr>
-</p:sld>
-</file>
-
-<file path=ppt/slides/slide9.xml><?xml version="1.0" encoding="utf-8"?>
-<p:sld xmlns:a="http://schemas.openxmlformats.org/drawingml/2006/main" xmlns:p="http://schemas.openxmlformats.org/presentationml/2006/main" xmlns:r="http://schemas.openxmlformats.org/officeDocument/2006/relationships">
-  <p:cSld>
-    <p:spTree>
-      <p:nvGrpSpPr>
-        <p:cNvPr id="1" name=""/>
-        <p:cNvGrpSpPr/>
-        <p:nvPr/>
-      </p:nvGrpSpPr>
-      <p:grpSpPr/>
-      <p:sp>
-        <p:nvSpPr>
-          <p:cNvPr id="2" name="Rectangle 1"/>
-          <p:cNvSpPr/>
-          <p:nvPr/>
-        </p:nvSpPr>
-        <p:spPr>
-          <a:xfrm>
-            <a:off x="0" y="0"/>
-            <a:ext cx="12191695" cy="6858000"/>
-          </a:xfrm>
-          <a:prstGeom prst="rect">
-            <a:avLst/>
-          </a:prstGeom>
-          <a:solidFill>
-            <a:srgbClr val="F7FBFF"/>
-          </a:solidFill>
-          <a:ln>
-            <a:noFill/>
-          </a:ln>
-        </p:spPr>
-        <p:style>
-          <a:lnRef idx="1">
-            <a:schemeClr val="accent1"/>
-          </a:lnRef>
-          <a:fillRef idx="3">
-            <a:schemeClr val="accent1"/>
-          </a:fillRef>
-          <a:effectRef idx="2">
-            <a:schemeClr val="accent1"/>
-          </a:effectRef>
-          <a:fontRef idx="minor">
-            <a:schemeClr val="lt1"/>
-          </a:fontRef>
-        </p:style>
-        <p:txBody>
-          <a:bodyPr rtlCol="0" anchor="ctr"/>
-          <a:lstStyle/>
-          <a:p>
-            <a:pPr algn="ctr"/>
-          </a:p>
-        </p:txBody>
-      </p:sp>
-      <p:sp>
-        <p:nvSpPr>
-          <p:cNvPr id="3" name="Rectangle 2"/>
-          <p:cNvSpPr/>
-          <p:nvPr/>
-        </p:nvSpPr>
-        <p:spPr>
-          <a:xfrm>
-            <a:off x="0" y="0"/>
-            <a:ext cx="12191695" cy="109728"/>
-          </a:xfrm>
-          <a:prstGeom prst="rect">
-            <a:avLst/>
-          </a:prstGeom>
-          <a:solidFill>
-            <a:srgbClr val="7C3AED"/>
-          </a:solidFill>
-          <a:ln>
-            <a:noFill/>
-          </a:ln>
-        </p:spPr>
-        <p:style>
-          <a:lnRef idx="1">
-            <a:schemeClr val="accent1"/>
-          </a:lnRef>
-          <a:fillRef idx="3">
-            <a:schemeClr val="accent1"/>
-          </a:fillRef>
-          <a:effectRef idx="2">
-            <a:schemeClr val="accent1"/>
-          </a:effectRef>
-          <a:fontRef idx="minor">
-            <a:schemeClr val="lt1"/>
-          </a:fontRef>
-        </p:style>
-        <p:txBody>
-          <a:bodyPr rtlCol="0" anchor="ctr"/>
-          <a:lstStyle/>
-          <a:p>
-            <a:pPr algn="ctr"/>
-          </a:p>
-        </p:txBody>
-      </p:sp>
-      <p:sp>
-        <p:nvSpPr>
-          <p:cNvPr id="4" name="Rounded Rectangle 3"/>
-          <p:cNvSpPr/>
-          <p:nvPr/>
-        </p:nvSpPr>
-        <p:spPr>
-          <a:xfrm>
-            <a:off x="11503152" y="502920"/>
-            <a:ext cx="310896" cy="310896"/>
-          </a:xfrm>
-          <a:prstGeom prst="roundRect">
-            <a:avLst/>
-          </a:prstGeom>
-          <a:solidFill>
-            <a:srgbClr val="7C3AED"/>
-          </a:solidFill>
-          <a:ln>
-            <a:noFill/>
-          </a:ln>
-        </p:spPr>
-        <p:style>
-          <a:lnRef idx="1">
-            <a:schemeClr val="accent1"/>
-          </a:lnRef>
-          <a:fillRef idx="3">
-            <a:schemeClr val="accent1"/>
-          </a:fillRef>
-          <a:effectRef idx="2">
-            <a:schemeClr val="accent1"/>
-          </a:effectRef>
-          <a:fontRef idx="minor">
-            <a:schemeClr val="lt1"/>
-          </a:fontRef>
-        </p:style>
-        <p:txBody>
-          <a:bodyPr rtlCol="0" anchor="ctr"/>
-          <a:lstStyle/>
-          <a:p>
-            <a:pPr algn="ctr"/>
-          </a:p>
-        </p:txBody>
-      </p:sp>
-      <p:sp>
-        <p:nvSpPr>
-          <p:cNvPr id="5" name="Rounded Rectangle 4"/>
-          <p:cNvSpPr/>
-          <p:nvPr/>
-        </p:nvSpPr>
-        <p:spPr>
-          <a:xfrm>
-            <a:off x="11137392" y="502920"/>
-            <a:ext cx="201168" cy="201168"/>
-          </a:xfrm>
-          <a:prstGeom prst="roundRect">
-            <a:avLst/>
-          </a:prstGeom>
-          <a:solidFill>
-            <a:srgbClr val="F5BE14"/>
-          </a:solidFill>
-          <a:ln>
-            <a:noFill/>
-          </a:ln>
-        </p:spPr>
-        <p:style>
-          <a:lnRef idx="1">
-            <a:schemeClr val="accent1"/>
-          </a:lnRef>
-          <a:fillRef idx="3">
-            <a:schemeClr val="accent1"/>
-          </a:fillRef>
-          <a:effectRef idx="2">
-            <a:schemeClr val="accent1"/>
-          </a:effectRef>
-          <a:fontRef idx="minor">
-            <a:schemeClr val="lt1"/>
-          </a:fontRef>
-        </p:style>
-        <p:txBody>
-          <a:bodyPr rtlCol="0" anchor="ctr"/>
-          <a:lstStyle/>
-          <a:p>
-            <a:pPr algn="ctr"/>
-          </a:p>
-        </p:txBody>
-      </p:sp>
-      <p:sp>
-        <p:nvSpPr>
-          <p:cNvPr id="6" name="Rectangle 5"/>
-          <p:cNvSpPr/>
-          <p:nvPr/>
-        </p:nvSpPr>
-        <p:spPr>
-          <a:xfrm>
-            <a:off x="566928" y="310896"/>
-            <a:ext cx="3840480" cy="219456"/>
-          </a:xfrm>
-          <a:prstGeom prst="rect">
-            <a:avLst/>
-          </a:prstGeom>
-          <a:noFill/>
-          <a:ln>
-            <a:noFill/>
-          </a:ln>
-        </p:spPr>
-        <p:style>
-          <a:lnRef idx="1">
-            <a:schemeClr val="accent1"/>
-          </a:lnRef>
-          <a:fillRef idx="3">
-            <a:schemeClr val="accent1"/>
-          </a:fillRef>
-          <a:effectRef idx="2">
-            <a:schemeClr val="accent1"/>
-          </a:effectRef>
-          <a:fontRef idx="minor">
-            <a:schemeClr val="lt1"/>
-          </a:fontRef>
-        </p:style>
-        <p:txBody>
-          <a:bodyPr rtlCol="0" anchor="ctr" wrap="square" lIns="9144" rIns="9144" tIns="9144" bIns="9144">
-            <a:normAutofit/>
-          </a:bodyPr>
-          <a:lstStyle/>
+              <a:t>• 분류와 이상 탐지를 함께 활용</a:t>
+            </a:r>
+          </a:p>
           <a:p>
             <a:pPr algn="l">
               <a:spcAft>
@@ -18580,27 +16491,70 @@
               </a:spcAft>
             </a:pPr>
             <a:r>
-              <a:rPr sz="850" b="1">
-                <a:solidFill>
-                  <a:srgbClr val="7C3AED"/>
+              <a:rPr sz="950" b="0">
+                <a:solidFill>
+                  <a:srgbClr val="141926"/>
                 </a:solidFill>
                 <a:latin typeface="Noto Sans CJK KR"/>
               </a:rPr>
-              <a:t>RESULT 05</a:t>
-            </a:r>
-          </a:p>
-        </p:txBody>
-      </p:sp>
-      <p:sp>
-        <p:nvSpPr>
-          <p:cNvPr id="7" name="Rectangle 6"/>
-          <p:cNvSpPr/>
-          <p:nvPr/>
-        </p:nvSpPr>
-        <p:spPr>
-          <a:xfrm>
-            <a:off x="566928" y="566928"/>
-            <a:ext cx="8412480" cy="493776"/>
+              <a:t>• 그래프와 보고서 자동 생성</a:t>
+            </a:r>
+          </a:p>
+        </p:txBody>
+      </p:sp>
+      <p:sp>
+        <p:nvSpPr>
+          <p:cNvPr id="33" name="Rounded Rectangle 32"/>
+          <p:cNvSpPr/>
+          <p:nvPr/>
+        </p:nvSpPr>
+        <p:spPr>
+          <a:xfrm>
+            <a:off x="6172200" y="3127248"/>
+            <a:ext cx="5230368" cy="1572768"/>
+          </a:xfrm>
+          <a:prstGeom prst="roundRect">
+            <a:avLst/>
+          </a:prstGeom>
+          <a:solidFill>
+            <a:srgbClr val="FFEEE2"/>
+          </a:solidFill>
+          <a:ln>
+            <a:noFill/>
+          </a:ln>
+        </p:spPr>
+        <p:style>
+          <a:lnRef idx="1">
+            <a:schemeClr val="accent1"/>
+          </a:lnRef>
+          <a:fillRef idx="3">
+            <a:schemeClr val="accent1"/>
+          </a:fillRef>
+          <a:effectRef idx="2">
+            <a:schemeClr val="accent1"/>
+          </a:effectRef>
+          <a:fontRef idx="minor">
+            <a:schemeClr val="lt1"/>
+          </a:fontRef>
+        </p:style>
+        <p:txBody>
+          <a:bodyPr rtlCol="0" anchor="ctr"/>
+          <a:lstStyle/>
+          <a:p>
+            <a:pPr algn="ctr"/>
+          </a:p>
+        </p:txBody>
+      </p:sp>
+      <p:sp>
+        <p:nvSpPr>
+          <p:cNvPr id="34" name="Rectangle 33"/>
+          <p:cNvSpPr/>
+          <p:nvPr/>
+        </p:nvSpPr>
+        <p:spPr>
+          <a:xfrm>
+            <a:off x="6473952" y="3438144"/>
+            <a:ext cx="4389120" cy="274320"/>
           </a:xfrm>
           <a:prstGeom prst="rect">
             <a:avLst/>
@@ -18636,72 +16590,27 @@
               </a:spcAft>
             </a:pPr>
             <a:r>
-              <a:rPr sz="2500" b="1">
-                <a:solidFill>
-                  <a:srgbClr val="141926"/>
+              <a:rPr sz="1600" b="1">
+                <a:solidFill>
+                  <a:srgbClr val="F97316"/>
                 </a:solidFill>
                 <a:latin typeface="Noto Sans CJK KR"/>
               </a:rPr>
-              <a:t>AI4I 예지정비 벤치마크</a:t>
-            </a:r>
-          </a:p>
-        </p:txBody>
-      </p:sp>
-      <p:sp>
-        <p:nvSpPr>
-          <p:cNvPr id="8" name="Rounded Rectangle 7"/>
-          <p:cNvSpPr/>
-          <p:nvPr/>
-        </p:nvSpPr>
-        <p:spPr>
-          <a:xfrm>
-            <a:off x="566928" y="1261872"/>
-            <a:ext cx="2423160" cy="5120640"/>
-          </a:xfrm>
-          <a:prstGeom prst="roundRect">
-            <a:avLst/>
-          </a:prstGeom>
-          <a:solidFill>
-            <a:srgbClr val="FFFFFF"/>
-          </a:solidFill>
-          <a:ln w="7620">
-            <a:solidFill>
-              <a:srgbClr val="E1E8F0"/>
-            </a:solidFill>
-          </a:ln>
-        </p:spPr>
-        <p:style>
-          <a:lnRef idx="1">
-            <a:schemeClr val="accent1"/>
-          </a:lnRef>
-          <a:fillRef idx="3">
-            <a:schemeClr val="accent1"/>
-          </a:fillRef>
-          <a:effectRef idx="2">
-            <a:schemeClr val="accent1"/>
-          </a:effectRef>
-          <a:fontRef idx="minor">
-            <a:schemeClr val="lt1"/>
-          </a:fontRef>
-        </p:style>
-        <p:txBody>
-          <a:bodyPr rtlCol="0" anchor="ctr"/>
-          <a:lstStyle/>
-          <a:p>
-            <a:pPr algn="ctr"/>
-          </a:p>
-        </p:txBody>
-      </p:sp>
-      <p:sp>
-        <p:nvSpPr>
-          <p:cNvPr id="9" name="Rectangle 8"/>
-          <p:cNvSpPr/>
-          <p:nvPr/>
-        </p:nvSpPr>
-        <p:spPr>
-          <a:xfrm>
-            <a:off x="822960" y="1572768"/>
-            <a:ext cx="1828800" cy="256032"/>
+              <a:t>다음 단계</a:t>
+            </a:r>
+          </a:p>
+        </p:txBody>
+      </p:sp>
+      <p:sp>
+        <p:nvSpPr>
+          <p:cNvPr id="35" name="Rectangle 34"/>
+          <p:cNvSpPr/>
+          <p:nvPr/>
+        </p:nvSpPr>
+        <p:spPr>
+          <a:xfrm>
+            <a:off x="6473952" y="3867912"/>
+            <a:ext cx="4251960" cy="640080"/>
           </a:xfrm>
           <a:prstGeom prst="rect">
             <a:avLst/>
@@ -18737,98 +16646,15 @@
               </a:spcAft>
             </a:pPr>
             <a:r>
-              <a:rPr sz="1400" b="1">
-                <a:solidFill>
-                  <a:srgbClr val="7C3AED"/>
+              <a:rPr sz="950" b="0">
+                <a:solidFill>
+                  <a:srgbClr val="141926"/>
                 </a:solidFill>
                 <a:latin typeface="Noto Sans CJK KR"/>
               </a:rPr>
-              <a:t>핵심 해석</a:t>
-            </a:r>
-          </a:p>
-        </p:txBody>
-      </p:sp>
-      <p:sp>
-        <p:nvSpPr>
-          <p:cNvPr id="10" name="Rounded Rectangle 9"/>
-          <p:cNvSpPr/>
-          <p:nvPr/>
-        </p:nvSpPr>
-        <p:spPr>
-          <a:xfrm>
-            <a:off x="841248" y="2011680"/>
-            <a:ext cx="2359152" cy="676656"/>
-          </a:xfrm>
-          <a:prstGeom prst="roundRect">
-            <a:avLst/>
-          </a:prstGeom>
-          <a:solidFill>
-            <a:srgbClr val="E2F9FC"/>
-          </a:solidFill>
-          <a:ln>
-            <a:noFill/>
-          </a:ln>
-        </p:spPr>
-        <p:style>
-          <a:lnRef idx="1">
-            <a:schemeClr val="accent1"/>
-          </a:lnRef>
-          <a:fillRef idx="3">
-            <a:schemeClr val="accent1"/>
-          </a:fillRef>
-          <a:effectRef idx="2">
-            <a:schemeClr val="accent1"/>
-          </a:effectRef>
-          <a:fontRef idx="minor">
-            <a:schemeClr val="lt1"/>
-          </a:fontRef>
-        </p:style>
-        <p:txBody>
-          <a:bodyPr rtlCol="0" anchor="ctr"/>
-          <a:lstStyle/>
-          <a:p>
-            <a:pPr algn="ctr"/>
-          </a:p>
-        </p:txBody>
-      </p:sp>
-      <p:sp>
-        <p:nvSpPr>
-          <p:cNvPr id="11" name="Rectangle 10"/>
-          <p:cNvSpPr/>
-          <p:nvPr/>
-        </p:nvSpPr>
-        <p:spPr>
-          <a:xfrm>
-            <a:off x="1005840" y="2103120"/>
-            <a:ext cx="914400" cy="237744"/>
-          </a:xfrm>
-          <a:prstGeom prst="rect">
-            <a:avLst/>
-          </a:prstGeom>
-          <a:noFill/>
-          <a:ln>
-            <a:noFill/>
-          </a:ln>
-        </p:spPr>
-        <p:style>
-          <a:lnRef idx="1">
-            <a:schemeClr val="accent1"/>
-          </a:lnRef>
-          <a:fillRef idx="3">
-            <a:schemeClr val="accent1"/>
-          </a:fillRef>
-          <a:effectRef idx="2">
-            <a:schemeClr val="accent1"/>
-          </a:effectRef>
-          <a:fontRef idx="minor">
-            <a:schemeClr val="lt1"/>
-          </a:fontRef>
-        </p:style>
-        <p:txBody>
-          <a:bodyPr rtlCol="0" anchor="ctr" wrap="square" lIns="9144" rIns="9144" tIns="9144" bIns="9144">
-            <a:normAutofit/>
-          </a:bodyPr>
-          <a:lstStyle/>
+              <a:t>• KIT OBD-II 추가 라벨 데이터 확보</a:t>
+            </a:r>
+          </a:p>
           <a:p>
             <a:pPr algn="l">
               <a:spcAft>
@@ -18836,55 +16662,15 @@
               </a:spcAft>
             </a:pPr>
             <a:r>
-              <a:rPr sz="1700" b="1">
-                <a:solidFill>
-                  <a:srgbClr val="08BCDA"/>
+              <a:rPr sz="950" b="0">
+                <a:solidFill>
+                  <a:srgbClr val="141926"/>
                 </a:solidFill>
                 <a:latin typeface="Noto Sans CJK KR"/>
               </a:rPr>
-              <a:t>0.726</a:t>
-            </a:r>
-          </a:p>
-        </p:txBody>
-      </p:sp>
-      <p:sp>
-        <p:nvSpPr>
-          <p:cNvPr id="12" name="Rectangle 11"/>
-          <p:cNvSpPr/>
-          <p:nvPr/>
-        </p:nvSpPr>
-        <p:spPr>
-          <a:xfrm>
-            <a:off x="1005840" y="2395728"/>
-            <a:ext cx="1938528" cy="164592"/>
-          </a:xfrm>
-          <a:prstGeom prst="rect">
-            <a:avLst/>
-          </a:prstGeom>
-          <a:noFill/>
-          <a:ln>
-            <a:noFill/>
-          </a:ln>
-        </p:spPr>
-        <p:style>
-          <a:lnRef idx="1">
-            <a:schemeClr val="accent1"/>
-          </a:lnRef>
-          <a:fillRef idx="3">
-            <a:schemeClr val="accent1"/>
-          </a:fillRef>
-          <a:effectRef idx="2">
-            <a:schemeClr val="accent1"/>
-          </a:effectRef>
-          <a:fontRef idx="minor">
-            <a:schemeClr val="lt1"/>
-          </a:fontRef>
-        </p:style>
-        <p:txBody>
-          <a:bodyPr rtlCol="0" anchor="ctr" wrap="square" lIns="9144" rIns="9144" tIns="9144" bIns="9144">
-            <a:normAutofit/>
-          </a:bodyPr>
-          <a:lstStyle/>
+              <a:t>• 실제 차량 고장/정비 라벨 확장</a:t>
+            </a:r>
+          </a:p>
           <a:p>
             <a:pPr algn="l">
               <a:spcAft>
@@ -18892,33 +16678,33 @@
               </a:spcAft>
             </a:pPr>
             <a:r>
-              <a:rPr sz="760" b="1">
-                <a:solidFill>
-                  <a:srgbClr val="606E80"/>
+              <a:rPr sz="950" b="0">
+                <a:solidFill>
+                  <a:srgbClr val="141926"/>
                 </a:solidFill>
                 <a:latin typeface="Noto Sans CJK KR"/>
               </a:rPr>
-              <a:t>Accuracy</a:t>
-            </a:r>
-          </a:p>
-        </p:txBody>
-      </p:sp>
-      <p:sp>
-        <p:nvSpPr>
-          <p:cNvPr id="13" name="Rounded Rectangle 12"/>
-          <p:cNvSpPr/>
-          <p:nvPr/>
-        </p:nvSpPr>
-        <p:spPr>
-          <a:xfrm>
-            <a:off x="841248" y="2798064"/>
-            <a:ext cx="2359152" cy="676656"/>
+              <a:t>• 시계열 모델과 실시간 적용 구조로 개선</a:t>
+            </a:r>
+          </a:p>
+        </p:txBody>
+      </p:sp>
+      <p:sp>
+        <p:nvSpPr>
+          <p:cNvPr id="36" name="Rounded Rectangle 35"/>
+          <p:cNvSpPr/>
+          <p:nvPr/>
+        </p:nvSpPr>
+        <p:spPr>
+          <a:xfrm>
+            <a:off x="713232" y="5806440"/>
+            <a:ext cx="10698480" cy="502920"/>
           </a:xfrm>
           <a:prstGeom prst="roundRect">
             <a:avLst/>
           </a:prstGeom>
           <a:solidFill>
-            <a:srgbClr val="FFEEE2"/>
+            <a:srgbClr val="E8F0FF"/>
           </a:solidFill>
           <a:ln>
             <a:noFill/>
@@ -18948,14 +16734,14 @@
       </p:sp>
       <p:sp>
         <p:nvSpPr>
-          <p:cNvPr id="14" name="Rectangle 13"/>
-          <p:cNvSpPr/>
-          <p:nvPr/>
-        </p:nvSpPr>
-        <p:spPr>
-          <a:xfrm>
-            <a:off x="1005840" y="2889504"/>
-            <a:ext cx="914400" cy="237744"/>
+          <p:cNvPr id="37" name="Rectangle 36"/>
+          <p:cNvSpPr/>
+          <p:nvPr/>
+        </p:nvSpPr>
+        <p:spPr>
+          <a:xfrm>
+            <a:off x="987552" y="5943600"/>
+            <a:ext cx="10012680" cy="182880"/>
           </a:xfrm>
           <a:prstGeom prst="rect">
             <a:avLst/>
@@ -18991,1031 +16777,17 @@
               </a:spcAft>
             </a:pPr>
             <a:r>
-              <a:rPr sz="1700" b="1">
-                <a:solidFill>
-                  <a:srgbClr val="F97316"/>
+              <a:rPr sz="1019" b="1">
+                <a:solidFill>
+                  <a:srgbClr val="2563EB"/>
                 </a:solidFill>
                 <a:latin typeface="Noto Sans CJK KR"/>
               </a:rPr>
-              <a:t>0.496</a:t>
-            </a:r>
-          </a:p>
-        </p:txBody>
-      </p:sp>
-      <p:sp>
-        <p:nvSpPr>
-          <p:cNvPr id="15" name="Rectangle 14"/>
-          <p:cNvSpPr/>
-          <p:nvPr/>
-        </p:nvSpPr>
-        <p:spPr>
-          <a:xfrm>
-            <a:off x="1005840" y="3182112"/>
-            <a:ext cx="1938528" cy="164592"/>
-          </a:xfrm>
-          <a:prstGeom prst="rect">
-            <a:avLst/>
-          </a:prstGeom>
-          <a:noFill/>
-          <a:ln>
-            <a:noFill/>
-          </a:ln>
-        </p:spPr>
-        <p:style>
-          <a:lnRef idx="1">
-            <a:schemeClr val="accent1"/>
-          </a:lnRef>
-          <a:fillRef idx="3">
-            <a:schemeClr val="accent1"/>
-          </a:fillRef>
-          <a:effectRef idx="2">
-            <a:schemeClr val="accent1"/>
-          </a:effectRef>
-          <a:fontRef idx="minor">
-            <a:schemeClr val="lt1"/>
-          </a:fontRef>
-        </p:style>
-        <p:txBody>
-          <a:bodyPr rtlCol="0" anchor="ctr" wrap="square" lIns="9144" rIns="9144" tIns="9144" bIns="9144">
-            <a:normAutofit/>
-          </a:bodyPr>
-          <a:lstStyle/>
-          <a:p>
-            <a:pPr algn="l">
-              <a:spcAft>
-                <a:spcPts val="200"/>
-              </a:spcAft>
-            </a:pPr>
-            <a:r>
-              <a:rPr sz="760" b="1">
-                <a:solidFill>
-                  <a:srgbClr val="606E80"/>
-                </a:solidFill>
-                <a:latin typeface="Noto Sans CJK KR"/>
-              </a:rPr>
-              <a:t>Macro F1</a:t>
-            </a:r>
-          </a:p>
-        </p:txBody>
-      </p:sp>
-      <p:sp>
-        <p:nvSpPr>
-          <p:cNvPr id="16" name="Rounded Rectangle 15"/>
-          <p:cNvSpPr/>
-          <p:nvPr/>
-        </p:nvSpPr>
-        <p:spPr>
-          <a:xfrm>
-            <a:off x="841248" y="3584448"/>
-            <a:ext cx="2359152" cy="676656"/>
-          </a:xfrm>
-          <a:prstGeom prst="roundRect">
-            <a:avLst/>
-          </a:prstGeom>
-          <a:solidFill>
-            <a:srgbClr val="F2ECFF"/>
-          </a:solidFill>
-          <a:ln>
-            <a:noFill/>
-          </a:ln>
-        </p:spPr>
-        <p:style>
-          <a:lnRef idx="1">
-            <a:schemeClr val="accent1"/>
-          </a:lnRef>
-          <a:fillRef idx="3">
-            <a:schemeClr val="accent1"/>
-          </a:fillRef>
-          <a:effectRef idx="2">
-            <a:schemeClr val="accent1"/>
-          </a:effectRef>
-          <a:fontRef idx="minor">
-            <a:schemeClr val="lt1"/>
-          </a:fontRef>
-        </p:style>
-        <p:txBody>
-          <a:bodyPr rtlCol="0" anchor="ctr"/>
-          <a:lstStyle/>
-          <a:p>
-            <a:pPr algn="ctr"/>
-          </a:p>
-        </p:txBody>
-      </p:sp>
-      <p:sp>
-        <p:nvSpPr>
-          <p:cNvPr id="17" name="Rectangle 16"/>
-          <p:cNvSpPr/>
-          <p:nvPr/>
-        </p:nvSpPr>
-        <p:spPr>
-          <a:xfrm>
-            <a:off x="1005840" y="3675887"/>
-            <a:ext cx="914400" cy="237744"/>
-          </a:xfrm>
-          <a:prstGeom prst="rect">
-            <a:avLst/>
-          </a:prstGeom>
-          <a:noFill/>
-          <a:ln>
-            <a:noFill/>
-          </a:ln>
-        </p:spPr>
-        <p:style>
-          <a:lnRef idx="1">
-            <a:schemeClr val="accent1"/>
-          </a:lnRef>
-          <a:fillRef idx="3">
-            <a:schemeClr val="accent1"/>
-          </a:fillRef>
-          <a:effectRef idx="2">
-            <a:schemeClr val="accent1"/>
-          </a:effectRef>
-          <a:fontRef idx="minor">
-            <a:schemeClr val="lt1"/>
-          </a:fontRef>
-        </p:style>
-        <p:txBody>
-          <a:bodyPr rtlCol="0" anchor="ctr" wrap="square" lIns="9144" rIns="9144" tIns="9144" bIns="9144">
-            <a:normAutofit/>
-          </a:bodyPr>
-          <a:lstStyle/>
-          <a:p>
-            <a:pPr algn="l">
-              <a:spcAft>
-                <a:spcPts val="200"/>
-              </a:spcAft>
-            </a:pPr>
-            <a:r>
-              <a:rPr sz="1700" b="1">
-                <a:solidFill>
-                  <a:srgbClr val="7C3AED"/>
-                </a:solidFill>
-                <a:latin typeface="Noto Sans CJK KR"/>
-              </a:rPr>
-              <a:t>7501</a:t>
-            </a:r>
-          </a:p>
-        </p:txBody>
-      </p:sp>
-      <p:sp>
-        <p:nvSpPr>
-          <p:cNvPr id="18" name="Rectangle 17"/>
-          <p:cNvSpPr/>
-          <p:nvPr/>
-        </p:nvSpPr>
-        <p:spPr>
-          <a:xfrm>
-            <a:off x="1005840" y="3968496"/>
-            <a:ext cx="1938528" cy="164592"/>
-          </a:xfrm>
-          <a:prstGeom prst="rect">
-            <a:avLst/>
-          </a:prstGeom>
-          <a:noFill/>
-          <a:ln>
-            <a:noFill/>
-          </a:ln>
-        </p:spPr>
-        <p:style>
-          <a:lnRef idx="1">
-            <a:schemeClr val="accent1"/>
-          </a:lnRef>
-          <a:fillRef idx="3">
-            <a:schemeClr val="accent1"/>
-          </a:fillRef>
-          <a:effectRef idx="2">
-            <a:schemeClr val="accent1"/>
-          </a:effectRef>
-          <a:fontRef idx="minor">
-            <a:schemeClr val="lt1"/>
-          </a:fontRef>
-        </p:style>
-        <p:txBody>
-          <a:bodyPr rtlCol="0" anchor="ctr" wrap="square" lIns="9144" rIns="9144" tIns="9144" bIns="9144">
-            <a:normAutofit/>
-          </a:bodyPr>
-          <a:lstStyle/>
-          <a:p>
-            <a:pPr algn="l">
-              <a:spcAft>
-                <a:spcPts val="200"/>
-              </a:spcAft>
-            </a:pPr>
-            <a:r>
-              <a:rPr sz="760" b="1">
-                <a:solidFill>
-                  <a:srgbClr val="606E80"/>
-                </a:solidFill>
-                <a:latin typeface="Noto Sans CJK KR"/>
-              </a:rPr>
-              <a:t>Train rows</a:t>
-            </a:r>
-          </a:p>
-        </p:txBody>
-      </p:sp>
-      <p:sp>
-        <p:nvSpPr>
-          <p:cNvPr id="19" name="Rectangle 18"/>
-          <p:cNvSpPr/>
-          <p:nvPr/>
-        </p:nvSpPr>
-        <p:spPr>
-          <a:xfrm>
-            <a:off x="841248" y="4480560"/>
-            <a:ext cx="1901952" cy="27432"/>
-          </a:xfrm>
-          <a:prstGeom prst="rect">
-            <a:avLst/>
-          </a:prstGeom>
-          <a:solidFill>
-            <a:srgbClr val="E6ECF2"/>
-          </a:solidFill>
-          <a:ln>
-            <a:noFill/>
-          </a:ln>
-        </p:spPr>
-        <p:style>
-          <a:lnRef idx="1">
-            <a:schemeClr val="accent1"/>
-          </a:lnRef>
-          <a:fillRef idx="3">
-            <a:schemeClr val="accent1"/>
-          </a:fillRef>
-          <a:effectRef idx="2">
-            <a:schemeClr val="accent1"/>
-          </a:effectRef>
-          <a:fontRef idx="minor">
-            <a:schemeClr val="lt1"/>
-          </a:fontRef>
-        </p:style>
-        <p:txBody>
-          <a:bodyPr rtlCol="0" anchor="ctr"/>
-          <a:lstStyle/>
-          <a:p>
-            <a:pPr algn="ctr"/>
-          </a:p>
-        </p:txBody>
-      </p:sp>
-      <p:sp>
-        <p:nvSpPr>
-          <p:cNvPr id="20" name="Rectangle 19"/>
-          <p:cNvSpPr/>
-          <p:nvPr/>
-        </p:nvSpPr>
-        <p:spPr>
-          <a:xfrm>
-            <a:off x="822960" y="4718304"/>
-            <a:ext cx="1965960" cy="1060704"/>
-          </a:xfrm>
-          <a:prstGeom prst="rect">
-            <a:avLst/>
-          </a:prstGeom>
-          <a:noFill/>
-          <a:ln>
-            <a:noFill/>
-          </a:ln>
-        </p:spPr>
-        <p:style>
-          <a:lnRef idx="1">
-            <a:schemeClr val="accent1"/>
-          </a:lnRef>
-          <a:fillRef idx="3">
-            <a:schemeClr val="accent1"/>
-          </a:fillRef>
-          <a:effectRef idx="2">
-            <a:schemeClr val="accent1"/>
-          </a:effectRef>
-          <a:fontRef idx="minor">
-            <a:schemeClr val="lt1"/>
-          </a:fontRef>
-        </p:style>
-        <p:txBody>
-          <a:bodyPr rtlCol="0" anchor="ctr" wrap="square" lIns="9144" rIns="9144" tIns="9144" bIns="9144">
-            <a:normAutofit/>
-          </a:bodyPr>
-          <a:lstStyle/>
-          <a:p>
-            <a:pPr algn="l">
-              <a:spcAft>
-                <a:spcPts val="200"/>
-              </a:spcAft>
-            </a:pPr>
-            <a:r>
-              <a:rPr sz="869" b="0">
-                <a:solidFill>
-                  <a:srgbClr val="141926"/>
-                </a:solidFill>
-                <a:latin typeface="Noto Sans CJK KR"/>
-              </a:rPr>
-              <a:t>• 온도·토크·마모 feature</a:t>
-            </a:r>
-          </a:p>
-          <a:p>
-            <a:pPr algn="l">
-              <a:spcAft>
-                <a:spcPts val="200"/>
-              </a:spcAft>
-            </a:pPr>
-            <a:r>
-              <a:rPr sz="869" b="0">
-                <a:solidFill>
-                  <a:srgbClr val="141926"/>
-                </a:solidFill>
-                <a:latin typeface="Noto Sans CJK KR"/>
-              </a:rPr>
-              <a:t>• 예지정비 구조 검증</a:t>
-            </a:r>
-          </a:p>
-          <a:p>
-            <a:pPr algn="l">
-              <a:spcAft>
-                <a:spcPts val="200"/>
-              </a:spcAft>
-            </a:pPr>
-            <a:r>
-              <a:rPr sz="869" b="0">
-                <a:solidFill>
-                  <a:srgbClr val="141926"/>
-                </a:solidFill>
-                <a:latin typeface="Noto Sans CJK KR"/>
-              </a:rPr>
-              <a:t>• failure class 개선 필요</a:t>
-            </a:r>
-          </a:p>
-        </p:txBody>
-      </p:sp>
-      <p:sp>
-        <p:nvSpPr>
-          <p:cNvPr id="21" name="Rounded Rectangle 20"/>
-          <p:cNvSpPr/>
-          <p:nvPr/>
-        </p:nvSpPr>
-        <p:spPr>
-          <a:xfrm>
-            <a:off x="3364992" y="1261872"/>
-            <a:ext cx="3675887" cy="2578608"/>
-          </a:xfrm>
-          <a:prstGeom prst="roundRect">
-            <a:avLst/>
-          </a:prstGeom>
-          <a:solidFill>
-            <a:srgbClr val="FFFFFF"/>
-          </a:solidFill>
-          <a:ln w="7620">
-            <a:solidFill>
-              <a:srgbClr val="E1E8F0"/>
-            </a:solidFill>
-          </a:ln>
-        </p:spPr>
-        <p:style>
-          <a:lnRef idx="1">
-            <a:schemeClr val="accent1"/>
-          </a:lnRef>
-          <a:fillRef idx="3">
-            <a:schemeClr val="accent1"/>
-          </a:fillRef>
-          <a:effectRef idx="2">
-            <a:schemeClr val="accent1"/>
-          </a:effectRef>
-          <a:fontRef idx="minor">
-            <a:schemeClr val="lt1"/>
-          </a:fontRef>
-        </p:style>
-        <p:txBody>
-          <a:bodyPr rtlCol="0" anchor="ctr"/>
-          <a:lstStyle/>
-          <a:p>
-            <a:pPr algn="ctr"/>
-          </a:p>
-        </p:txBody>
-      </p:sp>
-      <p:sp>
-        <p:nvSpPr>
-          <p:cNvPr id="22" name="Rectangle 21"/>
-          <p:cNvSpPr/>
-          <p:nvPr/>
-        </p:nvSpPr>
-        <p:spPr>
-          <a:xfrm>
-            <a:off x="3364992" y="1261872"/>
-            <a:ext cx="3675887" cy="73152"/>
-          </a:xfrm>
-          <a:prstGeom prst="rect">
-            <a:avLst/>
-          </a:prstGeom>
-          <a:solidFill>
-            <a:srgbClr val="7C3AED"/>
-          </a:solidFill>
-          <a:ln>
-            <a:noFill/>
-          </a:ln>
-        </p:spPr>
-        <p:style>
-          <a:lnRef idx="1">
-            <a:schemeClr val="accent1"/>
-          </a:lnRef>
-          <a:fillRef idx="3">
-            <a:schemeClr val="accent1"/>
-          </a:fillRef>
-          <a:effectRef idx="2">
-            <a:schemeClr val="accent1"/>
-          </a:effectRef>
-          <a:fontRef idx="minor">
-            <a:schemeClr val="lt1"/>
-          </a:fontRef>
-        </p:style>
-        <p:txBody>
-          <a:bodyPr rtlCol="0" anchor="ctr"/>
-          <a:lstStyle/>
-          <a:p>
-            <a:pPr algn="ctr"/>
-          </a:p>
-        </p:txBody>
-      </p:sp>
-      <p:sp>
-        <p:nvSpPr>
-          <p:cNvPr id="23" name="Rectangle 22"/>
-          <p:cNvSpPr/>
-          <p:nvPr/>
-        </p:nvSpPr>
-        <p:spPr>
-          <a:xfrm>
-            <a:off x="3493008" y="1380743"/>
-            <a:ext cx="3419855" cy="182880"/>
-          </a:xfrm>
-          <a:prstGeom prst="rect">
-            <a:avLst/>
-          </a:prstGeom>
-          <a:noFill/>
-          <a:ln>
-            <a:noFill/>
-          </a:ln>
-        </p:spPr>
-        <p:style>
-          <a:lnRef idx="1">
-            <a:schemeClr val="accent1"/>
-          </a:lnRef>
-          <a:fillRef idx="3">
-            <a:schemeClr val="accent1"/>
-          </a:fillRef>
-          <a:effectRef idx="2">
-            <a:schemeClr val="accent1"/>
-          </a:effectRef>
-          <a:fontRef idx="minor">
-            <a:schemeClr val="lt1"/>
-          </a:fontRef>
-        </p:style>
-        <p:txBody>
-          <a:bodyPr rtlCol="0" anchor="ctr" wrap="square" lIns="9144" rIns="9144" tIns="9144" bIns="9144">
-            <a:normAutofit/>
-          </a:bodyPr>
-          <a:lstStyle/>
-          <a:p>
-            <a:pPr algn="l">
-              <a:spcAft>
-                <a:spcPts val="200"/>
-              </a:spcAft>
-            </a:pPr>
-            <a:r>
-              <a:rPr sz="800" b="1">
-                <a:solidFill>
-                  <a:srgbClr val="606E80"/>
-                </a:solidFill>
-                <a:latin typeface="Noto Sans CJK KR"/>
-              </a:rPr>
-              <a:t>Confusion Matrix</a:t>
-            </a:r>
-          </a:p>
-        </p:txBody>
-      </p:sp>
-      <p:pic>
-        <p:nvPicPr>
-          <p:cNvPr id="24" name="Picture 23" descr="ai4i_confusion_matrix.png"/>
-          <p:cNvPicPr>
-            <a:picLocks noChangeAspect="1"/>
-          </p:cNvPicPr>
-          <p:nvPr/>
-        </p:nvPicPr>
-        <p:blipFill>
-          <a:blip r:embed="rId2"/>
-          <a:stretch>
-            <a:fillRect/>
-          </a:stretch>
-        </p:blipFill>
-        <p:spPr>
-          <a:xfrm>
-            <a:off x="3917696" y="1627631"/>
-            <a:ext cx="2570480" cy="2103120"/>
-          </a:xfrm>
-          <a:prstGeom prst="rect">
-            <a:avLst/>
-          </a:prstGeom>
-        </p:spPr>
-      </p:pic>
-      <p:sp>
-        <p:nvSpPr>
-          <p:cNvPr id="25" name="Rounded Rectangle 24"/>
-          <p:cNvSpPr/>
-          <p:nvPr/>
-        </p:nvSpPr>
-        <p:spPr>
-          <a:xfrm>
-            <a:off x="7360920" y="1261872"/>
-            <a:ext cx="3675887" cy="2578608"/>
-          </a:xfrm>
-          <a:prstGeom prst="roundRect">
-            <a:avLst/>
-          </a:prstGeom>
-          <a:solidFill>
-            <a:srgbClr val="FFFFFF"/>
-          </a:solidFill>
-          <a:ln w="7620">
-            <a:solidFill>
-              <a:srgbClr val="E1E8F0"/>
-            </a:solidFill>
-          </a:ln>
-        </p:spPr>
-        <p:style>
-          <a:lnRef idx="1">
-            <a:schemeClr val="accent1"/>
-          </a:lnRef>
-          <a:fillRef idx="3">
-            <a:schemeClr val="accent1"/>
-          </a:fillRef>
-          <a:effectRef idx="2">
-            <a:schemeClr val="accent1"/>
-          </a:effectRef>
-          <a:fontRef idx="minor">
-            <a:schemeClr val="lt1"/>
-          </a:fontRef>
-        </p:style>
-        <p:txBody>
-          <a:bodyPr rtlCol="0" anchor="ctr"/>
-          <a:lstStyle/>
-          <a:p>
-            <a:pPr algn="ctr"/>
-          </a:p>
-        </p:txBody>
-      </p:sp>
-      <p:sp>
-        <p:nvSpPr>
-          <p:cNvPr id="26" name="Rectangle 25"/>
-          <p:cNvSpPr/>
-          <p:nvPr/>
-        </p:nvSpPr>
-        <p:spPr>
-          <a:xfrm>
-            <a:off x="7360920" y="1261872"/>
-            <a:ext cx="3675887" cy="73152"/>
-          </a:xfrm>
-          <a:prstGeom prst="rect">
-            <a:avLst/>
-          </a:prstGeom>
-          <a:solidFill>
-            <a:srgbClr val="2563EB"/>
-          </a:solidFill>
-          <a:ln>
-            <a:noFill/>
-          </a:ln>
-        </p:spPr>
-        <p:style>
-          <a:lnRef idx="1">
-            <a:schemeClr val="accent1"/>
-          </a:lnRef>
-          <a:fillRef idx="3">
-            <a:schemeClr val="accent1"/>
-          </a:fillRef>
-          <a:effectRef idx="2">
-            <a:schemeClr val="accent1"/>
-          </a:effectRef>
-          <a:fontRef idx="minor">
-            <a:schemeClr val="lt1"/>
-          </a:fontRef>
-        </p:style>
-        <p:txBody>
-          <a:bodyPr rtlCol="0" anchor="ctr"/>
-          <a:lstStyle/>
-          <a:p>
-            <a:pPr algn="ctr"/>
-          </a:p>
-        </p:txBody>
-      </p:sp>
-      <p:sp>
-        <p:nvSpPr>
-          <p:cNvPr id="27" name="Rectangle 26"/>
-          <p:cNvSpPr/>
-          <p:nvPr/>
-        </p:nvSpPr>
-        <p:spPr>
-          <a:xfrm>
-            <a:off x="7488936" y="1380743"/>
-            <a:ext cx="3419855" cy="182880"/>
-          </a:xfrm>
-          <a:prstGeom prst="rect">
-            <a:avLst/>
-          </a:prstGeom>
-          <a:noFill/>
-          <a:ln>
-            <a:noFill/>
-          </a:ln>
-        </p:spPr>
-        <p:style>
-          <a:lnRef idx="1">
-            <a:schemeClr val="accent1"/>
-          </a:lnRef>
-          <a:fillRef idx="3">
-            <a:schemeClr val="accent1"/>
-          </a:fillRef>
-          <a:effectRef idx="2">
-            <a:schemeClr val="accent1"/>
-          </a:effectRef>
-          <a:fontRef idx="minor">
-            <a:schemeClr val="lt1"/>
-          </a:fontRef>
-        </p:style>
-        <p:txBody>
-          <a:bodyPr rtlCol="0" anchor="ctr" wrap="square" lIns="9144" rIns="9144" tIns="9144" bIns="9144">
-            <a:normAutofit/>
-          </a:bodyPr>
-          <a:lstStyle/>
-          <a:p>
-            <a:pPr algn="l">
-              <a:spcAft>
-                <a:spcPts val="200"/>
-              </a:spcAft>
-            </a:pPr>
-            <a:r>
-              <a:rPr sz="800" b="1">
-                <a:solidFill>
-                  <a:srgbClr val="606E80"/>
-                </a:solidFill>
-                <a:latin typeface="Noto Sans CJK KR"/>
-              </a:rPr>
-              <a:t>Feature Importance</a:t>
-            </a:r>
-          </a:p>
-        </p:txBody>
-      </p:sp>
-      <p:pic>
-        <p:nvPicPr>
-          <p:cNvPr id="28" name="Picture 27" descr="ai4i_feature_importance.png"/>
-          <p:cNvPicPr>
-            <a:picLocks noChangeAspect="1"/>
-          </p:cNvPicPr>
-          <p:nvPr/>
-        </p:nvPicPr>
-        <p:blipFill>
-          <a:blip r:embed="rId3"/>
-          <a:stretch>
-            <a:fillRect/>
-          </a:stretch>
-        </p:blipFill>
-        <p:spPr>
-          <a:xfrm>
-            <a:off x="7665339" y="1627631"/>
-            <a:ext cx="3067050" cy="2103120"/>
-          </a:xfrm>
-          <a:prstGeom prst="rect">
-            <a:avLst/>
-          </a:prstGeom>
-        </p:spPr>
-      </p:pic>
-      <p:sp>
-        <p:nvSpPr>
-          <p:cNvPr id="29" name="Rounded Rectangle 28"/>
-          <p:cNvSpPr/>
-          <p:nvPr/>
-        </p:nvSpPr>
-        <p:spPr>
-          <a:xfrm>
-            <a:off x="3364992" y="4096512"/>
-            <a:ext cx="2834640" cy="1993392"/>
-          </a:xfrm>
-          <a:prstGeom prst="roundRect">
-            <a:avLst/>
-          </a:prstGeom>
-          <a:solidFill>
-            <a:srgbClr val="FFFFFF"/>
-          </a:solidFill>
-          <a:ln w="7620">
-            <a:solidFill>
-              <a:srgbClr val="E1E8F0"/>
-            </a:solidFill>
-          </a:ln>
-        </p:spPr>
-        <p:style>
-          <a:lnRef idx="1">
-            <a:schemeClr val="accent1"/>
-          </a:lnRef>
-          <a:fillRef idx="3">
-            <a:schemeClr val="accent1"/>
-          </a:fillRef>
-          <a:effectRef idx="2">
-            <a:schemeClr val="accent1"/>
-          </a:effectRef>
-          <a:fontRef idx="minor">
-            <a:schemeClr val="lt1"/>
-          </a:fontRef>
-        </p:style>
-        <p:txBody>
-          <a:bodyPr rtlCol="0" anchor="ctr"/>
-          <a:lstStyle/>
-          <a:p>
-            <a:pPr algn="ctr"/>
-          </a:p>
-        </p:txBody>
-      </p:sp>
-      <p:sp>
-        <p:nvSpPr>
-          <p:cNvPr id="30" name="Rectangle 29"/>
-          <p:cNvSpPr/>
-          <p:nvPr/>
-        </p:nvSpPr>
-        <p:spPr>
-          <a:xfrm>
-            <a:off x="3364992" y="4096512"/>
-            <a:ext cx="2834640" cy="73152"/>
-          </a:xfrm>
-          <a:prstGeom prst="rect">
-            <a:avLst/>
-          </a:prstGeom>
-          <a:solidFill>
-            <a:srgbClr val="F97316"/>
-          </a:solidFill>
-          <a:ln>
-            <a:noFill/>
-          </a:ln>
-        </p:spPr>
-        <p:style>
-          <a:lnRef idx="1">
-            <a:schemeClr val="accent1"/>
-          </a:lnRef>
-          <a:fillRef idx="3">
-            <a:schemeClr val="accent1"/>
-          </a:fillRef>
-          <a:effectRef idx="2">
-            <a:schemeClr val="accent1"/>
-          </a:effectRef>
-          <a:fontRef idx="minor">
-            <a:schemeClr val="lt1"/>
-          </a:fontRef>
-        </p:style>
-        <p:txBody>
-          <a:bodyPr rtlCol="0" anchor="ctr"/>
-          <a:lstStyle/>
-          <a:p>
-            <a:pPr algn="ctr"/>
-          </a:p>
-        </p:txBody>
-      </p:sp>
-      <p:sp>
-        <p:nvSpPr>
-          <p:cNvPr id="31" name="Rectangle 30"/>
-          <p:cNvSpPr/>
-          <p:nvPr/>
-        </p:nvSpPr>
-        <p:spPr>
-          <a:xfrm>
-            <a:off x="3493008" y="4215384"/>
-            <a:ext cx="2578608" cy="182880"/>
-          </a:xfrm>
-          <a:prstGeom prst="rect">
-            <a:avLst/>
-          </a:prstGeom>
-          <a:noFill/>
-          <a:ln>
-            <a:noFill/>
-          </a:ln>
-        </p:spPr>
-        <p:style>
-          <a:lnRef idx="1">
-            <a:schemeClr val="accent1"/>
-          </a:lnRef>
-          <a:fillRef idx="3">
-            <a:schemeClr val="accent1"/>
-          </a:fillRef>
-          <a:effectRef idx="2">
-            <a:schemeClr val="accent1"/>
-          </a:effectRef>
-          <a:fontRef idx="minor">
-            <a:schemeClr val="lt1"/>
-          </a:fontRef>
-        </p:style>
-        <p:txBody>
-          <a:bodyPr rtlCol="0" anchor="ctr" wrap="square" lIns="9144" rIns="9144" tIns="9144" bIns="9144">
-            <a:normAutofit/>
-          </a:bodyPr>
-          <a:lstStyle/>
-          <a:p>
-            <a:pPr algn="l">
-              <a:spcAft>
-                <a:spcPts val="200"/>
-              </a:spcAft>
-            </a:pPr>
-            <a:r>
-              <a:rPr sz="800" b="1">
-                <a:solidFill>
-                  <a:srgbClr val="606E80"/>
-                </a:solidFill>
-                <a:latin typeface="Noto Sans CJK KR"/>
-              </a:rPr>
-              <a:t>F1 Scores</a:t>
-            </a:r>
-          </a:p>
-        </p:txBody>
-      </p:sp>
-      <p:pic>
-        <p:nvPicPr>
-          <p:cNvPr id="32" name="Picture 31" descr="ai4i_f1_scores.png"/>
-          <p:cNvPicPr>
-            <a:picLocks noChangeAspect="1"/>
-          </p:cNvPicPr>
-          <p:nvPr/>
-        </p:nvPicPr>
-        <p:blipFill>
-          <a:blip r:embed="rId4"/>
-          <a:stretch>
-            <a:fillRect/>
-          </a:stretch>
-        </p:blipFill>
-        <p:spPr>
-          <a:xfrm>
-            <a:off x="3788446" y="4462272"/>
-            <a:ext cx="1987731" cy="1517904"/>
-          </a:xfrm>
-          <a:prstGeom prst="rect">
-            <a:avLst/>
-          </a:prstGeom>
-        </p:spPr>
-      </p:pic>
-      <p:sp>
-        <p:nvSpPr>
-          <p:cNvPr id="33" name="Rounded Rectangle 32"/>
-          <p:cNvSpPr/>
-          <p:nvPr/>
-        </p:nvSpPr>
-        <p:spPr>
-          <a:xfrm>
-            <a:off x="6510528" y="4096512"/>
-            <a:ext cx="4526280" cy="1993392"/>
-          </a:xfrm>
-          <a:prstGeom prst="roundRect">
-            <a:avLst/>
-          </a:prstGeom>
-          <a:solidFill>
-            <a:srgbClr val="FFFFFF"/>
-          </a:solidFill>
-          <a:ln w="7620">
-            <a:solidFill>
-              <a:srgbClr val="E1E8F0"/>
-            </a:solidFill>
-          </a:ln>
-        </p:spPr>
-        <p:style>
-          <a:lnRef idx="1">
-            <a:schemeClr val="accent1"/>
-          </a:lnRef>
-          <a:fillRef idx="3">
-            <a:schemeClr val="accent1"/>
-          </a:fillRef>
-          <a:effectRef idx="2">
-            <a:schemeClr val="accent1"/>
-          </a:effectRef>
-          <a:fontRef idx="minor">
-            <a:schemeClr val="lt1"/>
-          </a:fontRef>
-        </p:style>
-        <p:txBody>
-          <a:bodyPr rtlCol="0" anchor="ctr"/>
-          <a:lstStyle/>
-          <a:p>
-            <a:pPr algn="ctr"/>
-          </a:p>
-        </p:txBody>
-      </p:sp>
-      <p:sp>
-        <p:nvSpPr>
-          <p:cNvPr id="34" name="Rectangle 33"/>
-          <p:cNvSpPr/>
-          <p:nvPr/>
-        </p:nvSpPr>
-        <p:spPr>
-          <a:xfrm>
-            <a:off x="6510528" y="4096512"/>
-            <a:ext cx="4526280" cy="73152"/>
-          </a:xfrm>
-          <a:prstGeom prst="rect">
-            <a:avLst/>
-          </a:prstGeom>
-          <a:solidFill>
-            <a:srgbClr val="10B981"/>
-          </a:solidFill>
-          <a:ln>
-            <a:noFill/>
-          </a:ln>
-        </p:spPr>
-        <p:style>
-          <a:lnRef idx="1">
-            <a:schemeClr val="accent1"/>
-          </a:lnRef>
-          <a:fillRef idx="3">
-            <a:schemeClr val="accent1"/>
-          </a:fillRef>
-          <a:effectRef idx="2">
-            <a:schemeClr val="accent1"/>
-          </a:effectRef>
-          <a:fontRef idx="minor">
-            <a:schemeClr val="lt1"/>
-          </a:fontRef>
-        </p:style>
-        <p:txBody>
-          <a:bodyPr rtlCol="0" anchor="ctr"/>
-          <a:lstStyle/>
-          <a:p>
-            <a:pPr algn="ctr"/>
-          </a:p>
-        </p:txBody>
-      </p:sp>
-      <p:sp>
-        <p:nvSpPr>
-          <p:cNvPr id="35" name="Rectangle 34"/>
-          <p:cNvSpPr/>
-          <p:nvPr/>
-        </p:nvSpPr>
-        <p:spPr>
-          <a:xfrm>
-            <a:off x="6638544" y="4215384"/>
-            <a:ext cx="4270248" cy="182880"/>
-          </a:xfrm>
-          <a:prstGeom prst="rect">
-            <a:avLst/>
-          </a:prstGeom>
-          <a:noFill/>
-          <a:ln>
-            <a:noFill/>
-          </a:ln>
-        </p:spPr>
-        <p:style>
-          <a:lnRef idx="1">
-            <a:schemeClr val="accent1"/>
-          </a:lnRef>
-          <a:fillRef idx="3">
-            <a:schemeClr val="accent1"/>
-          </a:fillRef>
-          <a:effectRef idx="2">
-            <a:schemeClr val="accent1"/>
-          </a:effectRef>
-          <a:fontRef idx="minor">
-            <a:schemeClr val="lt1"/>
-          </a:fontRef>
-        </p:style>
-        <p:txBody>
-          <a:bodyPr rtlCol="0" anchor="ctr" wrap="square" lIns="9144" rIns="9144" tIns="9144" bIns="9144">
-            <a:normAutofit/>
-          </a:bodyPr>
-          <a:lstStyle/>
-          <a:p>
-            <a:pPr algn="l">
-              <a:spcAft>
-                <a:spcPts val="200"/>
-              </a:spcAft>
-            </a:pPr>
-            <a:r>
-              <a:rPr sz="800" b="1">
-                <a:solidFill>
-                  <a:srgbClr val="606E80"/>
-                </a:solidFill>
-                <a:latin typeface="Noto Sans CJK KR"/>
-              </a:rPr>
-              <a:t>Feature Distribution</a:t>
-            </a:r>
-          </a:p>
-        </p:txBody>
-      </p:sp>
-      <p:pic>
-        <p:nvPicPr>
-          <p:cNvPr id="36" name="Picture 35" descr="ai4i_feature_distribution.png"/>
-          <p:cNvPicPr>
-            <a:picLocks noChangeAspect="1"/>
-          </p:cNvPicPr>
-          <p:nvPr/>
-        </p:nvPicPr>
-        <p:blipFill>
-          <a:blip r:embed="rId5"/>
-          <a:stretch>
-            <a:fillRect/>
-          </a:stretch>
-        </p:blipFill>
-        <p:spPr>
-          <a:xfrm>
-            <a:off x="6620256" y="4630091"/>
-            <a:ext cx="4306824" cy="1182265"/>
-          </a:xfrm>
-          <a:prstGeom prst="rect">
-            <a:avLst/>
-          </a:prstGeom>
-        </p:spPr>
-      </p:pic>
+              <a:t>수업자료 연결: 데이터 전처리, 지도학습 분류, 이상 탐지, 성능 평가, 시각화를 실제 프로젝트 흐름으로 구현</a:t>
+            </a:r>
+          </a:p>
+        </p:txBody>
+      </p:sp>
     </p:spTree>
   </p:cSld>
   <p:clrMapOvr>
